--- a/modulo-03/03.06 - Usando Code Pushdown em CDS Views (Expressões SQL)/03.06_Code_pushdown_em_CDS_views.pptx
+++ b/modulo-03/03.06 - Usando Code Pushdown em CDS Views (Expressões SQL)/03.06_Code_pushdown_em_CDS_views.pptx
@@ -1906,7 +1906,7 @@
                   <a:srgbClr val="8FA3C7"/>
                 </a:solidFill>
               </a:rPr>
-              <a:t>ABAP Moderno · Módulo 02 — Modelagem de Dados com Dicionário e CDS  ·  Aula 6 de 7 — Code pushdown em CDS</a:t>
+              <a:t>ABAP Moderno · Módulo 03 — Modelagem de Dados com Dicionário e CDS  ·  Aula 6 de 7 — Code pushdown em CDS</a:t>
             </a:r>
             <a:endParaRPr lang="en-US" sz="900" dirty="0"/>
           </a:p>
@@ -2052,7 +2052,7 @@
                   <a:srgbClr val="556B82"/>
                 </a:solidFill>
               </a:rPr>
-              <a:t>ABAP Moderno · Módulo 02 — Modelagem de Dados com Dicionário e CDS  ·  Aula 6 de 7 — Code pushdown em CDS</a:t>
+              <a:t>ABAP Moderno · Módulo 03 — Modelagem de Dados com Dicionário e CDS  ·  Aula 6 de 7 — Code pushdown em CDS</a:t>
             </a:r>
             <a:endParaRPr lang="en-US" sz="900" dirty="0"/>
           </a:p>
@@ -2483,7 +2483,7 @@
                   <a:srgbClr val="89D1FF"/>
                 </a:solidFill>
               </a:rPr>
-              <a:t>MÓDULO 02 · AULA 06 DE 07</a:t>
+              <a:t>MÓDULO 03 · AULA 06 DE 07</a:t>
             </a:r>
             <a:endParaRPr lang="en-US" sz="1400" dirty="0"/>
           </a:p>
@@ -2825,7 +2825,7 @@
                   <a:srgbClr val="8FA3C7"/>
                 </a:solidFill>
               </a:rPr>
-              <a:t>ABAP Moderno · Módulo 02 — Modelagem de Dados com Dicionário e CDS · Design System SAP Horizon</a:t>
+              <a:t>ABAP Moderno · Módulo 03 — Modelagem de Dados com Dicionário e CDS · Design System SAP Horizon</a:t>
             </a:r>
             <a:endParaRPr lang="en-US" sz="1100" dirty="0"/>
           </a:p>
@@ -3014,7 +3014,7 @@
         <p:spPr>
           <a:xfrm>
             <a:off x="640080" y="1700784"/>
-            <a:ext cx="3086100" cy="292608"/>
+            <a:ext cx="2697480" cy="292608"/>
           </a:xfrm>
           <a:prstGeom prst="rect">
             <a:avLst/>
@@ -3034,7 +3034,7 @@
         <p:spPr>
           <a:xfrm>
             <a:off x="640080" y="1700784"/>
-            <a:ext cx="3086100" cy="27432"/>
+            <a:ext cx="2697480" cy="27432"/>
           </a:xfrm>
           <a:prstGeom prst="rect">
             <a:avLst/>
@@ -3054,7 +3054,7 @@
         <p:spPr>
           <a:xfrm>
             <a:off x="731520" y="1719072"/>
-            <a:ext cx="2903220" cy="274320"/>
+            <a:ext cx="2514600" cy="274320"/>
           </a:xfrm>
           <a:prstGeom prst="rect">
             <a:avLst/>
@@ -3075,7 +3075,7 @@
                   <a:srgbClr val="FFFFFF"/>
                 </a:solidFill>
               </a:rPr>
-              <a:t>zs4d430_c_employeeparam.ddls.asddls</a:t>
+              <a:t>zc_pc_pedido_moeda.ddls.asddls</a:t>
             </a:r>
             <a:endParaRPr lang="en-US" sz="950" dirty="0"/>
           </a:p>
@@ -3111,7 +3111,7 @@
                   <a:srgbClr val="9DA5B4"/>
                 </a:solidFill>
               </a:rPr>
-              <a:t>ZS4D430_## › Core Data Services</a:t>
+              <a:t>Exemplo sobre ZR_PC_PEDIDO</a:t>
             </a:r>
             <a:endParaRPr lang="en-US" sz="850" dirty="0"/>
           </a:p>
@@ -3457,6 +3457,26 @@
             </a:r>
             <a:endParaRPr lang="en-US" sz="950" dirty="0"/>
           </a:p>
+          <a:p>
+            <a:pPr algn="r" indent="0" marL="0">
+              <a:lnSpc>
+                <a:spcPct val="105000"/>
+              </a:lnSpc>
+              <a:buNone/>
+            </a:pPr>
+            <a:r>
+              <a:rPr lang="en-US" sz="950" dirty="0">
+                <a:solidFill>
+                  <a:srgbClr val="6E7681"/>
+                </a:solidFill>
+                <a:latin typeface="Courier New" pitchFamily="34" charset="0"/>
+                <a:ea typeface="Courier New" pitchFamily="34" charset="-122"/>
+                <a:cs typeface="Courier New" pitchFamily="34" charset="-120"/>
+              </a:rPr>
+              <a:t>17</a:t>
+            </a:r>
+            <a:endParaRPr lang="en-US" sz="950" dirty="0"/>
+          </a:p>
         </p:txBody>
       </p:sp>
       <p:sp>
@@ -3561,7 +3581,7 @@
                 <a:ea typeface="Courier New" pitchFamily="34" charset="-122"/>
                 <a:cs typeface="Courier New" pitchFamily="34" charset="-120"/>
               </a:rPr>
-              <a:t>ZS4D430_C_EmployeeParam</a:t>
+              <a:t>ZC_PC_PEDIDO_MOEDA</a:t>
             </a:r>
             <a:endParaRPr lang="en-US" sz="950" dirty="0"/>
           </a:p>
@@ -3645,7 +3665,7 @@
                 <a:ea typeface="Courier New" pitchFamily="34" charset="-122"/>
                 <a:cs typeface="Courier New" pitchFamily="34" charset="-120"/>
               </a:rPr>
-              <a:t>p_target_currency</a:t>
+              <a:t>p_moeda</a:t>
             </a:r>
             <a:r>
               <a:rPr lang="en-US" sz="950" dirty="0">
@@ -3689,7 +3709,29 @@
                 <a:ea typeface="Courier New" pitchFamily="34" charset="-122"/>
                 <a:cs typeface="Courier New" pitchFamily="34" charset="-120"/>
               </a:rPr>
-              <a:t>/dmo/currency_code</a:t>
+              <a:t>abap</a:t>
+            </a:r>
+            <a:r>
+              <a:rPr lang="en-US" sz="950" dirty="0">
+                <a:solidFill>
+                  <a:srgbClr val="CCCCCC"/>
+                </a:solidFill>
+                <a:latin typeface="Courier New" pitchFamily="34" charset="0"/>
+                <a:ea typeface="Courier New" pitchFamily="34" charset="-122"/>
+                <a:cs typeface="Courier New" pitchFamily="34" charset="-120"/>
+              </a:rPr>
+              <a:t>.</a:t>
+            </a:r>
+            <a:r>
+              <a:rPr lang="en-US" sz="950" dirty="0">
+                <a:solidFill>
+                  <a:srgbClr val="CCCCCC"/>
+                </a:solidFill>
+                <a:latin typeface="Courier New" pitchFamily="34" charset="0"/>
+                <a:ea typeface="Courier New" pitchFamily="34" charset="-122"/>
+                <a:cs typeface="Courier New" pitchFamily="34" charset="-120"/>
+              </a:rPr>
+              <a:t>cuky</a:t>
             </a:r>
             <a:r>
               <a:rPr lang="en-US" sz="950" dirty="0">
@@ -3731,18 +3773,18 @@
                 <a:ea typeface="Courier New" pitchFamily="34" charset="-122"/>
                 <a:cs typeface="Courier New" pitchFamily="34" charset="-120"/>
               </a:rPr>
-              <a:t>p_date</a:t>
-            </a:r>
-            <a:r>
-              <a:rPr lang="en-US" sz="950" dirty="0">
-                <a:solidFill>
-                  <a:srgbClr val="CCCCCC"/>
-                </a:solidFill>
-                <a:latin typeface="Courier New" pitchFamily="34" charset="0"/>
-                <a:ea typeface="Courier New" pitchFamily="34" charset="-122"/>
-                <a:cs typeface="Courier New" pitchFamily="34" charset="-120"/>
-              </a:rPr>
-              <a:t>            </a:t>
+              <a:t>p_data</a:t>
+            </a:r>
+            <a:r>
+              <a:rPr lang="en-US" sz="950" dirty="0">
+                <a:solidFill>
+                  <a:srgbClr val="CCCCCC"/>
+                </a:solidFill>
+                <a:latin typeface="Courier New" pitchFamily="34" charset="0"/>
+                <a:ea typeface="Courier New" pitchFamily="34" charset="-122"/>
+                <a:cs typeface="Courier New" pitchFamily="34" charset="-120"/>
+              </a:rPr>
+              <a:t>  </a:t>
             </a:r>
             <a:r>
               <a:rPr lang="en-US" sz="950" dirty="0">
@@ -3894,7 +3936,7 @@
                 <a:ea typeface="Courier New" pitchFamily="34" charset="-122"/>
                 <a:cs typeface="Courier New" pitchFamily="34" charset="-120"/>
               </a:rPr>
-              <a:t>ZS4D430_R_Employee</a:t>
+              <a:t>ZR_PC_PEDIDO</a:t>
             </a:r>
             <a:endParaRPr lang="en-US" sz="950" dirty="0"/>
           </a:p>
@@ -3967,7 +4009,7 @@
                 <a:ea typeface="Courier New" pitchFamily="34" charset="-122"/>
                 <a:cs typeface="Courier New" pitchFamily="34" charset="-120"/>
               </a:rPr>
-              <a:t>EmployeeId</a:t>
+              <a:t>PedidoUUID</a:t>
             </a:r>
             <a:r>
               <a:rPr lang="en-US" sz="950" dirty="0">
@@ -4003,46 +4045,24 @@
             <a:r>
               <a:rPr lang="en-US" sz="950" dirty="0">
                 <a:solidFill>
-                  <a:srgbClr val="4EC9B0"/>
-                </a:solidFill>
-                <a:latin typeface="Courier New" pitchFamily="34" charset="0"/>
-                <a:ea typeface="Courier New" pitchFamily="34" charset="-122"/>
-                <a:cs typeface="Courier New" pitchFamily="34" charset="-120"/>
-              </a:rPr>
-              <a:t>@Semantics.amount.currencyCode</a:t>
-            </a:r>
-            <a:r>
-              <a:rPr lang="en-US" sz="950" dirty="0">
-                <a:solidFill>
-                  <a:srgbClr val="CCCCCC"/>
-                </a:solidFill>
-                <a:latin typeface="Courier New" pitchFamily="34" charset="0"/>
-                <a:ea typeface="Courier New" pitchFamily="34" charset="-122"/>
-                <a:cs typeface="Courier New" pitchFamily="34" charset="-120"/>
-              </a:rPr>
-              <a:t>:</a:t>
-            </a:r>
-            <a:r>
-              <a:rPr lang="en-US" sz="950" dirty="0">
-                <a:solidFill>
-                  <a:srgbClr val="CCCCCC"/>
-                </a:solidFill>
-                <a:latin typeface="Courier New" pitchFamily="34" charset="0"/>
-                <a:ea typeface="Courier New" pitchFamily="34" charset="-122"/>
-                <a:cs typeface="Courier New" pitchFamily="34" charset="-120"/>
-              </a:rPr>
-              <a:t> </a:t>
-            </a:r>
-            <a:r>
-              <a:rPr lang="en-US" sz="950" dirty="0">
-                <a:solidFill>
-                  <a:srgbClr val="CE9178"/>
-                </a:solidFill>
-                <a:latin typeface="Courier New" pitchFamily="34" charset="0"/>
-                <a:ea typeface="Courier New" pitchFamily="34" charset="-122"/>
-                <a:cs typeface="Courier New" pitchFamily="34" charset="-120"/>
-              </a:rPr>
-              <a:t>'TargetCurrency'</a:t>
+                  <a:srgbClr val="CCCCCC"/>
+                </a:solidFill>
+                <a:latin typeface="Courier New" pitchFamily="34" charset="0"/>
+                <a:ea typeface="Courier New" pitchFamily="34" charset="-122"/>
+                <a:cs typeface="Courier New" pitchFamily="34" charset="-120"/>
+              </a:rPr>
+              <a:t>NumeroPedido</a:t>
+            </a:r>
+            <a:r>
+              <a:rPr lang="en-US" sz="950" dirty="0">
+                <a:solidFill>
+                  <a:srgbClr val="CCCCCC"/>
+                </a:solidFill>
+                <a:latin typeface="Courier New" pitchFamily="34" charset="0"/>
+                <a:ea typeface="Courier New" pitchFamily="34" charset="-122"/>
+                <a:cs typeface="Courier New" pitchFamily="34" charset="-120"/>
+              </a:rPr>
+              <a:t>,</a:t>
             </a:r>
             <a:endParaRPr lang="en-US" sz="950" dirty="0"/>
           </a:p>
@@ -4067,24 +4087,24 @@
             <a:r>
               <a:rPr lang="en-US" sz="950" dirty="0">
                 <a:solidFill>
-                  <a:srgbClr val="DCDCAA"/>
-                </a:solidFill>
-                <a:latin typeface="Courier New" pitchFamily="34" charset="0"/>
-                <a:ea typeface="Courier New" pitchFamily="34" charset="-122"/>
-                <a:cs typeface="Courier New" pitchFamily="34" charset="-120"/>
-              </a:rPr>
-              <a:t>currency_conversion</a:t>
-            </a:r>
-            <a:r>
-              <a:rPr lang="en-US" sz="950" dirty="0">
-                <a:solidFill>
-                  <a:srgbClr val="CCCCCC"/>
-                </a:solidFill>
-                <a:latin typeface="Courier New" pitchFamily="34" charset="0"/>
-                <a:ea typeface="Courier New" pitchFamily="34" charset="-122"/>
-                <a:cs typeface="Courier New" pitchFamily="34" charset="-120"/>
-              </a:rPr>
-              <a:t>(</a:t>
+                  <a:srgbClr val="4EC9B0"/>
+                </a:solidFill>
+                <a:latin typeface="Courier New" pitchFamily="34" charset="0"/>
+                <a:ea typeface="Courier New" pitchFamily="34" charset="-122"/>
+                <a:cs typeface="Courier New" pitchFamily="34" charset="-120"/>
+              </a:rPr>
+              <a:t>@Semantics.amount.currencyCode</a:t>
+            </a:r>
+            <a:r>
+              <a:rPr lang="en-US" sz="950" dirty="0">
+                <a:solidFill>
+                  <a:srgbClr val="CCCCCC"/>
+                </a:solidFill>
+                <a:latin typeface="Courier New" pitchFamily="34" charset="0"/>
+                <a:ea typeface="Courier New" pitchFamily="34" charset="-122"/>
+                <a:cs typeface="Courier New" pitchFamily="34" charset="-120"/>
+              </a:rPr>
+              <a:t>:</a:t>
             </a:r>
             <a:r>
               <a:rPr lang="en-US" sz="950" dirty="0">
@@ -4100,79 +4120,13 @@
             <a:r>
               <a:rPr lang="en-US" sz="950" dirty="0">
                 <a:solidFill>
-                  <a:srgbClr val="CCCCCC"/>
-                </a:solidFill>
-                <a:latin typeface="Courier New" pitchFamily="34" charset="0"/>
-                <a:ea typeface="Courier New" pitchFamily="34" charset="-122"/>
-                <a:cs typeface="Courier New" pitchFamily="34" charset="-120"/>
-              </a:rPr>
-              <a:t>amount</a:t>
-            </a:r>
-            <a:r>
-              <a:rPr lang="en-US" sz="950" dirty="0">
-                <a:solidFill>
-                  <a:srgbClr val="CCCCCC"/>
-                </a:solidFill>
-                <a:latin typeface="Courier New" pitchFamily="34" charset="0"/>
-                <a:ea typeface="Courier New" pitchFamily="34" charset="-122"/>
-                <a:cs typeface="Courier New" pitchFamily="34" charset="-120"/>
-              </a:rPr>
-              <a:t>             </a:t>
-            </a:r>
-            <a:r>
-              <a:rPr lang="en-US" sz="950" dirty="0">
-                <a:solidFill>
-                  <a:srgbClr val="CCCCCC"/>
-                </a:solidFill>
-                <a:latin typeface="Courier New" pitchFamily="34" charset="0"/>
-                <a:ea typeface="Courier New" pitchFamily="34" charset="-122"/>
-                <a:cs typeface="Courier New" pitchFamily="34" charset="-120"/>
-              </a:rPr>
-              <a:t>=</a:t>
-            </a:r>
-            <a:r>
-              <a:rPr lang="en-US" sz="950" dirty="0">
-                <a:solidFill>
-                  <a:srgbClr val="CCCCCC"/>
-                </a:solidFill>
-                <a:latin typeface="Courier New" pitchFamily="34" charset="0"/>
-                <a:ea typeface="Courier New" pitchFamily="34" charset="-122"/>
-                <a:cs typeface="Courier New" pitchFamily="34" charset="-120"/>
-              </a:rPr>
-              <a:t>&gt;</a:t>
-            </a:r>
-            <a:r>
-              <a:rPr lang="en-US" sz="950" dirty="0">
-                <a:solidFill>
-                  <a:srgbClr val="CCCCCC"/>
-                </a:solidFill>
-                <a:latin typeface="Courier New" pitchFamily="34" charset="0"/>
-                <a:ea typeface="Courier New" pitchFamily="34" charset="-122"/>
-                <a:cs typeface="Courier New" pitchFamily="34" charset="-120"/>
-              </a:rPr>
-              <a:t> </a:t>
-            </a:r>
-            <a:r>
-              <a:rPr lang="en-US" sz="950" dirty="0">
-                <a:solidFill>
-                  <a:srgbClr val="CCCCCC"/>
-                </a:solidFill>
-                <a:latin typeface="Courier New" pitchFamily="34" charset="0"/>
-                <a:ea typeface="Courier New" pitchFamily="34" charset="-122"/>
-                <a:cs typeface="Courier New" pitchFamily="34" charset="-120"/>
-              </a:rPr>
-              <a:t>AnnualSalary</a:t>
-            </a:r>
-            <a:r>
-              <a:rPr lang="en-US" sz="950" dirty="0">
-                <a:solidFill>
-                  <a:srgbClr val="CCCCCC"/>
-                </a:solidFill>
-                <a:latin typeface="Courier New" pitchFamily="34" charset="0"/>
-                <a:ea typeface="Courier New" pitchFamily="34" charset="-122"/>
-                <a:cs typeface="Courier New" pitchFamily="34" charset="-120"/>
-              </a:rPr>
-              <a:t>,</a:t>
+                  <a:srgbClr val="CE9178"/>
+                </a:solidFill>
+                <a:latin typeface="Courier New" pitchFamily="34" charset="0"/>
+                <a:ea typeface="Courier New" pitchFamily="34" charset="-122"/>
+                <a:cs typeface="Courier New" pitchFamily="34" charset="-120"/>
+              </a:rPr>
+              <a:t>'MoedaDestino'</a:t>
             </a:r>
             <a:endParaRPr lang="en-US" sz="950" dirty="0"/>
           </a:p>
@@ -4192,29 +4146,62 @@
                 <a:ea typeface="Courier New" pitchFamily="34" charset="-122"/>
                 <a:cs typeface="Courier New" pitchFamily="34" charset="-120"/>
               </a:rPr>
-              <a:t>                           </a:t>
-            </a:r>
-            <a:r>
-              <a:rPr lang="en-US" sz="950" dirty="0">
-                <a:solidFill>
-                  <a:srgbClr val="CCCCCC"/>
-                </a:solidFill>
-                <a:latin typeface="Courier New" pitchFamily="34" charset="0"/>
-                <a:ea typeface="Courier New" pitchFamily="34" charset="-122"/>
-                <a:cs typeface="Courier New" pitchFamily="34" charset="-120"/>
-              </a:rPr>
-              <a:t>source_currency</a:t>
-            </a:r>
-            <a:r>
-              <a:rPr lang="en-US" sz="950" dirty="0">
-                <a:solidFill>
-                  <a:srgbClr val="CCCCCC"/>
-                </a:solidFill>
-                <a:latin typeface="Courier New" pitchFamily="34" charset="0"/>
-                <a:ea typeface="Courier New" pitchFamily="34" charset="-122"/>
-                <a:cs typeface="Courier New" pitchFamily="34" charset="-120"/>
-              </a:rPr>
-              <a:t>    </a:t>
+              <a:t>      </a:t>
+            </a:r>
+            <a:r>
+              <a:rPr lang="en-US" sz="950" dirty="0">
+                <a:solidFill>
+                  <a:srgbClr val="DCDCAA"/>
+                </a:solidFill>
+                <a:latin typeface="Courier New" pitchFamily="34" charset="0"/>
+                <a:ea typeface="Courier New" pitchFamily="34" charset="-122"/>
+                <a:cs typeface="Courier New" pitchFamily="34" charset="-120"/>
+              </a:rPr>
+              <a:t>currency_conversion</a:t>
+            </a:r>
+            <a:r>
+              <a:rPr lang="en-US" sz="950" dirty="0">
+                <a:solidFill>
+                  <a:srgbClr val="CCCCCC"/>
+                </a:solidFill>
+                <a:latin typeface="Courier New" pitchFamily="34" charset="0"/>
+                <a:ea typeface="Courier New" pitchFamily="34" charset="-122"/>
+                <a:cs typeface="Courier New" pitchFamily="34" charset="-120"/>
+              </a:rPr>
+              <a:t>(</a:t>
+            </a:r>
+            <a:r>
+              <a:rPr lang="en-US" sz="950" dirty="0">
+                <a:solidFill>
+                  <a:srgbClr val="CCCCCC"/>
+                </a:solidFill>
+                <a:latin typeface="Courier New" pitchFamily="34" charset="0"/>
+                <a:ea typeface="Courier New" pitchFamily="34" charset="-122"/>
+                <a:cs typeface="Courier New" pitchFamily="34" charset="-120"/>
+              </a:rPr>
+              <a:t> </a:t>
+            </a:r>
+            <a:r>
+              <a:rPr lang="en-US" sz="950" dirty="0">
+                <a:solidFill>
+                  <a:srgbClr val="CCCCCC"/>
+                </a:solidFill>
+                <a:latin typeface="Courier New" pitchFamily="34" charset="0"/>
+                <a:ea typeface="Courier New" pitchFamily="34" charset="-122"/>
+                <a:cs typeface="Courier New" pitchFamily="34" charset="-120"/>
+              </a:rPr>
+              <a:t>amount</a:t>
+            </a:r>
+            <a:r>
+              <a:rPr lang="en-US" sz="950" dirty="0">
+                <a:solidFill>
+                  <a:srgbClr val="CCCCCC"/>
+                </a:solidFill>
+                <a:latin typeface="Courier New" pitchFamily="34" charset="0"/>
+                <a:ea typeface="Courier New" pitchFamily="34" charset="-122"/>
+                <a:cs typeface="Courier New" pitchFamily="34" charset="-120"/>
+              </a:rPr>
+              <a:t>             </a:t>
             </a:r>
             <a:r>
               <a:rPr lang="en-US" sz="950" dirty="0">
@@ -4258,7 +4245,7 @@
                 <a:ea typeface="Courier New" pitchFamily="34" charset="-122"/>
                 <a:cs typeface="Courier New" pitchFamily="34" charset="-120"/>
               </a:rPr>
-              <a:t>CurrencyCode</a:t>
+              <a:t>ValorTotal</a:t>
             </a:r>
             <a:r>
               <a:rPr lang="en-US" sz="950" dirty="0">
@@ -4300,7 +4287,7 @@
                 <a:ea typeface="Courier New" pitchFamily="34" charset="-122"/>
                 <a:cs typeface="Courier New" pitchFamily="34" charset="-120"/>
               </a:rPr>
-              <a:t>target_currency</a:t>
+              <a:t>source_currency</a:t>
             </a:r>
             <a:r>
               <a:rPr lang="en-US" sz="950" dirty="0">
@@ -4349,13 +4336,13 @@
             <a:r>
               <a:rPr lang="en-US" sz="950" dirty="0">
                 <a:solidFill>
-                  <a:srgbClr val="C586C0"/>
-                </a:solidFill>
-                <a:latin typeface="Courier New" pitchFamily="34" charset="0"/>
-                <a:ea typeface="Courier New" pitchFamily="34" charset="-122"/>
-                <a:cs typeface="Courier New" pitchFamily="34" charset="-120"/>
-              </a:rPr>
-              <a:t>$parameters.p_target_currency</a:t>
+                  <a:srgbClr val="CCCCCC"/>
+                </a:solidFill>
+                <a:latin typeface="Courier New" pitchFamily="34" charset="0"/>
+                <a:ea typeface="Courier New" pitchFamily="34" charset="-122"/>
+                <a:cs typeface="Courier New" pitchFamily="34" charset="-120"/>
+              </a:rPr>
+              <a:t>Currency</a:t>
             </a:r>
             <a:r>
               <a:rPr lang="en-US" sz="950" dirty="0">
@@ -4397,7 +4384,40 @@
                 <a:ea typeface="Courier New" pitchFamily="34" charset="-122"/>
                 <a:cs typeface="Courier New" pitchFamily="34" charset="-120"/>
               </a:rPr>
-              <a:t>exchange_rate_date</a:t>
+              <a:t>target_currency</a:t>
+            </a:r>
+            <a:r>
+              <a:rPr lang="en-US" sz="950" dirty="0">
+                <a:solidFill>
+                  <a:srgbClr val="CCCCCC"/>
+                </a:solidFill>
+                <a:latin typeface="Courier New" pitchFamily="34" charset="0"/>
+                <a:ea typeface="Courier New" pitchFamily="34" charset="-122"/>
+                <a:cs typeface="Courier New" pitchFamily="34" charset="-120"/>
+              </a:rPr>
+              <a:t>    </a:t>
+            </a:r>
+            <a:r>
+              <a:rPr lang="en-US" sz="950" dirty="0">
+                <a:solidFill>
+                  <a:srgbClr val="CCCCCC"/>
+                </a:solidFill>
+                <a:latin typeface="Courier New" pitchFamily="34" charset="0"/>
+                <a:ea typeface="Courier New" pitchFamily="34" charset="-122"/>
+                <a:cs typeface="Courier New" pitchFamily="34" charset="-120"/>
+              </a:rPr>
+              <a:t>=</a:t>
+            </a:r>
+            <a:r>
+              <a:rPr lang="en-US" sz="950" dirty="0">
+                <a:solidFill>
+                  <a:srgbClr val="CCCCCC"/>
+                </a:solidFill>
+                <a:latin typeface="Courier New" pitchFamily="34" charset="0"/>
+                <a:ea typeface="Courier New" pitchFamily="34" charset="-122"/>
+                <a:cs typeface="Courier New" pitchFamily="34" charset="-120"/>
+              </a:rPr>
+              <a:t>&gt;</a:t>
             </a:r>
             <a:r>
               <a:rPr lang="en-US" sz="950" dirty="0">
@@ -4413,68 +4433,24 @@
             <a:r>
               <a:rPr lang="en-US" sz="950" dirty="0">
                 <a:solidFill>
-                  <a:srgbClr val="CCCCCC"/>
-                </a:solidFill>
-                <a:latin typeface="Courier New" pitchFamily="34" charset="0"/>
-                <a:ea typeface="Courier New" pitchFamily="34" charset="-122"/>
-                <a:cs typeface="Courier New" pitchFamily="34" charset="-120"/>
-              </a:rPr>
-              <a:t>=</a:t>
-            </a:r>
-            <a:r>
-              <a:rPr lang="en-US" sz="950" dirty="0">
-                <a:solidFill>
-                  <a:srgbClr val="CCCCCC"/>
-                </a:solidFill>
-                <a:latin typeface="Courier New" pitchFamily="34" charset="0"/>
-                <a:ea typeface="Courier New" pitchFamily="34" charset="-122"/>
-                <a:cs typeface="Courier New" pitchFamily="34" charset="-120"/>
-              </a:rPr>
-              <a:t>&gt;</a:t>
-            </a:r>
-            <a:r>
-              <a:rPr lang="en-US" sz="950" dirty="0">
-                <a:solidFill>
-                  <a:srgbClr val="CCCCCC"/>
-                </a:solidFill>
-                <a:latin typeface="Courier New" pitchFamily="34" charset="0"/>
-                <a:ea typeface="Courier New" pitchFamily="34" charset="-122"/>
-                <a:cs typeface="Courier New" pitchFamily="34" charset="-120"/>
-              </a:rPr>
-              <a:t> </a:t>
-            </a:r>
-            <a:r>
-              <a:rPr lang="en-US" sz="950" dirty="0">
-                <a:solidFill>
                   <a:srgbClr val="C586C0"/>
                 </a:solidFill>
                 <a:latin typeface="Courier New" pitchFamily="34" charset="0"/>
                 <a:ea typeface="Courier New" pitchFamily="34" charset="-122"/>
                 <a:cs typeface="Courier New" pitchFamily="34" charset="-120"/>
               </a:rPr>
-              <a:t>$parameters.p_date</a:t>
-            </a:r>
-            <a:r>
-              <a:rPr lang="en-US" sz="950" dirty="0">
-                <a:solidFill>
-                  <a:srgbClr val="CCCCCC"/>
-                </a:solidFill>
-                <a:latin typeface="Courier New" pitchFamily="34" charset="0"/>
-                <a:ea typeface="Courier New" pitchFamily="34" charset="-122"/>
-                <a:cs typeface="Courier New" pitchFamily="34" charset="-120"/>
-              </a:rPr>
-              <a:t> </a:t>
-            </a:r>
-            <a:r>
-              <a:rPr lang="en-US" sz="950" dirty="0">
-                <a:solidFill>
-                  <a:srgbClr val="CCCCCC"/>
-                </a:solidFill>
-                <a:latin typeface="Courier New" pitchFamily="34" charset="0"/>
-                <a:ea typeface="Courier New" pitchFamily="34" charset="-122"/>
-                <a:cs typeface="Courier New" pitchFamily="34" charset="-120"/>
-              </a:rPr>
-              <a:t>)</a:t>
+              <a:t>$parameters.p_moeda</a:t>
+            </a:r>
+            <a:r>
+              <a:rPr lang="en-US" sz="950" dirty="0">
+                <a:solidFill>
+                  <a:srgbClr val="CCCCCC"/>
+                </a:solidFill>
+                <a:latin typeface="Courier New" pitchFamily="34" charset="0"/>
+                <a:ea typeface="Courier New" pitchFamily="34" charset="-122"/>
+                <a:cs typeface="Courier New" pitchFamily="34" charset="-120"/>
+              </a:rPr>
+              <a:t>,</a:t>
             </a:r>
             <a:endParaRPr lang="en-US" sz="950" dirty="0"/>
           </a:p>
@@ -4494,18 +4470,18 @@
                 <a:ea typeface="Courier New" pitchFamily="34" charset="-122"/>
                 <a:cs typeface="Courier New" pitchFamily="34" charset="-120"/>
               </a:rPr>
-              <a:t>                                            </a:t>
-            </a:r>
-            <a:r>
-              <a:rPr lang="en-US" sz="950" dirty="0">
-                <a:solidFill>
-                  <a:srgbClr val="569CD6"/>
-                </a:solidFill>
-                <a:latin typeface="Courier New" pitchFamily="34" charset="0"/>
-                <a:ea typeface="Courier New" pitchFamily="34" charset="-122"/>
-                <a:cs typeface="Courier New" pitchFamily="34" charset="-120"/>
-              </a:rPr>
-              <a:t>as</a:t>
+              <a:t>                           </a:t>
+            </a:r>
+            <a:r>
+              <a:rPr lang="en-US" sz="950" dirty="0">
+                <a:solidFill>
+                  <a:srgbClr val="CCCCCC"/>
+                </a:solidFill>
+                <a:latin typeface="Courier New" pitchFamily="34" charset="0"/>
+                <a:ea typeface="Courier New" pitchFamily="34" charset="-122"/>
+                <a:cs typeface="Courier New" pitchFamily="34" charset="-120"/>
+              </a:rPr>
+              <a:t>exchange_rate_date</a:t>
             </a:r>
             <a:r>
               <a:rPr lang="en-US" sz="950" dirty="0">
@@ -4527,18 +4503,62 @@
                 <a:ea typeface="Courier New" pitchFamily="34" charset="-122"/>
                 <a:cs typeface="Courier New" pitchFamily="34" charset="-120"/>
               </a:rPr>
-              <a:t>AnnualSalaryConverted</a:t>
-            </a:r>
-            <a:r>
-              <a:rPr lang="en-US" sz="950" dirty="0">
-                <a:solidFill>
-                  <a:srgbClr val="CCCCCC"/>
-                </a:solidFill>
-                <a:latin typeface="Courier New" pitchFamily="34" charset="0"/>
-                <a:ea typeface="Courier New" pitchFamily="34" charset="-122"/>
-                <a:cs typeface="Courier New" pitchFamily="34" charset="-120"/>
-              </a:rPr>
-              <a:t>,</a:t>
+              <a:t>=</a:t>
+            </a:r>
+            <a:r>
+              <a:rPr lang="en-US" sz="950" dirty="0">
+                <a:solidFill>
+                  <a:srgbClr val="CCCCCC"/>
+                </a:solidFill>
+                <a:latin typeface="Courier New" pitchFamily="34" charset="0"/>
+                <a:ea typeface="Courier New" pitchFamily="34" charset="-122"/>
+                <a:cs typeface="Courier New" pitchFamily="34" charset="-120"/>
+              </a:rPr>
+              <a:t>&gt;</a:t>
+            </a:r>
+            <a:r>
+              <a:rPr lang="en-US" sz="950" dirty="0">
+                <a:solidFill>
+                  <a:srgbClr val="CCCCCC"/>
+                </a:solidFill>
+                <a:latin typeface="Courier New" pitchFamily="34" charset="0"/>
+                <a:ea typeface="Courier New" pitchFamily="34" charset="-122"/>
+                <a:cs typeface="Courier New" pitchFamily="34" charset="-120"/>
+              </a:rPr>
+              <a:t> </a:t>
+            </a:r>
+            <a:r>
+              <a:rPr lang="en-US" sz="950" dirty="0">
+                <a:solidFill>
+                  <a:srgbClr val="C586C0"/>
+                </a:solidFill>
+                <a:latin typeface="Courier New" pitchFamily="34" charset="0"/>
+                <a:ea typeface="Courier New" pitchFamily="34" charset="-122"/>
+                <a:cs typeface="Courier New" pitchFamily="34" charset="-120"/>
+              </a:rPr>
+              <a:t>$parameters.p_data</a:t>
+            </a:r>
+            <a:r>
+              <a:rPr lang="en-US" sz="950" dirty="0">
+                <a:solidFill>
+                  <a:srgbClr val="CCCCCC"/>
+                </a:solidFill>
+                <a:latin typeface="Courier New" pitchFamily="34" charset="0"/>
+                <a:ea typeface="Courier New" pitchFamily="34" charset="-122"/>
+                <a:cs typeface="Courier New" pitchFamily="34" charset="-120"/>
+              </a:rPr>
+              <a:t> </a:t>
+            </a:r>
+            <a:r>
+              <a:rPr lang="en-US" sz="950" dirty="0">
+                <a:solidFill>
+                  <a:srgbClr val="CCCCCC"/>
+                </a:solidFill>
+                <a:latin typeface="Courier New" pitchFamily="34" charset="0"/>
+                <a:ea typeface="Courier New" pitchFamily="34" charset="-122"/>
+                <a:cs typeface="Courier New" pitchFamily="34" charset="-120"/>
+              </a:rPr>
+              <a:t>)</a:t>
             </a:r>
             <a:endParaRPr lang="en-US" sz="950" dirty="0"/>
           </a:p>
@@ -4558,29 +4578,7 @@
                 <a:ea typeface="Courier New" pitchFamily="34" charset="-122"/>
                 <a:cs typeface="Courier New" pitchFamily="34" charset="-120"/>
               </a:rPr>
-              <a:t>      </a:t>
-            </a:r>
-            <a:r>
-              <a:rPr lang="en-US" sz="950" dirty="0">
-                <a:solidFill>
-                  <a:srgbClr val="C586C0"/>
-                </a:solidFill>
-                <a:latin typeface="Courier New" pitchFamily="34" charset="0"/>
-                <a:ea typeface="Courier New" pitchFamily="34" charset="-122"/>
-                <a:cs typeface="Courier New" pitchFamily="34" charset="-120"/>
-              </a:rPr>
-              <a:t>$parameters.p_target_currency</a:t>
-            </a:r>
-            <a:r>
-              <a:rPr lang="en-US" sz="950" dirty="0">
-                <a:solidFill>
-                  <a:srgbClr val="CCCCCC"/>
-                </a:solidFill>
-                <a:latin typeface="Courier New" pitchFamily="34" charset="0"/>
-                <a:ea typeface="Courier New" pitchFamily="34" charset="-122"/>
-                <a:cs typeface="Courier New" pitchFamily="34" charset="-120"/>
-              </a:rPr>
-              <a:t>       </a:t>
+              <a:t>                                            </a:t>
             </a:r>
             <a:r>
               <a:rPr lang="en-US" sz="950" dirty="0">
@@ -4613,7 +4611,18 @@
                 <a:ea typeface="Courier New" pitchFamily="34" charset="-122"/>
                 <a:cs typeface="Courier New" pitchFamily="34" charset="-120"/>
               </a:rPr>
-              <a:t>TargetCurrency</a:t>
+              <a:t>ValorConvertido</a:t>
+            </a:r>
+            <a:r>
+              <a:rPr lang="en-US" sz="950" dirty="0">
+                <a:solidFill>
+                  <a:srgbClr val="CCCCCC"/>
+                </a:solidFill>
+                <a:latin typeface="Courier New" pitchFamily="34" charset="0"/>
+                <a:ea typeface="Courier New" pitchFamily="34" charset="-122"/>
+                <a:cs typeface="Courier New" pitchFamily="34" charset="-120"/>
+              </a:rPr>
+              <a:t>,</a:t>
             </a:r>
             <a:endParaRPr lang="en-US" sz="950" dirty="0"/>
           </a:p>
@@ -4633,7 +4642,62 @@
                 <a:ea typeface="Courier New" pitchFamily="34" charset="-122"/>
                 <a:cs typeface="Courier New" pitchFamily="34" charset="-120"/>
               </a:rPr>
-              <a:t>}</a:t>
+              <a:t>      </a:t>
+            </a:r>
+            <a:r>
+              <a:rPr lang="en-US" sz="950" dirty="0">
+                <a:solidFill>
+                  <a:srgbClr val="C586C0"/>
+                </a:solidFill>
+                <a:latin typeface="Courier New" pitchFamily="34" charset="0"/>
+                <a:ea typeface="Courier New" pitchFamily="34" charset="-122"/>
+                <a:cs typeface="Courier New" pitchFamily="34" charset="-120"/>
+              </a:rPr>
+              <a:t>$parameters.p_moeda</a:t>
+            </a:r>
+            <a:r>
+              <a:rPr lang="en-US" sz="950" dirty="0">
+                <a:solidFill>
+                  <a:srgbClr val="CCCCCC"/>
+                </a:solidFill>
+                <a:latin typeface="Courier New" pitchFamily="34" charset="0"/>
+                <a:ea typeface="Courier New" pitchFamily="34" charset="-122"/>
+                <a:cs typeface="Courier New" pitchFamily="34" charset="-120"/>
+              </a:rPr>
+              <a:t>                 </a:t>
+            </a:r>
+            <a:r>
+              <a:rPr lang="en-US" sz="950" dirty="0">
+                <a:solidFill>
+                  <a:srgbClr val="569CD6"/>
+                </a:solidFill>
+                <a:latin typeface="Courier New" pitchFamily="34" charset="0"/>
+                <a:ea typeface="Courier New" pitchFamily="34" charset="-122"/>
+                <a:cs typeface="Courier New" pitchFamily="34" charset="-120"/>
+              </a:rPr>
+              <a:t>as</a:t>
+            </a:r>
+            <a:r>
+              <a:rPr lang="en-US" sz="950" dirty="0">
+                <a:solidFill>
+                  <a:srgbClr val="CCCCCC"/>
+                </a:solidFill>
+                <a:latin typeface="Courier New" pitchFamily="34" charset="0"/>
+                <a:ea typeface="Courier New" pitchFamily="34" charset="-122"/>
+                <a:cs typeface="Courier New" pitchFamily="34" charset="-120"/>
+              </a:rPr>
+              <a:t> </a:t>
+            </a:r>
+            <a:r>
+              <a:rPr lang="en-US" sz="950" dirty="0">
+                <a:solidFill>
+                  <a:srgbClr val="CCCCCC"/>
+                </a:solidFill>
+                <a:latin typeface="Courier New" pitchFamily="34" charset="0"/>
+                <a:ea typeface="Courier New" pitchFamily="34" charset="-122"/>
+                <a:cs typeface="Courier New" pitchFamily="34" charset="-120"/>
+              </a:rPr>
+              <a:t>MoedaDestino</a:t>
             </a:r>
             <a:endParaRPr lang="en-US" sz="950" dirty="0"/>
           </a:p>
@@ -4647,6 +4711,26 @@
             <a:r>
               <a:rPr lang="en-US" sz="950" dirty="0">
                 <a:solidFill>
+                  <a:srgbClr val="CCCCCC"/>
+                </a:solidFill>
+                <a:latin typeface="Courier New" pitchFamily="34" charset="0"/>
+                <a:ea typeface="Courier New" pitchFamily="34" charset="-122"/>
+                <a:cs typeface="Courier New" pitchFamily="34" charset="-120"/>
+              </a:rPr>
+              <a:t>}</a:t>
+            </a:r>
+            <a:endParaRPr lang="en-US" sz="950" dirty="0"/>
+          </a:p>
+          <a:p>
+            <a:pPr indent="0" marL="0">
+              <a:lnSpc>
+                <a:spcPct val="105000"/>
+              </a:lnSpc>
+              <a:buNone/>
+            </a:pPr>
+            <a:r>
+              <a:rPr lang="en-US" sz="950" dirty="0">
+                <a:solidFill>
                   <a:srgbClr val="569CD6"/>
                 </a:solidFill>
                 <a:latin typeface="Courier New" pitchFamily="34" charset="0"/>
@@ -4675,7 +4759,7 @@
                 <a:ea typeface="Courier New" pitchFamily="34" charset="-122"/>
                 <a:cs typeface="Courier New" pitchFamily="34" charset="-120"/>
               </a:rPr>
-              <a:t>EntryDate</a:t>
+              <a:t>StatusPedido</a:t>
             </a:r>
             <a:r>
               <a:rPr lang="en-US" sz="950" dirty="0">
@@ -4697,17 +4781,6 @@
                 <a:ea typeface="Courier New" pitchFamily="34" charset="-122"/>
                 <a:cs typeface="Courier New" pitchFamily="34" charset="-120"/>
               </a:rPr>
-              <a:t>&lt;</a:t>
-            </a:r>
-            <a:r>
-              <a:rPr lang="en-US" sz="950" dirty="0">
-                <a:solidFill>
-                  <a:srgbClr val="CCCCCC"/>
-                </a:solidFill>
-                <a:latin typeface="Courier New" pitchFamily="34" charset="0"/>
-                <a:ea typeface="Courier New" pitchFamily="34" charset="-122"/>
-                <a:cs typeface="Courier New" pitchFamily="34" charset="-120"/>
-              </a:rPr>
               <a:t>=</a:t>
             </a:r>
             <a:r>
@@ -4724,13 +4797,13 @@
             <a:r>
               <a:rPr lang="en-US" sz="950" dirty="0">
                 <a:solidFill>
-                  <a:srgbClr val="C586C0"/>
-                </a:solidFill>
-                <a:latin typeface="Courier New" pitchFamily="34" charset="0"/>
-                <a:ea typeface="Courier New" pitchFamily="34" charset="-122"/>
-                <a:cs typeface="Courier New" pitchFamily="34" charset="-120"/>
-              </a:rPr>
-              <a:t>$parameters.p_date</a:t>
+                  <a:srgbClr val="CE9178"/>
+                </a:solidFill>
+                <a:latin typeface="Courier New" pitchFamily="34" charset="0"/>
+                <a:ea typeface="Courier New" pitchFamily="34" charset="-122"/>
+                <a:cs typeface="Courier New" pitchFamily="34" charset="-120"/>
+              </a:rPr>
+              <a:t>'FINALIZADO'</a:t>
             </a:r>
             <a:endParaRPr lang="en-US" sz="950" dirty="0"/>
           </a:p>
@@ -5438,7 +5511,7 @@
         <p:spPr>
           <a:xfrm>
             <a:off x="640080" y="2084832"/>
-            <a:ext cx="1997964" cy="292608"/>
+            <a:ext cx="1920240" cy="292608"/>
           </a:xfrm>
           <a:prstGeom prst="rect">
             <a:avLst/>
@@ -5458,7 +5531,7 @@
         <p:spPr>
           <a:xfrm>
             <a:off x="640080" y="2084832"/>
-            <a:ext cx="1997964" cy="27432"/>
+            <a:ext cx="1920240" cy="27432"/>
           </a:xfrm>
           <a:prstGeom prst="rect">
             <a:avLst/>
@@ -5478,7 +5551,7 @@
         <p:spPr>
           <a:xfrm>
             <a:off x="731520" y="2103120"/>
-            <a:ext cx="1815084" cy="274320"/>
+            <a:ext cx="1737360" cy="274320"/>
           </a:xfrm>
           <a:prstGeom prst="rect">
             <a:avLst/>
@@ -5499,7 +5572,7 @@
                   <a:srgbClr val="FFFFFF"/>
                 </a:solidFill>
               </a:rPr>
-              <a:t>zs4d430_c_report.ddls</a:t>
+              <a:t>zc_pc_relatorio.ddls</a:t>
             </a:r>
             <a:endParaRPr lang="en-US" sz="950" dirty="0"/>
           </a:p>
@@ -5749,7 +5822,7 @@
                 <a:ea typeface="Courier New" pitchFamily="34" charset="-122"/>
                 <a:cs typeface="Courier New" pitchFamily="34" charset="-120"/>
               </a:rPr>
-              <a:t>ZS4D430_C_Report</a:t>
+              <a:t>ZC_PC_RELATORIO</a:t>
             </a:r>
             <a:endParaRPr lang="en-US" sz="1050" dirty="0"/>
           </a:p>
@@ -5824,7 +5897,7 @@
                 <a:ea typeface="Courier New" pitchFamily="34" charset="-122"/>
                 <a:cs typeface="Courier New" pitchFamily="34" charset="-120"/>
               </a:rPr>
-              <a:t>p_date</a:t>
+              <a:t>p_data</a:t>
             </a:r>
             <a:r>
               <a:rPr lang="en-US" sz="1050" dirty="0">
@@ -5987,7 +6060,7 @@
                 <a:ea typeface="Courier New" pitchFamily="34" charset="-122"/>
                 <a:cs typeface="Courier New" pitchFamily="34" charset="-120"/>
               </a:rPr>
-              <a:t>ZS4D430_C_EmployeeParam</a:t>
+              <a:t>ZC_PC_PEDIDO_MOEDA</a:t>
             </a:r>
             <a:r>
               <a:rPr lang="en-US" sz="1050" dirty="0">
@@ -6029,7 +6102,7 @@
                 <a:ea typeface="Courier New" pitchFamily="34" charset="-122"/>
                 <a:cs typeface="Courier New" pitchFamily="34" charset="-120"/>
               </a:rPr>
-              <a:t>p_target_currency</a:t>
+              <a:t>p_moeda</a:t>
             </a:r>
             <a:r>
               <a:rPr lang="en-US" sz="1050" dirty="0">
@@ -6073,7 +6146,7 @@
                 <a:ea typeface="Courier New" pitchFamily="34" charset="-122"/>
                 <a:cs typeface="Courier New" pitchFamily="34" charset="-120"/>
               </a:rPr>
-              <a:t>'EUR'</a:t>
+              <a:t>'USD'</a:t>
             </a:r>
             <a:r>
               <a:rPr lang="en-US" sz="1050" dirty="0">
@@ -6115,18 +6188,18 @@
                 <a:ea typeface="Courier New" pitchFamily="34" charset="-122"/>
                 <a:cs typeface="Courier New" pitchFamily="34" charset="-120"/>
               </a:rPr>
-              <a:t>p_date</a:t>
-            </a:r>
-            <a:r>
-              <a:rPr lang="en-US" sz="1050" dirty="0">
-                <a:solidFill>
-                  <a:srgbClr val="CCCCCC"/>
-                </a:solidFill>
-                <a:latin typeface="Courier New" pitchFamily="34" charset="0"/>
-                <a:ea typeface="Courier New" pitchFamily="34" charset="-122"/>
-                <a:cs typeface="Courier New" pitchFamily="34" charset="-120"/>
-              </a:rPr>
-              <a:t>            </a:t>
+              <a:t>p_data</a:t>
+            </a:r>
+            <a:r>
+              <a:rPr lang="en-US" sz="1050" dirty="0">
+                <a:solidFill>
+                  <a:srgbClr val="CCCCCC"/>
+                </a:solidFill>
+                <a:latin typeface="Courier New" pitchFamily="34" charset="0"/>
+                <a:ea typeface="Courier New" pitchFamily="34" charset="-122"/>
+                <a:cs typeface="Courier New" pitchFamily="34" charset="-120"/>
+              </a:rPr>
+              <a:t>  </a:t>
             </a:r>
             <a:r>
               <a:rPr lang="en-US" sz="1050" dirty="0">
@@ -6159,7 +6232,7 @@
                 <a:ea typeface="Courier New" pitchFamily="34" charset="-122"/>
                 <a:cs typeface="Courier New" pitchFamily="34" charset="-120"/>
               </a:rPr>
-              <a:t>$parameters.p_date</a:t>
+              <a:t>$parameters.p_data</a:t>
             </a:r>
             <a:r>
               <a:rPr lang="en-US" sz="1050" dirty="0">
@@ -6403,7 +6476,7 @@
         <p:spPr>
           <a:xfrm>
             <a:off x="6324448" y="2084832"/>
-            <a:ext cx="1920240" cy="292608"/>
+            <a:ext cx="2386584" cy="292608"/>
           </a:xfrm>
           <a:prstGeom prst="rect">
             <a:avLst/>
@@ -6423,7 +6496,7 @@
         <p:spPr>
           <a:xfrm>
             <a:off x="6324448" y="2084832"/>
-            <a:ext cx="1920240" cy="27432"/>
+            <a:ext cx="2386584" cy="27432"/>
           </a:xfrm>
           <a:prstGeom prst="rect">
             <a:avLst/>
@@ -6443,7 +6516,7 @@
         <p:spPr>
           <a:xfrm>
             <a:off x="6415888" y="2103120"/>
-            <a:ext cx="1737360" cy="274320"/>
+            <a:ext cx="2203704" cy="274320"/>
           </a:xfrm>
           <a:prstGeom prst="rect">
             <a:avLst/>
@@ -6464,7 +6537,7 @@
                   <a:srgbClr val="FFFFFF"/>
                 </a:solidFill>
               </a:rPr>
-              <a:t>zcl_report.clas.abap</a:t>
+              <a:t>zcl_pc_relatorio.clas.abap</a:t>
             </a:r>
             <a:endParaRPr lang="en-US" sz="950" dirty="0"/>
           </a:p>
@@ -6670,7 +6743,7 @@
                 <a:ea typeface="Courier New" pitchFamily="34" charset="-122"/>
                 <a:cs typeface="Courier New" pitchFamily="34" charset="-120"/>
               </a:rPr>
-              <a:t>today</a:t>
+              <a:t>hoje</a:t>
             </a:r>
             <a:r>
               <a:rPr lang="en-US" sz="1050" dirty="0">
@@ -6844,7 +6917,7 @@
                 <a:ea typeface="Courier New" pitchFamily="34" charset="-122"/>
                 <a:cs typeface="Courier New" pitchFamily="34" charset="-120"/>
               </a:rPr>
-              <a:t>zs4d430_c_employeeparam</a:t>
+              <a:t>zc_pc_pedido_moeda</a:t>
             </a:r>
             <a:r>
               <a:rPr lang="en-US" sz="1050" dirty="0">
@@ -6886,7 +6959,7 @@
                 <a:ea typeface="Courier New" pitchFamily="34" charset="-122"/>
                 <a:cs typeface="Courier New" pitchFamily="34" charset="-120"/>
               </a:rPr>
-              <a:t>p_target_currency</a:t>
+              <a:t>p_moeda</a:t>
             </a:r>
             <a:r>
               <a:rPr lang="en-US" sz="1050" dirty="0">
@@ -6930,7 +7003,7 @@
                 <a:ea typeface="Courier New" pitchFamily="34" charset="-122"/>
                 <a:cs typeface="Courier New" pitchFamily="34" charset="-120"/>
               </a:rPr>
-              <a:t>'USD'</a:t>
+              <a:t>'EUR'</a:t>
             </a:r>
             <a:r>
               <a:rPr lang="en-US" sz="1050" dirty="0">
@@ -6972,18 +7045,18 @@
                 <a:ea typeface="Courier New" pitchFamily="34" charset="-122"/>
                 <a:cs typeface="Courier New" pitchFamily="34" charset="-120"/>
               </a:rPr>
-              <a:t>p_date</a:t>
-            </a:r>
-            <a:r>
-              <a:rPr lang="en-US" sz="1050" dirty="0">
-                <a:solidFill>
-                  <a:srgbClr val="CCCCCC"/>
-                </a:solidFill>
-                <a:latin typeface="Courier New" pitchFamily="34" charset="0"/>
-                <a:ea typeface="Courier New" pitchFamily="34" charset="-122"/>
-                <a:cs typeface="Courier New" pitchFamily="34" charset="-120"/>
-              </a:rPr>
-              <a:t>            </a:t>
+              <a:t>p_data</a:t>
+            </a:r>
+            <a:r>
+              <a:rPr lang="en-US" sz="1050" dirty="0">
+                <a:solidFill>
+                  <a:srgbClr val="CCCCCC"/>
+                </a:solidFill>
+                <a:latin typeface="Courier New" pitchFamily="34" charset="0"/>
+                <a:ea typeface="Courier New" pitchFamily="34" charset="-122"/>
+                <a:cs typeface="Courier New" pitchFamily="34" charset="-120"/>
+              </a:rPr>
+              <a:t>  </a:t>
             </a:r>
             <a:r>
               <a:rPr lang="en-US" sz="1050" dirty="0">
@@ -7027,7 +7100,7 @@
                 <a:ea typeface="Courier New" pitchFamily="34" charset="-122"/>
                 <a:cs typeface="Courier New" pitchFamily="34" charset="-120"/>
               </a:rPr>
-              <a:t>today</a:t>
+              <a:t>hoje</a:t>
             </a:r>
             <a:r>
               <a:rPr lang="en-US" sz="1050" dirty="0">
@@ -7102,7 +7175,7 @@
                 <a:ea typeface="Courier New" pitchFamily="34" charset="-122"/>
                 <a:cs typeface="Courier New" pitchFamily="34" charset="-120"/>
               </a:rPr>
-              <a:t>EmployeeId</a:t>
+              <a:t>NumeroPedido</a:t>
             </a:r>
             <a:r>
               <a:rPr lang="en-US" sz="1050" dirty="0">
@@ -7135,7 +7208,7 @@
                 <a:ea typeface="Courier New" pitchFamily="34" charset="-122"/>
                 <a:cs typeface="Courier New" pitchFamily="34" charset="-120"/>
               </a:rPr>
-              <a:t>AnnualSalaryConverted</a:t>
+              <a:t>ValorConvertido</a:t>
             </a:r>
             <a:r>
               <a:rPr lang="en-US" sz="1050" dirty="0">
@@ -7168,7 +7241,7 @@
                 <a:ea typeface="Courier New" pitchFamily="34" charset="-122"/>
                 <a:cs typeface="Courier New" pitchFamily="34" charset="-120"/>
               </a:rPr>
-              <a:t>TargetCurrency</a:t>
+              <a:t>MoedaDestino</a:t>
             </a:r>
             <a:endParaRPr lang="en-US" sz="1050" dirty="0"/>
           </a:p>
@@ -7276,7 +7349,7 @@
                 <a:ea typeface="Courier New" pitchFamily="34" charset="-122"/>
                 <a:cs typeface="Courier New" pitchFamily="34" charset="-120"/>
               </a:rPr>
-              <a:t>salaries</a:t>
+              <a:t>pedidos</a:t>
             </a:r>
             <a:r>
               <a:rPr lang="en-US" sz="1050" dirty="0">
@@ -7481,7 +7554,7 @@
                   <a:srgbClr val="89D1FF"/>
                 </a:solidFill>
               </a:rPr>
-              <a:t>AULA 02.06 · SEÇÃO 4</a:t>
+              <a:t>AULA 03.06 · SEÇÃO 4</a:t>
             </a:r>
             <a:endParaRPr lang="en-US" sz="1300" dirty="0"/>
           </a:p>
@@ -7983,7 +8056,7 @@
                   <a:srgbClr val="1D2D3E"/>
                 </a:solidFill>
               </a:rPr>
-              <a:t>Totais por departamento com GROUP BY</a:t>
+              <a:t>Totais por status do pedido com GROUP BY</a:t>
             </a:r>
             <a:endParaRPr lang="en-US" sz="2800" dirty="0"/>
           </a:p>
@@ -8047,7 +8120,7 @@
         <p:spPr>
           <a:xfrm>
             <a:off x="640080" y="1700784"/>
-            <a:ext cx="2775204" cy="292608"/>
+            <a:ext cx="2852928" cy="292608"/>
           </a:xfrm>
           <a:prstGeom prst="rect">
             <a:avLst/>
@@ -8067,7 +8140,7 @@
         <p:spPr>
           <a:xfrm>
             <a:off x="640080" y="1700784"/>
-            <a:ext cx="2775204" cy="27432"/>
+            <a:ext cx="2852928" cy="27432"/>
           </a:xfrm>
           <a:prstGeom prst="rect">
             <a:avLst/>
@@ -8087,7 +8160,7 @@
         <p:spPr>
           <a:xfrm>
             <a:off x="731520" y="1719072"/>
-            <a:ext cx="2592324" cy="274320"/>
+            <a:ext cx="2670048" cy="274320"/>
           </a:xfrm>
           <a:prstGeom prst="rect">
             <a:avLst/>
@@ -8108,7 +8181,7 @@
                   <a:srgbClr val="FFFFFF"/>
                 </a:solidFill>
               </a:rPr>
-              <a:t>zs4d430_c_depsalary.ddls.asddls</a:t>
+              <a:t>zc_pc_pedidos_status.ddls.asddls</a:t>
             </a:r>
             <a:endParaRPr lang="en-US" sz="950" dirty="0"/>
           </a:p>
@@ -8144,7 +8217,7 @@
                   <a:srgbClr val="9DA5B4"/>
                 </a:solidFill>
               </a:rPr>
-              <a:t>ZS4D430_## › Core Data Services</a:t>
+              <a:t>Exemplo sobre ZR_PC_PEDIDO</a:t>
             </a:r>
             <a:endParaRPr lang="en-US" sz="850" dirty="0"/>
           </a:p>
@@ -8494,7 +8567,7 @@
                 <a:ea typeface="Courier New" pitchFamily="34" charset="-122"/>
                 <a:cs typeface="Courier New" pitchFamily="34" charset="-120"/>
               </a:rPr>
-              <a:t>ZS4D430_C_DepSalary</a:t>
+              <a:t>ZC_PC_PEDIDOS_STATUS</a:t>
             </a:r>
             <a:endParaRPr lang="en-US" sz="1050" dirty="0"/>
           </a:p>
@@ -8591,7 +8664,7 @@
                 <a:ea typeface="Courier New" pitchFamily="34" charset="-122"/>
                 <a:cs typeface="Courier New" pitchFamily="34" charset="-120"/>
               </a:rPr>
-              <a:t>ZS4D430_R_Employee</a:t>
+              <a:t>ZR_PC_PEDIDO</a:t>
             </a:r>
             <a:endParaRPr lang="en-US" sz="1050" dirty="0"/>
           </a:p>
@@ -8664,7 +8737,7 @@
                 <a:ea typeface="Courier New" pitchFamily="34" charset="-122"/>
                 <a:cs typeface="Courier New" pitchFamily="34" charset="-120"/>
               </a:rPr>
-              <a:t>DepartmentId</a:t>
+              <a:t>StatusPedido</a:t>
             </a:r>
             <a:r>
               <a:rPr lang="en-US" sz="1050" dirty="0">
@@ -8728,7 +8801,7 @@
                 <a:ea typeface="Courier New" pitchFamily="34" charset="-122"/>
                 <a:cs typeface="Courier New" pitchFamily="34" charset="-120"/>
               </a:rPr>
-              <a:t>CurrencyCode</a:t>
+              <a:t>Currency</a:t>
             </a:r>
             <a:r>
               <a:rPr lang="en-US" sz="1050" dirty="0">
@@ -8869,7 +8942,7 @@
                 <a:ea typeface="Courier New" pitchFamily="34" charset="-122"/>
                 <a:cs typeface="Courier New" pitchFamily="34" charset="-120"/>
               </a:rPr>
-              <a:t>Headcount</a:t>
+              <a:t>QtdePedidos</a:t>
             </a:r>
             <a:r>
               <a:rPr lang="en-US" sz="1050" dirty="0">
@@ -8944,7 +9017,7 @@
                 <a:ea typeface="Courier New" pitchFamily="34" charset="-122"/>
                 <a:cs typeface="Courier New" pitchFamily="34" charset="-120"/>
               </a:rPr>
-              <a:t>'CurrencyCode'</a:t>
+              <a:t>'Currency'</a:t>
             </a:r>
             <a:endParaRPr lang="en-US" sz="1050" dirty="0"/>
           </a:p>
@@ -9008,7 +9081,7 @@
                 <a:ea typeface="Courier New" pitchFamily="34" charset="-122"/>
                 <a:cs typeface="Courier New" pitchFamily="34" charset="-120"/>
               </a:rPr>
-              <a:t>AnnualSalary</a:t>
+              <a:t>ValorTotal</a:t>
             </a:r>
             <a:r>
               <a:rPr lang="en-US" sz="1050" dirty="0">
@@ -9041,7 +9114,7 @@
                 <a:ea typeface="Courier New" pitchFamily="34" charset="-122"/>
                 <a:cs typeface="Courier New" pitchFamily="34" charset="-120"/>
               </a:rPr>
-              <a:t>                  </a:t>
+              <a:t>                   </a:t>
             </a:r>
             <a:r>
               <a:rPr lang="en-US" sz="1050" dirty="0">
@@ -9074,7 +9147,7 @@
                 <a:ea typeface="Courier New" pitchFamily="34" charset="-122"/>
                 <a:cs typeface="Courier New" pitchFamily="34" charset="-120"/>
               </a:rPr>
-              <a:t>TotalSalary</a:t>
+              <a:t>ValorTotal</a:t>
             </a:r>
             <a:r>
               <a:rPr lang="en-US" sz="1050" dirty="0">
@@ -9149,7 +9222,7 @@
                 <a:ea typeface="Courier New" pitchFamily="34" charset="-122"/>
                 <a:cs typeface="Courier New" pitchFamily="34" charset="-120"/>
               </a:rPr>
-              <a:t>AnnualSalary</a:t>
+              <a:t>ValorTotal</a:t>
             </a:r>
             <a:r>
               <a:rPr lang="en-US" sz="1050" dirty="0">
@@ -9248,7 +9321,7 @@
                 <a:ea typeface="Courier New" pitchFamily="34" charset="-122"/>
                 <a:cs typeface="Courier New" pitchFamily="34" charset="-120"/>
               </a:rPr>
-              <a:t>     </a:t>
+              <a:t>      </a:t>
             </a:r>
             <a:r>
               <a:rPr lang="en-US" sz="1050" dirty="0">
@@ -9281,7 +9354,7 @@
                 <a:ea typeface="Courier New" pitchFamily="34" charset="-122"/>
                 <a:cs typeface="Courier New" pitchFamily="34" charset="-120"/>
               </a:rPr>
-              <a:t>AverageSalary</a:t>
+              <a:t>TicketMedio</a:t>
             </a:r>
             <a:endParaRPr lang="en-US" sz="1050" dirty="0"/>
           </a:p>
@@ -9365,7 +9438,7 @@
                 <a:ea typeface="Courier New" pitchFamily="34" charset="-122"/>
                 <a:cs typeface="Courier New" pitchFamily="34" charset="-120"/>
               </a:rPr>
-              <a:t>DepartmentId</a:t>
+              <a:t>StatusPedido</a:t>
             </a:r>
             <a:r>
               <a:rPr lang="en-US" sz="1050" dirty="0">
@@ -9398,7 +9471,7 @@
                 <a:ea typeface="Courier New" pitchFamily="34" charset="-122"/>
                 <a:cs typeface="Courier New" pitchFamily="34" charset="-120"/>
               </a:rPr>
-              <a:t>CurrencyCode</a:t>
+              <a:t>Currency</a:t>
             </a:r>
             <a:endParaRPr lang="en-US" sz="1050" dirty="0"/>
           </a:p>
@@ -9503,7 +9576,7 @@
         <p:spPr>
           <a:xfrm>
             <a:off x="8092440" y="1856232"/>
-            <a:ext cx="3367735" cy="1097280"/>
+            <a:ext cx="3367735" cy="811530"/>
           </a:xfrm>
           <a:prstGeom prst="rect">
             <a:avLst/>
@@ -9558,7 +9631,7 @@
         </p:nvSpPr>
         <p:spPr>
           <a:xfrm>
-            <a:off x="7653528" y="3017520"/>
+            <a:off x="7653528" y="2731770"/>
             <a:ext cx="310896" cy="310896"/>
           </a:xfrm>
           <a:prstGeom prst="ellipse">
@@ -9578,7 +9651,7 @@
         </p:nvSpPr>
         <p:spPr>
           <a:xfrm>
-            <a:off x="7653528" y="3017520"/>
+            <a:off x="7653528" y="2731770"/>
             <a:ext cx="310896" cy="310896"/>
           </a:xfrm>
           <a:prstGeom prst="rect">
@@ -9614,8 +9687,8 @@
         </p:nvSpPr>
         <p:spPr>
           <a:xfrm>
-            <a:off x="8092440" y="2999232"/>
-            <a:ext cx="3367735" cy="1097280"/>
+            <a:off x="8092440" y="2713482"/>
+            <a:ext cx="3367735" cy="811530"/>
           </a:xfrm>
           <a:prstGeom prst="rect">
             <a:avLst/>
@@ -9689,7 +9762,7 @@
         </p:nvSpPr>
         <p:spPr>
           <a:xfrm>
-            <a:off x="7653528" y="4160520"/>
+            <a:off x="7653528" y="3589020"/>
             <a:ext cx="310896" cy="310896"/>
           </a:xfrm>
           <a:prstGeom prst="ellipse">
@@ -9709,7 +9782,7 @@
         </p:nvSpPr>
         <p:spPr>
           <a:xfrm>
-            <a:off x="7653528" y="4160520"/>
+            <a:off x="7653528" y="3589020"/>
             <a:ext cx="310896" cy="310896"/>
           </a:xfrm>
           <a:prstGeom prst="rect">
@@ -9745,8 +9818,8 @@
         </p:nvSpPr>
         <p:spPr>
           <a:xfrm>
-            <a:off x="8092440" y="4142232"/>
-            <a:ext cx="3367735" cy="1097280"/>
+            <a:off x="8092440" y="3570732"/>
+            <a:ext cx="3367735" cy="811530"/>
           </a:xfrm>
           <a:prstGeom prst="rect">
             <a:avLst/>
@@ -9817,6 +9890,134 @@
         </p:nvSpPr>
         <p:spPr>
           <a:xfrm>
+            <a:off x="7653528" y="4446270"/>
+            <a:ext cx="310896" cy="310896"/>
+          </a:xfrm>
+          <a:prstGeom prst="ellipse">
+            <a:avLst/>
+          </a:prstGeom>
+          <a:solidFill>
+            <a:srgbClr val="E1F4FF"/>
+          </a:solidFill>
+          <a:ln/>
+        </p:spPr>
+      </p:sp>
+      <p:sp>
+        <p:nvSpPr>
+          <p:cNvPr id="23" name="Text 21"/>
+          <p:cNvSpPr txBox="1"/>
+          <p:nvPr/>
+        </p:nvSpPr>
+        <p:spPr>
+          <a:xfrm>
+            <a:off x="7653528" y="4446270"/>
+            <a:ext cx="310896" cy="310896"/>
+          </a:xfrm>
+          <a:prstGeom prst="rect">
+            <a:avLst/>
+          </a:prstGeom>
+          <a:noFill/>
+          <a:ln/>
+        </p:spPr>
+        <p:txBody>
+          <a:bodyPr wrap="square" lIns="0" tIns="0" rIns="0" bIns="0" rtlCol="0" anchor="ctr"/>
+          <a:lstStyle/>
+          <a:p>
+            <a:pPr algn="ctr" indent="0" marL="0">
+              <a:buNone/>
+            </a:pPr>
+            <a:r>
+              <a:rPr lang="en-US" sz="1020" b="1" dirty="0">
+                <a:solidFill>
+                  <a:srgbClr val="0064D9"/>
+                </a:solidFill>
+              </a:rPr>
+              <a:t>4</a:t>
+            </a:r>
+            <a:endParaRPr lang="en-US" sz="1020" dirty="0"/>
+          </a:p>
+        </p:txBody>
+      </p:sp>
+      <p:sp>
+        <p:nvSpPr>
+          <p:cNvPr id="24" name="Text 22"/>
+          <p:cNvSpPr txBox="1"/>
+          <p:nvPr/>
+        </p:nvSpPr>
+        <p:spPr>
+          <a:xfrm>
+            <a:off x="8092440" y="4427982"/>
+            <a:ext cx="3367735" cy="811530"/>
+          </a:xfrm>
+          <a:prstGeom prst="rect">
+            <a:avLst/>
+          </a:prstGeom>
+          <a:noFill/>
+          <a:ln/>
+        </p:spPr>
+        <p:txBody>
+          <a:bodyPr wrap="square" lIns="0" tIns="0" rIns="0" bIns="0" rtlCol="0" anchor="t"/>
+          <a:lstStyle/>
+          <a:p>
+            <a:pPr indent="0" marL="0">
+              <a:spcAft>
+                <a:spcPts val="300"/>
+              </a:spcAft>
+              <a:buNone/>
+            </a:pPr>
+            <a:r>
+              <a:rPr lang="en-US" sz="1250" b="1" dirty="0">
+                <a:solidFill>
+                  <a:srgbClr val="1D2D3E"/>
+                </a:solidFill>
+              </a:rPr>
+              <a:t>No projeto</a:t>
+            </a:r>
+            <a:endParaRPr lang="en-US" sz="1400" dirty="0"/>
+          </a:p>
+          <a:p>
+            <a:pPr indent="0" marL="0">
+              <a:buNone/>
+            </a:pPr>
+            <a:r>
+              <a:rPr lang="en-US" sz="1050" dirty="0">
+                <a:solidFill>
+                  <a:srgbClr val="556B82"/>
+                </a:solidFill>
+              </a:rPr>
+              <a:t>Os cubos usam </a:t>
+            </a:r>
+            <a:r>
+              <a:rPr lang="en-US" sz="1050" dirty="0">
+                <a:solidFill>
+                  <a:srgbClr val="0064D9"/>
+                </a:solidFill>
+                <a:latin typeface="Courier New" pitchFamily="34" charset="0"/>
+                <a:ea typeface="Courier New" pitchFamily="34" charset="-122"/>
+                <a:cs typeface="Courier New" pitchFamily="34" charset="-120"/>
+              </a:rPr>
+              <a:t>@Aggregation.default: #SUM</a:t>
+            </a:r>
+            <a:r>
+              <a:rPr lang="en-US" sz="1050" dirty="0">
+                <a:solidFill>
+                  <a:srgbClr val="556B82"/>
+                </a:solidFill>
+              </a:rPr>
+              <a:t> e o app de análise agrega na hora, pelo OData.</a:t>
+            </a:r>
+            <a:endParaRPr lang="en-US" sz="1400" dirty="0"/>
+          </a:p>
+        </p:txBody>
+      </p:sp>
+      <p:sp>
+        <p:nvSpPr>
+          <p:cNvPr id="25" name="Shape 23"/>
+          <p:cNvSpPr/>
+          <p:nvPr/>
+        </p:nvSpPr>
+        <p:spPr>
+          <a:xfrm>
             <a:off x="548640" y="5550408"/>
             <a:ext cx="11094415" cy="502920"/>
           </a:xfrm>
@@ -9833,7 +10034,7 @@
       </p:sp>
       <p:sp>
         <p:nvSpPr>
-          <p:cNvPr id="23" name="Text 21"/>
+          <p:cNvPr id="26" name="Text 24"/>
           <p:cNvSpPr txBox="1"/>
           <p:nvPr/>
         </p:nvSpPr>
@@ -9915,7 +10116,7 @@
       </p:sp>
       <p:pic>
         <p:nvPicPr>
-          <p:cNvPr id="24" name="Image 0" descr="preencoded.png">    </p:cNvPr>
+          <p:cNvPr id="27" name="Image 0" descr="preencoded.png">    </p:cNvPr>
           <p:cNvPicPr>
             <a:picLocks noChangeAspect="1"/>
           </p:cNvPicPr>
@@ -10307,7 +10508,7 @@
                 <a:ea typeface="Courier New" pitchFamily="34" charset="-122"/>
                 <a:cs typeface="Courier New" pitchFamily="34" charset="-120"/>
               </a:rPr>
-              <a:t>Employee.LastName</a:t>
+              <a:t>Pedido.NumeroPedido</a:t>
             </a:r>
             <a:endParaRPr lang="en-US" sz="1400" dirty="0"/>
           </a:p>
@@ -10341,7 +10542,7 @@
                   <a:srgbClr val="1D2D3E"/>
                 </a:solidFill>
               </a:rPr>
-              <a:t> (aula 02.05)</a:t>
+              <a:t> (aula 03.05)</a:t>
             </a:r>
             <a:endParaRPr lang="en-US" sz="1400" dirty="0"/>
           </a:p>
@@ -10570,7 +10771,7 @@
         </p:blipFill>
         <p:spPr>
           <a:xfrm>
-            <a:off x="877824" y="2836354"/>
+            <a:off x="6562192" y="2836354"/>
             <a:ext cx="256032" cy="256032"/>
           </a:xfrm>
           <a:prstGeom prst="rect">
@@ -10594,7 +10795,7 @@
         </p:blipFill>
         <p:spPr>
           <a:xfrm>
-            <a:off x="6562192" y="2836354"/>
+            <a:off x="877824" y="2836354"/>
             <a:ext cx="256032" cy="256032"/>
           </a:xfrm>
           <a:prstGeom prst="rect">
@@ -10738,7 +10939,7 @@
                   <a:srgbClr val="FFFFFF"/>
                 </a:solidFill>
               </a:rPr>
-              <a:t>O que aprendemos na aula 02.06</a:t>
+              <a:t>O que aprendemos na aula 03.06</a:t>
             </a:r>
             <a:endParaRPr lang="en-US" sz="3200" dirty="0"/>
           </a:p>
@@ -11370,7 +11571,7 @@
                   <a:srgbClr val="89D1FF"/>
                 </a:solidFill>
               </a:rPr>
-              <a:t>Próxima aula · 02.07  </a:t>
+              <a:t>Próxima aula · 03.07  </a:t>
             </a:r>
             <a:r>
               <a:rPr lang="en-US" sz="1500" dirty="0">
@@ -11448,7 +11649,7 @@
         </p:blipFill>
         <p:spPr>
           <a:xfrm>
-            <a:off x="6355080" y="3886200"/>
+            <a:off x="822960" y="2926080"/>
             <a:ext cx="256032" cy="256032"/>
           </a:xfrm>
           <a:prstGeom prst="rect">
@@ -11472,7 +11673,7 @@
         </p:blipFill>
         <p:spPr>
           <a:xfrm>
-            <a:off x="822960" y="2926080"/>
+            <a:off x="6355080" y="2926080"/>
             <a:ext cx="256032" cy="256032"/>
           </a:xfrm>
           <a:prstGeom prst="rect">
@@ -11496,7 +11697,7 @@
         </p:blipFill>
         <p:spPr>
           <a:xfrm>
-            <a:off x="6355080" y="2926080"/>
+            <a:off x="822960" y="3886200"/>
             <a:ext cx="256032" cy="256032"/>
           </a:xfrm>
           <a:prstGeom prst="rect">
@@ -11520,7 +11721,7 @@
         </p:blipFill>
         <p:spPr>
           <a:xfrm>
-            <a:off x="822960" y="3886200"/>
+            <a:off x="6355080" y="3886200"/>
             <a:ext cx="256032" cy="256032"/>
           </a:xfrm>
           <a:prstGeom prst="rect">
@@ -11647,7 +11848,7 @@
                   <a:srgbClr val="1D2D3E"/>
                 </a:solidFill>
               </a:rPr>
-              <a:t>Módulo 02 em 7 aulas: Dicionário e CDS</a:t>
+              <a:t>Módulo 03 em 7 aulas: Dicionário e CDS</a:t>
             </a:r>
             <a:endParaRPr lang="en-US" sz="2800" dirty="0"/>
           </a:p>
@@ -12905,7 +13106,7 @@
                   <a:srgbClr val="1D2D3E"/>
                 </a:solidFill>
               </a:rPr>
-              <a:t>levamos para a view de funcionários os cálculos que antes ficavam no ABAP: nomes, conversão de salário, tempo de casa e totais.</a:t>
+              <a:t>levamos para as views do projeto Pedidos de Compras os cálculos que antes ficavam no ABAP: valor em estoque, faixas de estoque, conversão de moeda e totais por status.</a:t>
             </a:r>
             <a:endParaRPr lang="en-US" sz="1400" dirty="0"/>
           </a:p>
@@ -12927,7 +13128,7 @@
         </p:blipFill>
         <p:spPr>
           <a:xfrm>
-            <a:off x="2636444" y="1847088"/>
+            <a:off x="5455768" y="3858768"/>
             <a:ext cx="347472" cy="347472"/>
           </a:xfrm>
           <a:prstGeom prst="rect">
@@ -12951,7 +13152,7 @@
         </p:blipFill>
         <p:spPr>
           <a:xfrm>
-            <a:off x="5455768" y="1847088"/>
+            <a:off x="2636444" y="1847088"/>
             <a:ext cx="347472" cy="347472"/>
           </a:xfrm>
           <a:prstGeom prst="rect">
@@ -12975,7 +13176,7 @@
         </p:blipFill>
         <p:spPr>
           <a:xfrm>
-            <a:off x="8275091" y="1847088"/>
+            <a:off x="5455768" y="1847088"/>
             <a:ext cx="347472" cy="347472"/>
           </a:xfrm>
           <a:prstGeom prst="rect">
@@ -13023,7 +13224,7 @@
         </p:blipFill>
         <p:spPr>
           <a:xfrm>
-            <a:off x="2636444" y="3858768"/>
+            <a:off x="8275091" y="1847088"/>
             <a:ext cx="347472" cy="347472"/>
           </a:xfrm>
           <a:prstGeom prst="rect">
@@ -13047,7 +13248,7 @@
         </p:blipFill>
         <p:spPr>
           <a:xfrm>
-            <a:off x="5455768" y="3858768"/>
+            <a:off x="2636444" y="3858768"/>
             <a:ext cx="347472" cy="347472"/>
           </a:xfrm>
           <a:prstGeom prst="rect">
@@ -13608,13 +13809,13 @@
             <a:r>
               <a:rPr lang="en-US" sz="1050" dirty="0">
                 <a:solidFill>
-                  <a:srgbClr val="4EC9B0"/>
-                </a:solidFill>
-                <a:latin typeface="Courier New" pitchFamily="34" charset="0"/>
-                <a:ea typeface="Courier New" pitchFamily="34" charset="-122"/>
-                <a:cs typeface="Courier New" pitchFamily="34" charset="-120"/>
-              </a:rPr>
-              <a:t>/dmo/flight</a:t>
+                  <a:srgbClr val="CCCCCC"/>
+                </a:solidFill>
+                <a:latin typeface="Courier New" pitchFamily="34" charset="0"/>
+                <a:ea typeface="Courier New" pitchFamily="34" charset="-122"/>
+                <a:cs typeface="Courier New" pitchFamily="34" charset="-120"/>
+              </a:rPr>
+              <a:t>zta_pc_item</a:t>
             </a:r>
             <a:endParaRPr lang="en-US" sz="1050" dirty="0"/>
           </a:p>
@@ -13667,7 +13868,7 @@
                 <a:ea typeface="Courier New" pitchFamily="34" charset="-122"/>
                 <a:cs typeface="Courier New" pitchFamily="34" charset="-120"/>
               </a:rPr>
-              <a:t>carrier_id</a:t>
+              <a:t>sku</a:t>
             </a:r>
             <a:r>
               <a:rPr lang="en-US" sz="1050" dirty="0">
@@ -13700,40 +13901,7 @@
                 <a:ea typeface="Courier New" pitchFamily="34" charset="-122"/>
                 <a:cs typeface="Courier New" pitchFamily="34" charset="-120"/>
               </a:rPr>
-              <a:t>connection_id</a:t>
-            </a:r>
-            <a:r>
-              <a:rPr lang="en-US" sz="1050" dirty="0">
-                <a:solidFill>
-                  <a:srgbClr val="CCCCCC"/>
-                </a:solidFill>
-                <a:latin typeface="Courier New" pitchFamily="34" charset="0"/>
-                <a:ea typeface="Courier New" pitchFamily="34" charset="-122"/>
-                <a:cs typeface="Courier New" pitchFamily="34" charset="-120"/>
-              </a:rPr>
-              <a:t>,</a:t>
-            </a:r>
-            <a:r>
-              <a:rPr lang="en-US" sz="1050" dirty="0">
-                <a:solidFill>
-                  <a:srgbClr val="CCCCCC"/>
-                </a:solidFill>
-                <a:latin typeface="Courier New" pitchFamily="34" charset="0"/>
-                <a:ea typeface="Courier New" pitchFamily="34" charset="-122"/>
-                <a:cs typeface="Courier New" pitchFamily="34" charset="-120"/>
-              </a:rPr>
-              <a:t> </a:t>
-            </a:r>
-            <a:r>
-              <a:rPr lang="en-US" sz="1050" dirty="0">
-                <a:solidFill>
-                  <a:srgbClr val="CCCCCC"/>
-                </a:solidFill>
-                <a:latin typeface="Courier New" pitchFamily="34" charset="0"/>
-                <a:ea typeface="Courier New" pitchFamily="34" charset="-122"/>
-                <a:cs typeface="Courier New" pitchFamily="34" charset="-120"/>
-              </a:rPr>
-              <a:t>flight_date</a:t>
+              <a:t>nome</a:t>
             </a:r>
             <a:r>
               <a:rPr lang="en-US" sz="1050" dirty="0">
@@ -13775,7 +13943,7 @@
                 <a:ea typeface="Courier New" pitchFamily="34" charset="-122"/>
                 <a:cs typeface="Courier New" pitchFamily="34" charset="-120"/>
               </a:rPr>
-              <a:t>seats_max</a:t>
+              <a:t>qtde_estoque</a:t>
             </a:r>
             <a:r>
               <a:rPr lang="en-US" sz="1050" dirty="0">
@@ -13819,7 +13987,7 @@
                 <a:ea typeface="Courier New" pitchFamily="34" charset="-122"/>
                 <a:cs typeface="Courier New" pitchFamily="34" charset="-120"/>
               </a:rPr>
-              <a:t>seats_occupied</a:t>
+              <a:t>qtde_reservada</a:t>
             </a:r>
             <a:r>
               <a:rPr lang="en-US" sz="1050" dirty="0">
@@ -13863,7 +14031,7 @@
                 <a:ea typeface="Courier New" pitchFamily="34" charset="-122"/>
                 <a:cs typeface="Courier New" pitchFamily="34" charset="-120"/>
               </a:rPr>
-              <a:t>seats_free</a:t>
+              <a:t>qtde_livre</a:t>
             </a:r>
             <a:endParaRPr lang="en-US" sz="1050" dirty="0"/>
           </a:p>
@@ -13971,7 +14139,7 @@
                 <a:ea typeface="Courier New" pitchFamily="34" charset="-122"/>
                 <a:cs typeface="Courier New" pitchFamily="34" charset="-120"/>
               </a:rPr>
-              <a:t>flights</a:t>
+              <a:t>itens</a:t>
             </a:r>
             <a:r>
               <a:rPr lang="en-US" sz="1050" dirty="0">
@@ -14212,7 +14380,7 @@
                   <a:srgbClr val="FFFFFF"/>
                 </a:solidFill>
               </a:rPr>
-              <a:t>zs4d430_c_flight.ddls</a:t>
+              <a:t>zc_pc_item_saldo.ddls</a:t>
             </a:r>
             <a:endParaRPr lang="en-US" sz="950" dirty="0"/>
           </a:p>
@@ -14462,7 +14630,7 @@
                 <a:ea typeface="Courier New" pitchFamily="34" charset="-122"/>
                 <a:cs typeface="Courier New" pitchFamily="34" charset="-120"/>
               </a:rPr>
-              <a:t>ZS4D430_C_Flight</a:t>
+              <a:t>ZC_PC_ITEM_SALDO</a:t>
             </a:r>
             <a:endParaRPr lang="en-US" sz="1050" dirty="0"/>
           </a:p>
@@ -14559,7 +14727,7 @@
                 <a:ea typeface="Courier New" pitchFamily="34" charset="-122"/>
                 <a:cs typeface="Courier New" pitchFamily="34" charset="-120"/>
               </a:rPr>
-              <a:t>/dmo/flight</a:t>
+              <a:t>zta_pc_item</a:t>
             </a:r>
             <a:endParaRPr lang="en-US" sz="1050" dirty="0"/>
           </a:p>
@@ -14632,7 +14800,51 @@
                 <a:ea typeface="Courier New" pitchFamily="34" charset="-122"/>
                 <a:cs typeface="Courier New" pitchFamily="34" charset="-120"/>
               </a:rPr>
-              <a:t>carrier_id</a:t>
+              <a:t>item_uuid</a:t>
+            </a:r>
+            <a:r>
+              <a:rPr lang="en-US" sz="1050" dirty="0">
+                <a:solidFill>
+                  <a:srgbClr val="CCCCCC"/>
+                </a:solidFill>
+                <a:latin typeface="Courier New" pitchFamily="34" charset="0"/>
+                <a:ea typeface="Courier New" pitchFamily="34" charset="-122"/>
+                <a:cs typeface="Courier New" pitchFamily="34" charset="-120"/>
+              </a:rPr>
+              <a:t> </a:t>
+            </a:r>
+            <a:r>
+              <a:rPr lang="en-US" sz="1050" dirty="0">
+                <a:solidFill>
+                  <a:srgbClr val="569CD6"/>
+                </a:solidFill>
+                <a:latin typeface="Courier New" pitchFamily="34" charset="0"/>
+                <a:ea typeface="Courier New" pitchFamily="34" charset="-122"/>
+                <a:cs typeface="Courier New" pitchFamily="34" charset="-120"/>
+              </a:rPr>
+              <a:t>as</a:t>
+            </a:r>
+            <a:r>
+              <a:rPr lang="en-US" sz="1050" dirty="0">
+                <a:solidFill>
+                  <a:srgbClr val="CCCCCC"/>
+                </a:solidFill>
+                <a:latin typeface="Courier New" pitchFamily="34" charset="0"/>
+                <a:ea typeface="Courier New" pitchFamily="34" charset="-122"/>
+                <a:cs typeface="Courier New" pitchFamily="34" charset="-120"/>
+              </a:rPr>
+              <a:t> </a:t>
+            </a:r>
+            <a:r>
+              <a:rPr lang="en-US" sz="1050" dirty="0">
+                <a:solidFill>
+                  <a:srgbClr val="CCCCCC"/>
+                </a:solidFill>
+                <a:latin typeface="Courier New" pitchFamily="34" charset="0"/>
+                <a:ea typeface="Courier New" pitchFamily="34" charset="-122"/>
+                <a:cs typeface="Courier New" pitchFamily="34" charset="-120"/>
+              </a:rPr>
+              <a:t>ItemUUID</a:t>
             </a:r>
             <a:r>
               <a:rPr lang="en-US" sz="1050" dirty="0">
@@ -14659,13 +14871,35 @@
             <a:r>
               <a:rPr lang="en-US" sz="1050" dirty="0">
                 <a:solidFill>
+                  <a:srgbClr val="CCCCCC"/>
+                </a:solidFill>
+                <a:latin typeface="Courier New" pitchFamily="34" charset="0"/>
+                <a:ea typeface="Courier New" pitchFamily="34" charset="-122"/>
+                <a:cs typeface="Courier New" pitchFamily="34" charset="-120"/>
+              </a:rPr>
+              <a:t>sku</a:t>
+            </a:r>
+            <a:r>
+              <a:rPr lang="en-US" sz="1050" dirty="0">
+                <a:solidFill>
+                  <a:srgbClr val="CCCCCC"/>
+                </a:solidFill>
+                <a:latin typeface="Courier New" pitchFamily="34" charset="0"/>
+                <a:ea typeface="Courier New" pitchFamily="34" charset="-122"/>
+                <a:cs typeface="Courier New" pitchFamily="34" charset="-120"/>
+              </a:rPr>
+              <a:t> </a:t>
+            </a:r>
+            <a:r>
+              <a:rPr lang="en-US" sz="1050" dirty="0">
+                <a:solidFill>
                   <a:srgbClr val="569CD6"/>
                 </a:solidFill>
                 <a:latin typeface="Courier New" pitchFamily="34" charset="0"/>
                 <a:ea typeface="Courier New" pitchFamily="34" charset="-122"/>
                 <a:cs typeface="Courier New" pitchFamily="34" charset="-120"/>
               </a:rPr>
-              <a:t>key</a:t>
+              <a:t>as</a:t>
             </a:r>
             <a:r>
               <a:rPr lang="en-US" sz="1050" dirty="0">
@@ -14687,62 +14921,7 @@
                 <a:ea typeface="Courier New" pitchFamily="34" charset="-122"/>
                 <a:cs typeface="Courier New" pitchFamily="34" charset="-120"/>
               </a:rPr>
-              <a:t>connection_id</a:t>
-            </a:r>
-            <a:r>
-              <a:rPr lang="en-US" sz="1050" dirty="0">
-                <a:solidFill>
-                  <a:srgbClr val="CCCCCC"/>
-                </a:solidFill>
-                <a:latin typeface="Courier New" pitchFamily="34" charset="0"/>
-                <a:ea typeface="Courier New" pitchFamily="34" charset="-122"/>
-                <a:cs typeface="Courier New" pitchFamily="34" charset="-120"/>
-              </a:rPr>
-              <a:t>,</a:t>
-            </a:r>
-            <a:r>
-              <a:rPr lang="en-US" sz="1050" dirty="0">
-                <a:solidFill>
-                  <a:srgbClr val="CCCCCC"/>
-                </a:solidFill>
-                <a:latin typeface="Courier New" pitchFamily="34" charset="0"/>
-                <a:ea typeface="Courier New" pitchFamily="34" charset="-122"/>
-                <a:cs typeface="Courier New" pitchFamily="34" charset="-120"/>
-              </a:rPr>
-              <a:t> </a:t>
-            </a:r>
-            <a:r>
-              <a:rPr lang="en-US" sz="1050" dirty="0">
-                <a:solidFill>
-                  <a:srgbClr val="569CD6"/>
-                </a:solidFill>
-                <a:latin typeface="Courier New" pitchFamily="34" charset="0"/>
-                <a:ea typeface="Courier New" pitchFamily="34" charset="-122"/>
-                <a:cs typeface="Courier New" pitchFamily="34" charset="-120"/>
-              </a:rPr>
-              <a:t>key</a:t>
-            </a:r>
-            <a:r>
-              <a:rPr lang="en-US" sz="1050" dirty="0">
-                <a:solidFill>
-                  <a:srgbClr val="CCCCCC"/>
-                </a:solidFill>
-                <a:latin typeface="Courier New" pitchFamily="34" charset="0"/>
-                <a:ea typeface="Courier New" pitchFamily="34" charset="-122"/>
-                <a:cs typeface="Courier New" pitchFamily="34" charset="-120"/>
-              </a:rPr>
-              <a:t> </a:t>
-            </a:r>
-            <a:r>
-              <a:rPr lang="en-US" sz="1050" dirty="0">
-                <a:solidFill>
-                  <a:srgbClr val="CCCCCC"/>
-                </a:solidFill>
-                <a:latin typeface="Courier New" pitchFamily="34" charset="0"/>
-                <a:ea typeface="Courier New" pitchFamily="34" charset="-122"/>
-                <a:cs typeface="Courier New" pitchFamily="34" charset="-120"/>
-              </a:rPr>
-              <a:t>flight_date</a:t>
+              <a:t>Sku</a:t>
             </a:r>
             <a:r>
               <a:rPr lang="en-US" sz="1050" dirty="0">
@@ -14784,7 +14963,7 @@
                 <a:ea typeface="Courier New" pitchFamily="34" charset="-122"/>
                 <a:cs typeface="Courier New" pitchFamily="34" charset="-120"/>
               </a:rPr>
-              <a:t>seats_max</a:t>
+              <a:t>qtde_estoque</a:t>
             </a:r>
             <a:r>
               <a:rPr lang="en-US" sz="1050" dirty="0">
@@ -14828,7 +15007,7 @@
                 <a:ea typeface="Courier New" pitchFamily="34" charset="-122"/>
                 <a:cs typeface="Courier New" pitchFamily="34" charset="-120"/>
               </a:rPr>
-              <a:t>seats_occupied</a:t>
+              <a:t>qtde_reservada</a:t>
             </a:r>
             <a:r>
               <a:rPr lang="en-US" sz="1050" dirty="0">
@@ -14872,7 +15051,7 @@
                 <a:ea typeface="Courier New" pitchFamily="34" charset="-122"/>
                 <a:cs typeface="Courier New" pitchFamily="34" charset="-120"/>
               </a:rPr>
-              <a:t>SeatsFree</a:t>
+              <a:t>QtdeLivre</a:t>
             </a:r>
             <a:endParaRPr lang="en-US" sz="1050" dirty="0"/>
           </a:p>
@@ -14939,7 +15118,7 @@
                 <a:ea typeface="Courier New" pitchFamily="34" charset="-122"/>
                 <a:cs typeface="Courier New" pitchFamily="34" charset="-120"/>
               </a:rPr>
-              <a:t>SeatsFree</a:t>
+              <a:t>QtdeLivre</a:t>
             </a:r>
             <a:r>
               <a:rPr lang="en-US" sz="1200" dirty="0">
@@ -15139,7 +15318,7 @@
                   <a:srgbClr val="89D1FF"/>
                 </a:solidFill>
               </a:rPr>
-              <a:t>AULA 02.06 · SEÇÃO 1</a:t>
+              <a:t>AULA 03.06 · SEÇÃO 1</a:t>
             </a:r>
             <a:endParaRPr lang="en-US" sz="1300" dirty="0"/>
           </a:p>
@@ -15694,7 +15873,7 @@
         <p:spPr>
           <a:xfrm>
             <a:off x="640080" y="1700784"/>
-            <a:ext cx="3086100" cy="292608"/>
+            <a:ext cx="2464308" cy="292608"/>
           </a:xfrm>
           <a:prstGeom prst="rect">
             <a:avLst/>
@@ -15714,7 +15893,7 @@
         <p:spPr>
           <a:xfrm>
             <a:off x="640080" y="1700784"/>
-            <a:ext cx="3086100" cy="27432"/>
+            <a:ext cx="2464308" cy="27432"/>
           </a:xfrm>
           <a:prstGeom prst="rect">
             <a:avLst/>
@@ -15734,7 +15913,7 @@
         <p:spPr>
           <a:xfrm>
             <a:off x="731520" y="1719072"/>
-            <a:ext cx="2903220" cy="274320"/>
+            <a:ext cx="2281428" cy="274320"/>
           </a:xfrm>
           <a:prstGeom prst="rect">
             <a:avLst/>
@@ -15755,7 +15934,7 @@
                   <a:srgbClr val="FFFFFF"/>
                 </a:solidFill>
               </a:rPr>
-              <a:t>zs4d430_c_employeequery.ddls.asddls</a:t>
+              <a:t>zi_pc_item_cube.ddls.asddls</a:t>
             </a:r>
             <a:endParaRPr lang="en-US" sz="950" dirty="0"/>
           </a:p>
@@ -15791,7 +15970,7 @@
                   <a:srgbClr val="9DA5B4"/>
                 </a:solidFill>
               </a:rPr>
-              <a:t>ZS4D430_## › Core Data Services (trecho)</a:t>
+              <a:t>ZI_PC_ITEM_CUBE (trecho) com a faixa de ZCL_PC_UTIL em CASE</a:t>
             </a:r>
             <a:endParaRPr lang="en-US" sz="850" dirty="0"/>
           </a:p>
@@ -16077,26 +16256,6 @@
             </a:r>
             <a:endParaRPr lang="en-US" sz="1050" dirty="0"/>
           </a:p>
-          <a:p>
-            <a:pPr algn="r" indent="0" marL="0">
-              <a:lnSpc>
-                <a:spcPct val="105000"/>
-              </a:lnSpc>
-              <a:buNone/>
-            </a:pPr>
-            <a:r>
-              <a:rPr lang="en-US" sz="1050" dirty="0">
-                <a:solidFill>
-                  <a:srgbClr val="6E7681"/>
-                </a:solidFill>
-                <a:latin typeface="Courier New" pitchFamily="34" charset="0"/>
-                <a:ea typeface="Courier New" pitchFamily="34" charset="-122"/>
-                <a:cs typeface="Courier New" pitchFamily="34" charset="-120"/>
-              </a:rPr>
-              <a:t>14</a:t>
-            </a:r>
-            <a:endParaRPr lang="en-US" sz="1050" dirty="0"/>
-          </a:p>
         </p:txBody>
       </p:sp>
       <p:sp>
@@ -16201,7 +16360,7 @@
                 <a:ea typeface="Courier New" pitchFamily="34" charset="-122"/>
                 <a:cs typeface="Courier New" pitchFamily="34" charset="-120"/>
               </a:rPr>
-              <a:t>ZS4D430_C_EmployeeQuery</a:t>
+              <a:t>ZI_PC_ITEM_CUBE</a:t>
             </a:r>
             <a:endParaRPr lang="en-US" sz="1050" dirty="0"/>
           </a:p>
@@ -16298,7 +16457,7 @@
                 <a:ea typeface="Courier New" pitchFamily="34" charset="-122"/>
                 <a:cs typeface="Courier New" pitchFamily="34" charset="-120"/>
               </a:rPr>
-              <a:t>ZS4D430_R_Employee</a:t>
+              <a:t>ZR_PC_ITEM</a:t>
             </a:r>
             <a:endParaRPr lang="en-US" sz="1050" dirty="0"/>
           </a:p>
@@ -16371,7 +16530,7 @@
                 <a:ea typeface="Courier New" pitchFamily="34" charset="-122"/>
                 <a:cs typeface="Courier New" pitchFamily="34" charset="-120"/>
               </a:rPr>
-              <a:t>EmployeeId</a:t>
+              <a:t>ItemUUID</a:t>
             </a:r>
             <a:r>
               <a:rPr lang="en-US" sz="1050" dirty="0">
@@ -16407,24 +16566,24 @@
             <a:r>
               <a:rPr lang="en-US" sz="1050" dirty="0">
                 <a:solidFill>
-                  <a:srgbClr val="4EC9B0"/>
-                </a:solidFill>
-                <a:latin typeface="Courier New" pitchFamily="34" charset="0"/>
-                <a:ea typeface="Courier New" pitchFamily="34" charset="-122"/>
-                <a:cs typeface="Courier New" pitchFamily="34" charset="-120"/>
-              </a:rPr>
-              <a:t>@Semantics.amount.currencyCode</a:t>
-            </a:r>
-            <a:r>
-              <a:rPr lang="en-US" sz="1050" dirty="0">
-                <a:solidFill>
-                  <a:srgbClr val="CCCCCC"/>
-                </a:solidFill>
-                <a:latin typeface="Courier New" pitchFamily="34" charset="0"/>
-                <a:ea typeface="Courier New" pitchFamily="34" charset="-122"/>
-                <a:cs typeface="Courier New" pitchFamily="34" charset="-120"/>
-              </a:rPr>
-              <a:t>:</a:t>
+                  <a:srgbClr val="569CD6"/>
+                </a:solidFill>
+                <a:latin typeface="Courier New" pitchFamily="34" charset="0"/>
+                <a:ea typeface="Courier New" pitchFamily="34" charset="-122"/>
+                <a:cs typeface="Courier New" pitchFamily="34" charset="-120"/>
+              </a:rPr>
+              <a:t>cast</a:t>
+            </a:r>
+            <a:r>
+              <a:rPr lang="en-US" sz="1050" dirty="0">
+                <a:solidFill>
+                  <a:srgbClr val="CCCCCC"/>
+                </a:solidFill>
+                <a:latin typeface="Courier New" pitchFamily="34" charset="0"/>
+                <a:ea typeface="Courier New" pitchFamily="34" charset="-122"/>
+                <a:cs typeface="Courier New" pitchFamily="34" charset="-120"/>
+              </a:rPr>
+              <a:t>(</a:t>
             </a:r>
             <a:r>
               <a:rPr lang="en-US" sz="1050" dirty="0">
@@ -16440,13 +16599,222 @@
             <a:r>
               <a:rPr lang="en-US" sz="1050" dirty="0">
                 <a:solidFill>
-                  <a:srgbClr val="CE9178"/>
-                </a:solidFill>
-                <a:latin typeface="Courier New" pitchFamily="34" charset="0"/>
-                <a:ea typeface="Courier New" pitchFamily="34" charset="-122"/>
-                <a:cs typeface="Courier New" pitchFamily="34" charset="-120"/>
-              </a:rPr>
-              <a:t>'CurrencyCode'</a:t>
+                  <a:srgbClr val="569CD6"/>
+                </a:solidFill>
+                <a:latin typeface="Courier New" pitchFamily="34" charset="0"/>
+                <a:ea typeface="Courier New" pitchFamily="34" charset="-122"/>
+                <a:cs typeface="Courier New" pitchFamily="34" charset="-120"/>
+              </a:rPr>
+              <a:t>cast</a:t>
+            </a:r>
+            <a:r>
+              <a:rPr lang="en-US" sz="1050" dirty="0">
+                <a:solidFill>
+                  <a:srgbClr val="CCCCCC"/>
+                </a:solidFill>
+                <a:latin typeface="Courier New" pitchFamily="34" charset="0"/>
+                <a:ea typeface="Courier New" pitchFamily="34" charset="-122"/>
+                <a:cs typeface="Courier New" pitchFamily="34" charset="-120"/>
+              </a:rPr>
+              <a:t>(</a:t>
+            </a:r>
+            <a:r>
+              <a:rPr lang="en-US" sz="1050" dirty="0">
+                <a:solidFill>
+                  <a:srgbClr val="CCCCCC"/>
+                </a:solidFill>
+                <a:latin typeface="Courier New" pitchFamily="34" charset="0"/>
+                <a:ea typeface="Courier New" pitchFamily="34" charset="-122"/>
+                <a:cs typeface="Courier New" pitchFamily="34" charset="-120"/>
+              </a:rPr>
+              <a:t> </a:t>
+            </a:r>
+            <a:r>
+              <a:rPr lang="en-US" sz="1050" dirty="0">
+                <a:solidFill>
+                  <a:srgbClr val="CCCCCC"/>
+                </a:solidFill>
+                <a:latin typeface="Courier New" pitchFamily="34" charset="0"/>
+                <a:ea typeface="Courier New" pitchFamily="34" charset="-122"/>
+                <a:cs typeface="Courier New" pitchFamily="34" charset="-120"/>
+              </a:rPr>
+              <a:t>PrecoUnitario</a:t>
+            </a:r>
+            <a:r>
+              <a:rPr lang="en-US" sz="1050" dirty="0">
+                <a:solidFill>
+                  <a:srgbClr val="CCCCCC"/>
+                </a:solidFill>
+                <a:latin typeface="Courier New" pitchFamily="34" charset="0"/>
+                <a:ea typeface="Courier New" pitchFamily="34" charset="-122"/>
+                <a:cs typeface="Courier New" pitchFamily="34" charset="-120"/>
+              </a:rPr>
+              <a:t> </a:t>
+            </a:r>
+            <a:r>
+              <a:rPr lang="en-US" sz="1050" dirty="0">
+                <a:solidFill>
+                  <a:srgbClr val="569CD6"/>
+                </a:solidFill>
+                <a:latin typeface="Courier New" pitchFamily="34" charset="0"/>
+                <a:ea typeface="Courier New" pitchFamily="34" charset="-122"/>
+                <a:cs typeface="Courier New" pitchFamily="34" charset="-120"/>
+              </a:rPr>
+              <a:t>as</a:t>
+            </a:r>
+            <a:r>
+              <a:rPr lang="en-US" sz="1050" dirty="0">
+                <a:solidFill>
+                  <a:srgbClr val="CCCCCC"/>
+                </a:solidFill>
+                <a:latin typeface="Courier New" pitchFamily="34" charset="0"/>
+                <a:ea typeface="Courier New" pitchFamily="34" charset="-122"/>
+                <a:cs typeface="Courier New" pitchFamily="34" charset="-120"/>
+              </a:rPr>
+              <a:t> </a:t>
+            </a:r>
+            <a:r>
+              <a:rPr lang="en-US" sz="1050" dirty="0">
+                <a:solidFill>
+                  <a:srgbClr val="CCCCCC"/>
+                </a:solidFill>
+                <a:latin typeface="Courier New" pitchFamily="34" charset="0"/>
+                <a:ea typeface="Courier New" pitchFamily="34" charset="-122"/>
+                <a:cs typeface="Courier New" pitchFamily="34" charset="-120"/>
+              </a:rPr>
+              <a:t>abap</a:t>
+            </a:r>
+            <a:r>
+              <a:rPr lang="en-US" sz="1050" dirty="0">
+                <a:solidFill>
+                  <a:srgbClr val="CCCCCC"/>
+                </a:solidFill>
+                <a:latin typeface="Courier New" pitchFamily="34" charset="0"/>
+                <a:ea typeface="Courier New" pitchFamily="34" charset="-122"/>
+                <a:cs typeface="Courier New" pitchFamily="34" charset="-120"/>
+              </a:rPr>
+              <a:t>.</a:t>
+            </a:r>
+            <a:r>
+              <a:rPr lang="en-US" sz="1050" dirty="0">
+                <a:solidFill>
+                  <a:srgbClr val="DCDCAA"/>
+                </a:solidFill>
+                <a:latin typeface="Courier New" pitchFamily="34" charset="0"/>
+                <a:ea typeface="Courier New" pitchFamily="34" charset="-122"/>
+                <a:cs typeface="Courier New" pitchFamily="34" charset="-120"/>
+              </a:rPr>
+              <a:t>dec</a:t>
+            </a:r>
+            <a:r>
+              <a:rPr lang="en-US" sz="1050" dirty="0">
+                <a:solidFill>
+                  <a:srgbClr val="CCCCCC"/>
+                </a:solidFill>
+                <a:latin typeface="Courier New" pitchFamily="34" charset="0"/>
+                <a:ea typeface="Courier New" pitchFamily="34" charset="-122"/>
+                <a:cs typeface="Courier New" pitchFamily="34" charset="-120"/>
+              </a:rPr>
+              <a:t>(</a:t>
+            </a:r>
+            <a:r>
+              <a:rPr lang="en-US" sz="1050" dirty="0">
+                <a:solidFill>
+                  <a:srgbClr val="CCCCCC"/>
+                </a:solidFill>
+                <a:latin typeface="Courier New" pitchFamily="34" charset="0"/>
+                <a:ea typeface="Courier New" pitchFamily="34" charset="-122"/>
+                <a:cs typeface="Courier New" pitchFamily="34" charset="-120"/>
+              </a:rPr>
+              <a:t> </a:t>
+            </a:r>
+            <a:r>
+              <a:rPr lang="en-US" sz="1050" dirty="0">
+                <a:solidFill>
+                  <a:srgbClr val="B5CEA8"/>
+                </a:solidFill>
+                <a:latin typeface="Courier New" pitchFamily="34" charset="0"/>
+                <a:ea typeface="Courier New" pitchFamily="34" charset="-122"/>
+                <a:cs typeface="Courier New" pitchFamily="34" charset="-120"/>
+              </a:rPr>
+              <a:t>15</a:t>
+            </a:r>
+            <a:r>
+              <a:rPr lang="en-US" sz="1050" dirty="0">
+                <a:solidFill>
+                  <a:srgbClr val="CCCCCC"/>
+                </a:solidFill>
+                <a:latin typeface="Courier New" pitchFamily="34" charset="0"/>
+                <a:ea typeface="Courier New" pitchFamily="34" charset="-122"/>
+                <a:cs typeface="Courier New" pitchFamily="34" charset="-120"/>
+              </a:rPr>
+              <a:t>,</a:t>
+            </a:r>
+            <a:r>
+              <a:rPr lang="en-US" sz="1050" dirty="0">
+                <a:solidFill>
+                  <a:srgbClr val="CCCCCC"/>
+                </a:solidFill>
+                <a:latin typeface="Courier New" pitchFamily="34" charset="0"/>
+                <a:ea typeface="Courier New" pitchFamily="34" charset="-122"/>
+                <a:cs typeface="Courier New" pitchFamily="34" charset="-120"/>
+              </a:rPr>
+              <a:t> </a:t>
+            </a:r>
+            <a:r>
+              <a:rPr lang="en-US" sz="1050" dirty="0">
+                <a:solidFill>
+                  <a:srgbClr val="B5CEA8"/>
+                </a:solidFill>
+                <a:latin typeface="Courier New" pitchFamily="34" charset="0"/>
+                <a:ea typeface="Courier New" pitchFamily="34" charset="-122"/>
+                <a:cs typeface="Courier New" pitchFamily="34" charset="-120"/>
+              </a:rPr>
+              <a:t>2</a:t>
+            </a:r>
+            <a:r>
+              <a:rPr lang="en-US" sz="1050" dirty="0">
+                <a:solidFill>
+                  <a:srgbClr val="CCCCCC"/>
+                </a:solidFill>
+                <a:latin typeface="Courier New" pitchFamily="34" charset="0"/>
+                <a:ea typeface="Courier New" pitchFamily="34" charset="-122"/>
+                <a:cs typeface="Courier New" pitchFamily="34" charset="-120"/>
+              </a:rPr>
+              <a:t> </a:t>
+            </a:r>
+            <a:r>
+              <a:rPr lang="en-US" sz="1050" dirty="0">
+                <a:solidFill>
+                  <a:srgbClr val="CCCCCC"/>
+                </a:solidFill>
+                <a:latin typeface="Courier New" pitchFamily="34" charset="0"/>
+                <a:ea typeface="Courier New" pitchFamily="34" charset="-122"/>
+                <a:cs typeface="Courier New" pitchFamily="34" charset="-120"/>
+              </a:rPr>
+              <a:t>)</a:t>
+            </a:r>
+            <a:r>
+              <a:rPr lang="en-US" sz="1050" dirty="0">
+                <a:solidFill>
+                  <a:srgbClr val="CCCCCC"/>
+                </a:solidFill>
+                <a:latin typeface="Courier New" pitchFamily="34" charset="0"/>
+                <a:ea typeface="Courier New" pitchFamily="34" charset="-122"/>
+                <a:cs typeface="Courier New" pitchFamily="34" charset="-120"/>
+              </a:rPr>
+              <a:t> </a:t>
+            </a:r>
+            <a:r>
+              <a:rPr lang="en-US" sz="1050" dirty="0">
+                <a:solidFill>
+                  <a:srgbClr val="CCCCCC"/>
+                </a:solidFill>
+                <a:latin typeface="Courier New" pitchFamily="34" charset="0"/>
+                <a:ea typeface="Courier New" pitchFamily="34" charset="-122"/>
+                <a:cs typeface="Courier New" pitchFamily="34" charset="-120"/>
+              </a:rPr>
+              <a:t>)</a:t>
             </a:r>
             <a:endParaRPr lang="en-US" sz="1050" dirty="0"/>
           </a:p>
@@ -16458,301 +16826,15 @@
               <a:buNone/>
             </a:pPr>
             <a:r>
-              <a:rPr lang="en-US" sz="1050" dirty="0">
-                <a:solidFill>
-                  <a:srgbClr val="CCCCCC"/>
-                </a:solidFill>
-                <a:latin typeface="Courier New" pitchFamily="34" charset="0"/>
-                <a:ea typeface="Courier New" pitchFamily="34" charset="-122"/>
-                <a:cs typeface="Courier New" pitchFamily="34" charset="-120"/>
-              </a:rPr>
-              <a:t>      </a:t>
-            </a:r>
-            <a:r>
-              <a:rPr lang="en-US" sz="1050" dirty="0">
-                <a:solidFill>
-                  <a:srgbClr val="569CD6"/>
-                </a:solidFill>
-                <a:latin typeface="Courier New" pitchFamily="34" charset="0"/>
-                <a:ea typeface="Courier New" pitchFamily="34" charset="-122"/>
-                <a:cs typeface="Courier New" pitchFamily="34" charset="-120"/>
-              </a:rPr>
-              <a:t>cast</a:t>
-            </a:r>
-            <a:r>
-              <a:rPr lang="en-US" sz="1050" dirty="0">
-                <a:solidFill>
-                  <a:srgbClr val="CCCCCC"/>
-                </a:solidFill>
-                <a:latin typeface="Courier New" pitchFamily="34" charset="0"/>
-                <a:ea typeface="Courier New" pitchFamily="34" charset="-122"/>
-                <a:cs typeface="Courier New" pitchFamily="34" charset="-120"/>
-              </a:rPr>
-              <a:t>(</a:t>
-            </a:r>
-            <a:r>
-              <a:rPr lang="en-US" sz="1050" dirty="0">
-                <a:solidFill>
-                  <a:srgbClr val="CCCCCC"/>
-                </a:solidFill>
-                <a:latin typeface="Courier New" pitchFamily="34" charset="0"/>
-                <a:ea typeface="Courier New" pitchFamily="34" charset="-122"/>
-                <a:cs typeface="Courier New" pitchFamily="34" charset="-120"/>
-              </a:rPr>
-              <a:t> </a:t>
-            </a:r>
-            <a:r>
-              <a:rPr lang="en-US" sz="1050" dirty="0">
-                <a:solidFill>
-                  <a:srgbClr val="CCCCCC"/>
-                </a:solidFill>
-                <a:latin typeface="Courier New" pitchFamily="34" charset="0"/>
-                <a:ea typeface="Courier New" pitchFamily="34" charset="-122"/>
-                <a:cs typeface="Courier New" pitchFamily="34" charset="-120"/>
-              </a:rPr>
-              <a:t>AnnualSalary</a:t>
-            </a:r>
-            <a:r>
-              <a:rPr lang="en-US" sz="1050" dirty="0">
-                <a:solidFill>
-                  <a:srgbClr val="CCCCCC"/>
-                </a:solidFill>
-                <a:latin typeface="Courier New" pitchFamily="34" charset="0"/>
-                <a:ea typeface="Courier New" pitchFamily="34" charset="-122"/>
-                <a:cs typeface="Courier New" pitchFamily="34" charset="-120"/>
-              </a:rPr>
-              <a:t> </a:t>
-            </a:r>
-            <a:r>
-              <a:rPr lang="en-US" sz="1050" dirty="0">
-                <a:solidFill>
-                  <a:srgbClr val="569CD6"/>
-                </a:solidFill>
-                <a:latin typeface="Courier New" pitchFamily="34" charset="0"/>
-                <a:ea typeface="Courier New" pitchFamily="34" charset="-122"/>
-                <a:cs typeface="Courier New" pitchFamily="34" charset="-120"/>
-              </a:rPr>
-              <a:t>as</a:t>
-            </a:r>
-            <a:r>
-              <a:rPr lang="en-US" sz="1050" dirty="0">
-                <a:solidFill>
-                  <a:srgbClr val="CCCCCC"/>
-                </a:solidFill>
-                <a:latin typeface="Courier New" pitchFamily="34" charset="0"/>
-                <a:ea typeface="Courier New" pitchFamily="34" charset="-122"/>
-                <a:cs typeface="Courier New" pitchFamily="34" charset="-120"/>
-              </a:rPr>
-              <a:t> </a:t>
-            </a:r>
-            <a:r>
-              <a:rPr lang="en-US" sz="1050" dirty="0">
-                <a:solidFill>
-                  <a:srgbClr val="CCCCCC"/>
-                </a:solidFill>
-                <a:latin typeface="Courier New" pitchFamily="34" charset="0"/>
-                <a:ea typeface="Courier New" pitchFamily="34" charset="-122"/>
-                <a:cs typeface="Courier New" pitchFamily="34" charset="-120"/>
-              </a:rPr>
-              <a:t>abap</a:t>
-            </a:r>
-            <a:r>
-              <a:rPr lang="en-US" sz="1050" dirty="0">
-                <a:solidFill>
-                  <a:srgbClr val="CCCCCC"/>
-                </a:solidFill>
-                <a:latin typeface="Courier New" pitchFamily="34" charset="0"/>
-                <a:ea typeface="Courier New" pitchFamily="34" charset="-122"/>
-                <a:cs typeface="Courier New" pitchFamily="34" charset="-120"/>
-              </a:rPr>
-              <a:t>.</a:t>
-            </a:r>
-            <a:r>
-              <a:rPr lang="en-US" sz="1050" dirty="0">
-                <a:solidFill>
-                  <a:srgbClr val="DCDCAA"/>
-                </a:solidFill>
-                <a:latin typeface="Courier New" pitchFamily="34" charset="0"/>
-                <a:ea typeface="Courier New" pitchFamily="34" charset="-122"/>
-                <a:cs typeface="Courier New" pitchFamily="34" charset="-120"/>
-              </a:rPr>
-              <a:t>curr</a:t>
-            </a:r>
-            <a:r>
-              <a:rPr lang="en-US" sz="1050" dirty="0">
-                <a:solidFill>
-                  <a:srgbClr val="CCCCCC"/>
-                </a:solidFill>
-                <a:latin typeface="Courier New" pitchFamily="34" charset="0"/>
-                <a:ea typeface="Courier New" pitchFamily="34" charset="-122"/>
-                <a:cs typeface="Courier New" pitchFamily="34" charset="-120"/>
-              </a:rPr>
-              <a:t>(</a:t>
-            </a:r>
-            <a:r>
-              <a:rPr lang="en-US" sz="1050" dirty="0">
-                <a:solidFill>
-                  <a:srgbClr val="B5CEA8"/>
-                </a:solidFill>
-                <a:latin typeface="Courier New" pitchFamily="34" charset="0"/>
-                <a:ea typeface="Courier New" pitchFamily="34" charset="-122"/>
-                <a:cs typeface="Courier New" pitchFamily="34" charset="-120"/>
-              </a:rPr>
-              <a:t>15</a:t>
-            </a:r>
-            <a:r>
-              <a:rPr lang="en-US" sz="1050" dirty="0">
-                <a:solidFill>
-                  <a:srgbClr val="CCCCCC"/>
-                </a:solidFill>
-                <a:latin typeface="Courier New" pitchFamily="34" charset="0"/>
-                <a:ea typeface="Courier New" pitchFamily="34" charset="-122"/>
-                <a:cs typeface="Courier New" pitchFamily="34" charset="-120"/>
-              </a:rPr>
-              <a:t>,</a:t>
-            </a:r>
-            <a:r>
-              <a:rPr lang="en-US" sz="1050" dirty="0">
-                <a:solidFill>
-                  <a:srgbClr val="B5CEA8"/>
-                </a:solidFill>
-                <a:latin typeface="Courier New" pitchFamily="34" charset="0"/>
-                <a:ea typeface="Courier New" pitchFamily="34" charset="-122"/>
-                <a:cs typeface="Courier New" pitchFamily="34" charset="-120"/>
-              </a:rPr>
-              <a:t>2</a:t>
-            </a:r>
-            <a:r>
-              <a:rPr lang="en-US" sz="1050" dirty="0">
-                <a:solidFill>
-                  <a:srgbClr val="CCCCCC"/>
-                </a:solidFill>
-                <a:latin typeface="Courier New" pitchFamily="34" charset="0"/>
-                <a:ea typeface="Courier New" pitchFamily="34" charset="-122"/>
-                <a:cs typeface="Courier New" pitchFamily="34" charset="-120"/>
-              </a:rPr>
-              <a:t>)</a:t>
-            </a:r>
-            <a:r>
-              <a:rPr lang="en-US" sz="1050" dirty="0">
-                <a:solidFill>
-                  <a:srgbClr val="CCCCCC"/>
-                </a:solidFill>
-                <a:latin typeface="Courier New" pitchFamily="34" charset="0"/>
-                <a:ea typeface="Courier New" pitchFamily="34" charset="-122"/>
-                <a:cs typeface="Courier New" pitchFamily="34" charset="-120"/>
-              </a:rPr>
-              <a:t> </a:t>
-            </a:r>
-            <a:r>
-              <a:rPr lang="en-US" sz="1050" dirty="0">
-                <a:solidFill>
-                  <a:srgbClr val="CCCCCC"/>
-                </a:solidFill>
-                <a:latin typeface="Courier New" pitchFamily="34" charset="0"/>
-                <a:ea typeface="Courier New" pitchFamily="34" charset="-122"/>
-                <a:cs typeface="Courier New" pitchFamily="34" charset="-120"/>
-              </a:rPr>
-              <a:t>)</a:t>
-            </a:r>
-            <a:r>
-              <a:rPr lang="en-US" sz="1050" dirty="0">
-                <a:solidFill>
-                  <a:srgbClr val="CCCCCC"/>
-                </a:solidFill>
-                <a:latin typeface="Courier New" pitchFamily="34" charset="0"/>
-                <a:ea typeface="Courier New" pitchFamily="34" charset="-122"/>
-                <a:cs typeface="Courier New" pitchFamily="34" charset="-120"/>
-              </a:rPr>
-              <a:t> </a:t>
-            </a:r>
-            <a:r>
-              <a:rPr lang="en-US" sz="1050" dirty="0">
-                <a:solidFill>
-                  <a:srgbClr val="CCCCCC"/>
-                </a:solidFill>
-                <a:latin typeface="Courier New" pitchFamily="34" charset="0"/>
-                <a:ea typeface="Courier New" pitchFamily="34" charset="-122"/>
-                <a:cs typeface="Courier New" pitchFamily="34" charset="-120"/>
-              </a:rPr>
-              <a:t>/</a:t>
-            </a:r>
-            <a:r>
-              <a:rPr lang="en-US" sz="1050" dirty="0">
-                <a:solidFill>
-                  <a:srgbClr val="CCCCCC"/>
-                </a:solidFill>
-                <a:latin typeface="Courier New" pitchFamily="34" charset="0"/>
-                <a:ea typeface="Courier New" pitchFamily="34" charset="-122"/>
-                <a:cs typeface="Courier New" pitchFamily="34" charset="-120"/>
-              </a:rPr>
-              <a:t> </a:t>
-            </a:r>
-            <a:r>
-              <a:rPr lang="en-US" sz="1050" dirty="0">
-                <a:solidFill>
-                  <a:srgbClr val="B5CEA8"/>
-                </a:solidFill>
-                <a:latin typeface="Courier New" pitchFamily="34" charset="0"/>
-                <a:ea typeface="Courier New" pitchFamily="34" charset="-122"/>
-                <a:cs typeface="Courier New" pitchFamily="34" charset="-120"/>
-              </a:rPr>
-              <a:t>12</a:t>
-            </a:r>
-            <a:r>
-              <a:rPr lang="en-US" sz="1050" dirty="0">
-                <a:solidFill>
-                  <a:srgbClr val="CCCCCC"/>
-                </a:solidFill>
-                <a:latin typeface="Courier New" pitchFamily="34" charset="0"/>
-                <a:ea typeface="Courier New" pitchFamily="34" charset="-122"/>
-                <a:cs typeface="Courier New" pitchFamily="34" charset="-120"/>
-              </a:rPr>
-              <a:t> </a:t>
-            </a:r>
-            <a:r>
-              <a:rPr lang="en-US" sz="1050" dirty="0">
-                <a:solidFill>
-                  <a:srgbClr val="569CD6"/>
-                </a:solidFill>
-                <a:latin typeface="Courier New" pitchFamily="34" charset="0"/>
-                <a:ea typeface="Courier New" pitchFamily="34" charset="-122"/>
-                <a:cs typeface="Courier New" pitchFamily="34" charset="-120"/>
-              </a:rPr>
-              <a:t>as</a:t>
-            </a:r>
-            <a:r>
-              <a:rPr lang="en-US" sz="1050" dirty="0">
-                <a:solidFill>
-                  <a:srgbClr val="CCCCCC"/>
-                </a:solidFill>
-                <a:latin typeface="Courier New" pitchFamily="34" charset="0"/>
-                <a:ea typeface="Courier New" pitchFamily="34" charset="-122"/>
-                <a:cs typeface="Courier New" pitchFamily="34" charset="-120"/>
-              </a:rPr>
-              <a:t> </a:t>
-            </a:r>
-            <a:r>
-              <a:rPr lang="en-US" sz="1050" dirty="0">
-                <a:solidFill>
-                  <a:srgbClr val="CCCCCC"/>
-                </a:solidFill>
-                <a:latin typeface="Courier New" pitchFamily="34" charset="0"/>
-                <a:ea typeface="Courier New" pitchFamily="34" charset="-122"/>
-                <a:cs typeface="Courier New" pitchFamily="34" charset="-120"/>
-              </a:rPr>
-              <a:t>MonthlySalary</a:t>
-            </a:r>
-            <a:r>
-              <a:rPr lang="en-US" sz="1050" dirty="0">
-                <a:solidFill>
-                  <a:srgbClr val="CCCCCC"/>
-                </a:solidFill>
-                <a:latin typeface="Courier New" pitchFamily="34" charset="0"/>
-                <a:ea typeface="Courier New" pitchFamily="34" charset="-122"/>
-                <a:cs typeface="Courier New" pitchFamily="34" charset="-120"/>
-              </a:rPr>
-              <a:t>,</a:t>
+              <a:rPr lang="en-US" sz="1050" i="1" dirty="0">
+                <a:solidFill>
+                  <a:srgbClr val="6A9955"/>
+                </a:solidFill>
+                <a:latin typeface="Courier New" pitchFamily="34" charset="0"/>
+                <a:ea typeface="Courier New" pitchFamily="34" charset="-122"/>
+                <a:cs typeface="Courier New" pitchFamily="34" charset="-120"/>
+              </a:rPr>
+              <a:t>            * QtdeEstoque as abap.dec( 17, 2 ) )  as ValorEstoque,</a:t>
             </a:r>
             <a:endParaRPr lang="en-US" sz="1050" dirty="0"/>
           </a:p>
@@ -16777,24 +16859,13 @@
             <a:r>
               <a:rPr lang="en-US" sz="1050" dirty="0">
                 <a:solidFill>
-                  <a:srgbClr val="CCCCCC"/>
-                </a:solidFill>
-                <a:latin typeface="Courier New" pitchFamily="34" charset="0"/>
-                <a:ea typeface="Courier New" pitchFamily="34" charset="-122"/>
-                <a:cs typeface="Courier New" pitchFamily="34" charset="-120"/>
-              </a:rPr>
-              <a:t>CurrencyCode</a:t>
-            </a:r>
-            <a:r>
-              <a:rPr lang="en-US" sz="1050" dirty="0">
-                <a:solidFill>
-                  <a:srgbClr val="CCCCCC"/>
-                </a:solidFill>
-                <a:latin typeface="Courier New" pitchFamily="34" charset="0"/>
-                <a:ea typeface="Courier New" pitchFamily="34" charset="-122"/>
-                <a:cs typeface="Courier New" pitchFamily="34" charset="-120"/>
-              </a:rPr>
-              <a:t>,</a:t>
+                  <a:srgbClr val="569CD6"/>
+                </a:solidFill>
+                <a:latin typeface="Courier New" pitchFamily="34" charset="0"/>
+                <a:ea typeface="Courier New" pitchFamily="34" charset="-122"/>
+                <a:cs typeface="Courier New" pitchFamily="34" charset="-120"/>
+              </a:rPr>
+              <a:t>case</a:t>
             </a:r>
             <a:endParaRPr lang="en-US" sz="1050" dirty="0"/>
           </a:p>
@@ -16814,7 +16885,7 @@
                 <a:ea typeface="Courier New" pitchFamily="34" charset="-122"/>
                 <a:cs typeface="Courier New" pitchFamily="34" charset="-120"/>
               </a:rPr>
-              <a:t>      </a:t>
+              <a:t>        </a:t>
             </a:r>
             <a:r>
               <a:rPr lang="en-US" sz="1050" dirty="0">
@@ -16825,7 +16896,128 @@
                 <a:ea typeface="Courier New" pitchFamily="34" charset="-122"/>
                 <a:cs typeface="Courier New" pitchFamily="34" charset="-120"/>
               </a:rPr>
-              <a:t>case</a:t>
+              <a:t>when</a:t>
+            </a:r>
+            <a:r>
+              <a:rPr lang="en-US" sz="1050" dirty="0">
+                <a:solidFill>
+                  <a:srgbClr val="CCCCCC"/>
+                </a:solidFill>
+                <a:latin typeface="Courier New" pitchFamily="34" charset="0"/>
+                <a:ea typeface="Courier New" pitchFamily="34" charset="-122"/>
+                <a:cs typeface="Courier New" pitchFamily="34" charset="-120"/>
+              </a:rPr>
+              <a:t> </a:t>
+            </a:r>
+            <a:r>
+              <a:rPr lang="en-US" sz="1050" dirty="0">
+                <a:solidFill>
+                  <a:srgbClr val="CCCCCC"/>
+                </a:solidFill>
+                <a:latin typeface="Courier New" pitchFamily="34" charset="0"/>
+                <a:ea typeface="Courier New" pitchFamily="34" charset="-122"/>
+                <a:cs typeface="Courier New" pitchFamily="34" charset="-120"/>
+              </a:rPr>
+              <a:t>QtdeDisponivel</a:t>
+            </a:r>
+            <a:r>
+              <a:rPr lang="en-US" sz="1050" dirty="0">
+                <a:solidFill>
+                  <a:srgbClr val="CCCCCC"/>
+                </a:solidFill>
+                <a:latin typeface="Courier New" pitchFamily="34" charset="0"/>
+                <a:ea typeface="Courier New" pitchFamily="34" charset="-122"/>
+                <a:cs typeface="Courier New" pitchFamily="34" charset="-120"/>
+              </a:rPr>
+              <a:t> </a:t>
+            </a:r>
+            <a:r>
+              <a:rPr lang="en-US" sz="1050" dirty="0">
+                <a:solidFill>
+                  <a:srgbClr val="CCCCCC"/>
+                </a:solidFill>
+                <a:latin typeface="Courier New" pitchFamily="34" charset="0"/>
+                <a:ea typeface="Courier New" pitchFamily="34" charset="-122"/>
+                <a:cs typeface="Courier New" pitchFamily="34" charset="-120"/>
+              </a:rPr>
+              <a:t>&lt;</a:t>
+            </a:r>
+            <a:r>
+              <a:rPr lang="en-US" sz="1050" dirty="0">
+                <a:solidFill>
+                  <a:srgbClr val="CCCCCC"/>
+                </a:solidFill>
+                <a:latin typeface="Courier New" pitchFamily="34" charset="0"/>
+                <a:ea typeface="Courier New" pitchFamily="34" charset="-122"/>
+                <a:cs typeface="Courier New" pitchFamily="34" charset="-120"/>
+              </a:rPr>
+              <a:t>=</a:t>
+            </a:r>
+            <a:r>
+              <a:rPr lang="en-US" sz="1050" dirty="0">
+                <a:solidFill>
+                  <a:srgbClr val="CCCCCC"/>
+                </a:solidFill>
+                <a:latin typeface="Courier New" pitchFamily="34" charset="0"/>
+                <a:ea typeface="Courier New" pitchFamily="34" charset="-122"/>
+                <a:cs typeface="Courier New" pitchFamily="34" charset="-120"/>
+              </a:rPr>
+              <a:t> </a:t>
+            </a:r>
+            <a:r>
+              <a:rPr lang="en-US" sz="1050" dirty="0">
+                <a:solidFill>
+                  <a:srgbClr val="B5CEA8"/>
+                </a:solidFill>
+                <a:latin typeface="Courier New" pitchFamily="34" charset="0"/>
+                <a:ea typeface="Courier New" pitchFamily="34" charset="-122"/>
+                <a:cs typeface="Courier New" pitchFamily="34" charset="-120"/>
+              </a:rPr>
+              <a:t>0</a:t>
+            </a:r>
+            <a:r>
+              <a:rPr lang="en-US" sz="1050" dirty="0">
+                <a:solidFill>
+                  <a:srgbClr val="CCCCCC"/>
+                </a:solidFill>
+                <a:latin typeface="Courier New" pitchFamily="34" charset="0"/>
+                <a:ea typeface="Courier New" pitchFamily="34" charset="-122"/>
+                <a:cs typeface="Courier New" pitchFamily="34" charset="-120"/>
+              </a:rPr>
+              <a:t>  </a:t>
+            </a:r>
+            <a:r>
+              <a:rPr lang="en-US" sz="1050" dirty="0">
+                <a:solidFill>
+                  <a:srgbClr val="569CD6"/>
+                </a:solidFill>
+                <a:latin typeface="Courier New" pitchFamily="34" charset="0"/>
+                <a:ea typeface="Courier New" pitchFamily="34" charset="-122"/>
+                <a:cs typeface="Courier New" pitchFamily="34" charset="-120"/>
+              </a:rPr>
+              <a:t>then</a:t>
+            </a:r>
+            <a:r>
+              <a:rPr lang="en-US" sz="1050" dirty="0">
+                <a:solidFill>
+                  <a:srgbClr val="CCCCCC"/>
+                </a:solidFill>
+                <a:latin typeface="Courier New" pitchFamily="34" charset="0"/>
+                <a:ea typeface="Courier New" pitchFamily="34" charset="-122"/>
+                <a:cs typeface="Courier New" pitchFamily="34" charset="-120"/>
+              </a:rPr>
+              <a:t> </a:t>
+            </a:r>
+            <a:r>
+              <a:rPr lang="en-US" sz="1050" dirty="0">
+                <a:solidFill>
+                  <a:srgbClr val="CE9178"/>
+                </a:solidFill>
+                <a:latin typeface="Courier New" pitchFamily="34" charset="0"/>
+                <a:ea typeface="Courier New" pitchFamily="34" charset="-122"/>
+                <a:cs typeface="Courier New" pitchFamily="34" charset="-120"/>
+              </a:rPr>
+              <a:t>'SEM_ESTOQUE'</a:t>
             </a:r>
             <a:endParaRPr lang="en-US" sz="1050" dirty="0"/>
           </a:p>
@@ -16878,7 +17070,7 @@
                 <a:ea typeface="Courier New" pitchFamily="34" charset="-122"/>
                 <a:cs typeface="Courier New" pitchFamily="34" charset="-120"/>
               </a:rPr>
-              <a:t>AnnualSalary</a:t>
+              <a:t>QtdeDisponivel</a:t>
             </a:r>
             <a:r>
               <a:rPr lang="en-US" sz="1050" dirty="0">
@@ -16900,7 +17092,7 @@
                 <a:ea typeface="Courier New" pitchFamily="34" charset="-122"/>
                 <a:cs typeface="Courier New" pitchFamily="34" charset="-120"/>
               </a:rPr>
-              <a:t>&gt;</a:t>
+              <a:t>&lt;</a:t>
             </a:r>
             <a:r>
               <a:rPr lang="en-US" sz="1050" dirty="0">
@@ -16933,7 +17125,7 @@
                 <a:ea typeface="Courier New" pitchFamily="34" charset="-122"/>
                 <a:cs typeface="Courier New" pitchFamily="34" charset="-120"/>
               </a:rPr>
-              <a:t>100000</a:t>
+              <a:t>10</a:t>
             </a:r>
             <a:r>
               <a:rPr lang="en-US" sz="1050" dirty="0">
@@ -16977,7 +17169,7 @@
                 <a:ea typeface="Courier New" pitchFamily="34" charset="-122"/>
                 <a:cs typeface="Courier New" pitchFamily="34" charset="-120"/>
               </a:rPr>
-              <a:t>'A'</a:t>
+              <a:t>'ACABANDO'</a:t>
             </a:r>
             <a:endParaRPr lang="en-US" sz="1050" dirty="0"/>
           </a:p>
@@ -17008,7 +17200,7 @@
                 <a:ea typeface="Courier New" pitchFamily="34" charset="-122"/>
                 <a:cs typeface="Courier New" pitchFamily="34" charset="-120"/>
               </a:rPr>
-              <a:t>when</a:t>
+              <a:t>else</a:t>
             </a:r>
             <a:r>
               <a:rPr lang="en-US" sz="1050" dirty="0">
@@ -17024,112 +17216,13 @@
             <a:r>
               <a:rPr lang="en-US" sz="1050" dirty="0">
                 <a:solidFill>
-                  <a:srgbClr val="CCCCCC"/>
-                </a:solidFill>
-                <a:latin typeface="Courier New" pitchFamily="34" charset="0"/>
-                <a:ea typeface="Courier New" pitchFamily="34" charset="-122"/>
-                <a:cs typeface="Courier New" pitchFamily="34" charset="-120"/>
-              </a:rPr>
-              <a:t>AnnualSalary</a:t>
-            </a:r>
-            <a:r>
-              <a:rPr lang="en-US" sz="1050" dirty="0">
-                <a:solidFill>
-                  <a:srgbClr val="CCCCCC"/>
-                </a:solidFill>
-                <a:latin typeface="Courier New" pitchFamily="34" charset="0"/>
-                <a:ea typeface="Courier New" pitchFamily="34" charset="-122"/>
-                <a:cs typeface="Courier New" pitchFamily="34" charset="-120"/>
-              </a:rPr>
-              <a:t> </a:t>
-            </a:r>
-            <a:r>
-              <a:rPr lang="en-US" sz="1050" dirty="0">
-                <a:solidFill>
-                  <a:srgbClr val="CCCCCC"/>
-                </a:solidFill>
-                <a:latin typeface="Courier New" pitchFamily="34" charset="0"/>
-                <a:ea typeface="Courier New" pitchFamily="34" charset="-122"/>
-                <a:cs typeface="Courier New" pitchFamily="34" charset="-120"/>
-              </a:rPr>
-              <a:t>&gt;</a:t>
-            </a:r>
-            <a:r>
-              <a:rPr lang="en-US" sz="1050" dirty="0">
-                <a:solidFill>
-                  <a:srgbClr val="CCCCCC"/>
-                </a:solidFill>
-                <a:latin typeface="Courier New" pitchFamily="34" charset="0"/>
-                <a:ea typeface="Courier New" pitchFamily="34" charset="-122"/>
-                <a:cs typeface="Courier New" pitchFamily="34" charset="-120"/>
-              </a:rPr>
-              <a:t>=</a:t>
-            </a:r>
-            <a:r>
-              <a:rPr lang="en-US" sz="1050" dirty="0">
-                <a:solidFill>
-                  <a:srgbClr val="CCCCCC"/>
-                </a:solidFill>
-                <a:latin typeface="Courier New" pitchFamily="34" charset="0"/>
-                <a:ea typeface="Courier New" pitchFamily="34" charset="-122"/>
-                <a:cs typeface="Courier New" pitchFamily="34" charset="-120"/>
-              </a:rPr>
-              <a:t>  </a:t>
-            </a:r>
-            <a:r>
-              <a:rPr lang="en-US" sz="1050" dirty="0">
-                <a:solidFill>
-                  <a:srgbClr val="B5CEA8"/>
-                </a:solidFill>
-                <a:latin typeface="Courier New" pitchFamily="34" charset="0"/>
-                <a:ea typeface="Courier New" pitchFamily="34" charset="-122"/>
-                <a:cs typeface="Courier New" pitchFamily="34" charset="-120"/>
-              </a:rPr>
-              <a:t>50000</a:t>
-            </a:r>
-            <a:r>
-              <a:rPr lang="en-US" sz="1050" dirty="0">
-                <a:solidFill>
-                  <a:srgbClr val="CCCCCC"/>
-                </a:solidFill>
-                <a:latin typeface="Courier New" pitchFamily="34" charset="0"/>
-                <a:ea typeface="Courier New" pitchFamily="34" charset="-122"/>
-                <a:cs typeface="Courier New" pitchFamily="34" charset="-120"/>
-              </a:rPr>
-              <a:t> </a:t>
-            </a:r>
-            <a:r>
-              <a:rPr lang="en-US" sz="1050" dirty="0">
-                <a:solidFill>
-                  <a:srgbClr val="569CD6"/>
-                </a:solidFill>
-                <a:latin typeface="Courier New" pitchFamily="34" charset="0"/>
-                <a:ea typeface="Courier New" pitchFamily="34" charset="-122"/>
-                <a:cs typeface="Courier New" pitchFamily="34" charset="-120"/>
-              </a:rPr>
-              <a:t>then</a:t>
-            </a:r>
-            <a:r>
-              <a:rPr lang="en-US" sz="1050" dirty="0">
-                <a:solidFill>
-                  <a:srgbClr val="CCCCCC"/>
-                </a:solidFill>
-                <a:latin typeface="Courier New" pitchFamily="34" charset="0"/>
-                <a:ea typeface="Courier New" pitchFamily="34" charset="-122"/>
-                <a:cs typeface="Courier New" pitchFamily="34" charset="-120"/>
-              </a:rPr>
-              <a:t> </a:t>
-            </a:r>
-            <a:r>
-              <a:rPr lang="en-US" sz="1050" dirty="0">
-                <a:solidFill>
                   <a:srgbClr val="CE9178"/>
                 </a:solidFill>
                 <a:latin typeface="Courier New" pitchFamily="34" charset="0"/>
                 <a:ea typeface="Courier New" pitchFamily="34" charset="-122"/>
                 <a:cs typeface="Courier New" pitchFamily="34" charset="-120"/>
               </a:rPr>
-              <a:t>'B'</a:t>
+              <a:t>'EM_ESTOQUE'</a:t>
             </a:r>
             <a:endParaRPr lang="en-US" sz="1050" dirty="0"/>
           </a:p>
@@ -17149,7 +17242,7 @@
                 <a:ea typeface="Courier New" pitchFamily="34" charset="-122"/>
                 <a:cs typeface="Courier New" pitchFamily="34" charset="-120"/>
               </a:rPr>
-              <a:t>        </a:t>
+              <a:t>      </a:t>
             </a:r>
             <a:r>
               <a:rPr lang="en-US" sz="1050" dirty="0">
@@ -17160,7 +17253,29 @@
                 <a:ea typeface="Courier New" pitchFamily="34" charset="-122"/>
                 <a:cs typeface="Courier New" pitchFamily="34" charset="-120"/>
               </a:rPr>
-              <a:t>else</a:t>
+              <a:t>end</a:t>
+            </a:r>
+            <a:r>
+              <a:rPr lang="en-US" sz="1050" dirty="0">
+                <a:solidFill>
+                  <a:srgbClr val="CCCCCC"/>
+                </a:solidFill>
+                <a:latin typeface="Courier New" pitchFamily="34" charset="0"/>
+                <a:ea typeface="Courier New" pitchFamily="34" charset="-122"/>
+                <a:cs typeface="Courier New" pitchFamily="34" charset="-120"/>
+              </a:rPr>
+              <a:t>                                         </a:t>
+            </a:r>
+            <a:r>
+              <a:rPr lang="en-US" sz="1050" dirty="0">
+                <a:solidFill>
+                  <a:srgbClr val="569CD6"/>
+                </a:solidFill>
+                <a:latin typeface="Courier New" pitchFamily="34" charset="0"/>
+                <a:ea typeface="Courier New" pitchFamily="34" charset="-122"/>
+                <a:cs typeface="Courier New" pitchFamily="34" charset="-120"/>
+              </a:rPr>
+              <a:t>as</a:t>
             </a:r>
             <a:r>
               <a:rPr lang="en-US" sz="1050" dirty="0">
@@ -17176,13 +17291,24 @@
             <a:r>
               <a:rPr lang="en-US" sz="1050" dirty="0">
                 <a:solidFill>
-                  <a:srgbClr val="CE9178"/>
-                </a:solidFill>
-                <a:latin typeface="Courier New" pitchFamily="34" charset="0"/>
-                <a:ea typeface="Courier New" pitchFamily="34" charset="-122"/>
-                <a:cs typeface="Courier New" pitchFamily="34" charset="-120"/>
-              </a:rPr>
-              <a:t>'C'</a:t>
+                  <a:srgbClr val="CCCCCC"/>
+                </a:solidFill>
+                <a:latin typeface="Courier New" pitchFamily="34" charset="0"/>
+                <a:ea typeface="Courier New" pitchFamily="34" charset="-122"/>
+                <a:cs typeface="Courier New" pitchFamily="34" charset="-120"/>
+              </a:rPr>
+              <a:t>FaixaEstoque</a:t>
+            </a:r>
+            <a:r>
+              <a:rPr lang="en-US" sz="1050" dirty="0">
+                <a:solidFill>
+                  <a:srgbClr val="CCCCCC"/>
+                </a:solidFill>
+                <a:latin typeface="Courier New" pitchFamily="34" charset="0"/>
+                <a:ea typeface="Courier New" pitchFamily="34" charset="-122"/>
+                <a:cs typeface="Courier New" pitchFamily="34" charset="-120"/>
+              </a:rPr>
+              <a:t>,</a:t>
             </a:r>
             <a:endParaRPr lang="en-US" sz="1050" dirty="0"/>
           </a:p>
@@ -17213,7 +17339,18 @@
                 <a:ea typeface="Courier New" pitchFamily="34" charset="-122"/>
                 <a:cs typeface="Courier New" pitchFamily="34" charset="-120"/>
               </a:rPr>
-              <a:t>end</a:t>
+              <a:t>cast</a:t>
+            </a:r>
+            <a:r>
+              <a:rPr lang="en-US" sz="1050" dirty="0">
+                <a:solidFill>
+                  <a:srgbClr val="CCCCCC"/>
+                </a:solidFill>
+                <a:latin typeface="Courier New" pitchFamily="34" charset="0"/>
+                <a:ea typeface="Courier New" pitchFamily="34" charset="-122"/>
+                <a:cs typeface="Courier New" pitchFamily="34" charset="-120"/>
+              </a:rPr>
+              <a:t>(</a:t>
             </a:r>
             <a:r>
               <a:rPr lang="en-US" sz="1050" dirty="0">
@@ -17229,6 +17366,28 @@
             <a:r>
               <a:rPr lang="en-US" sz="1050" dirty="0">
                 <a:solidFill>
+                  <a:srgbClr val="B5CEA8"/>
+                </a:solidFill>
+                <a:latin typeface="Courier New" pitchFamily="34" charset="0"/>
+                <a:ea typeface="Courier New" pitchFamily="34" charset="-122"/>
+                <a:cs typeface="Courier New" pitchFamily="34" charset="-120"/>
+              </a:rPr>
+              <a:t>1</a:t>
+            </a:r>
+            <a:r>
+              <a:rPr lang="en-US" sz="1050" dirty="0">
+                <a:solidFill>
+                  <a:srgbClr val="CCCCCC"/>
+                </a:solidFill>
+                <a:latin typeface="Courier New" pitchFamily="34" charset="0"/>
+                <a:ea typeface="Courier New" pitchFamily="34" charset="-122"/>
+                <a:cs typeface="Courier New" pitchFamily="34" charset="-120"/>
+              </a:rPr>
+              <a:t> </a:t>
+            </a:r>
+            <a:r>
+              <a:rPr lang="en-US" sz="1050" dirty="0">
+                <a:solidFill>
                   <a:srgbClr val="569CD6"/>
                 </a:solidFill>
                 <a:latin typeface="Courier New" pitchFamily="34" charset="0"/>
@@ -17257,38 +17416,62 @@
                 <a:ea typeface="Courier New" pitchFamily="34" charset="-122"/>
                 <a:cs typeface="Courier New" pitchFamily="34" charset="-120"/>
               </a:rPr>
-              <a:t>SalaryBand</a:t>
-            </a:r>
-            <a:r>
-              <a:rPr lang="en-US" sz="1050" dirty="0">
-                <a:solidFill>
-                  <a:srgbClr val="CCCCCC"/>
-                </a:solidFill>
-                <a:latin typeface="Courier New" pitchFamily="34" charset="0"/>
-                <a:ea typeface="Courier New" pitchFamily="34" charset="-122"/>
-                <a:cs typeface="Courier New" pitchFamily="34" charset="-120"/>
-              </a:rPr>
-              <a:t>,</a:t>
-            </a:r>
-            <a:endParaRPr lang="en-US" sz="1050" dirty="0"/>
-          </a:p>
-          <a:p>
-            <a:pPr indent="0" marL="0">
-              <a:lnSpc>
-                <a:spcPct val="105000"/>
-              </a:lnSpc>
-              <a:buNone/>
-            </a:pPr>
-            <a:r>
-              <a:rPr lang="en-US" sz="1050" dirty="0">
-                <a:solidFill>
-                  <a:srgbClr val="CCCCCC"/>
-                </a:solidFill>
-                <a:latin typeface="Courier New" pitchFamily="34" charset="0"/>
-                <a:ea typeface="Courier New" pitchFamily="34" charset="-122"/>
-                <a:cs typeface="Courier New" pitchFamily="34" charset="-120"/>
-              </a:rPr>
-              <a:t>      </a:t>
+              <a:t>abap</a:t>
+            </a:r>
+            <a:r>
+              <a:rPr lang="en-US" sz="1050" dirty="0">
+                <a:solidFill>
+                  <a:srgbClr val="CCCCCC"/>
+                </a:solidFill>
+                <a:latin typeface="Courier New" pitchFamily="34" charset="0"/>
+                <a:ea typeface="Courier New" pitchFamily="34" charset="-122"/>
+                <a:cs typeface="Courier New" pitchFamily="34" charset="-120"/>
+              </a:rPr>
+              <a:t>.</a:t>
+            </a:r>
+            <a:r>
+              <a:rPr lang="en-US" sz="1050" dirty="0">
+                <a:solidFill>
+                  <a:srgbClr val="CCCCCC"/>
+                </a:solidFill>
+                <a:latin typeface="Courier New" pitchFamily="34" charset="0"/>
+                <a:ea typeface="Courier New" pitchFamily="34" charset="-122"/>
+                <a:cs typeface="Courier New" pitchFamily="34" charset="-120"/>
+              </a:rPr>
+              <a:t>int4</a:t>
+            </a:r>
+            <a:r>
+              <a:rPr lang="en-US" sz="1050" dirty="0">
+                <a:solidFill>
+                  <a:srgbClr val="CCCCCC"/>
+                </a:solidFill>
+                <a:latin typeface="Courier New" pitchFamily="34" charset="0"/>
+                <a:ea typeface="Courier New" pitchFamily="34" charset="-122"/>
+                <a:cs typeface="Courier New" pitchFamily="34" charset="-120"/>
+              </a:rPr>
+              <a:t> </a:t>
+            </a:r>
+            <a:r>
+              <a:rPr lang="en-US" sz="1050" dirty="0">
+                <a:solidFill>
+                  <a:srgbClr val="CCCCCC"/>
+                </a:solidFill>
+                <a:latin typeface="Courier New" pitchFamily="34" charset="0"/>
+                <a:ea typeface="Courier New" pitchFamily="34" charset="-122"/>
+                <a:cs typeface="Courier New" pitchFamily="34" charset="-120"/>
+              </a:rPr>
+              <a:t>)</a:t>
+            </a:r>
+            <a:r>
+              <a:rPr lang="en-US" sz="1050" dirty="0">
+                <a:solidFill>
+                  <a:srgbClr val="CCCCCC"/>
+                </a:solidFill>
+                <a:latin typeface="Courier New" pitchFamily="34" charset="0"/>
+                <a:ea typeface="Courier New" pitchFamily="34" charset="-122"/>
+                <a:cs typeface="Courier New" pitchFamily="34" charset="-120"/>
+              </a:rPr>
+              <a:t>                      </a:t>
             </a:r>
             <a:r>
               <a:rPr lang="en-US" sz="1050" dirty="0">
@@ -17299,18 +17482,7 @@
                 <a:ea typeface="Courier New" pitchFamily="34" charset="-122"/>
                 <a:cs typeface="Courier New" pitchFamily="34" charset="-120"/>
               </a:rPr>
-              <a:t>cast</a:t>
-            </a:r>
-            <a:r>
-              <a:rPr lang="en-US" sz="1050" dirty="0">
-                <a:solidFill>
-                  <a:srgbClr val="CCCCCC"/>
-                </a:solidFill>
-                <a:latin typeface="Courier New" pitchFamily="34" charset="0"/>
-                <a:ea typeface="Courier New" pitchFamily="34" charset="-122"/>
-                <a:cs typeface="Courier New" pitchFamily="34" charset="-120"/>
-              </a:rPr>
-              <a:t>(</a:t>
+              <a:t>as</a:t>
             </a:r>
             <a:r>
               <a:rPr lang="en-US" sz="1050" dirty="0">
@@ -17326,178 +17498,13 @@
             <a:r>
               <a:rPr lang="en-US" sz="1050" dirty="0">
                 <a:solidFill>
-                  <a:srgbClr val="CE9178"/>
-                </a:solidFill>
-                <a:latin typeface="Courier New" pitchFamily="34" charset="0"/>
-                <a:ea typeface="Courier New" pitchFamily="34" charset="-122"/>
-                <a:cs typeface="Courier New" pitchFamily="34" charset="-120"/>
-              </a:rPr>
-              <a:t>'X'</a:t>
-            </a:r>
-            <a:r>
-              <a:rPr lang="en-US" sz="1050" dirty="0">
-                <a:solidFill>
-                  <a:srgbClr val="CCCCCC"/>
-                </a:solidFill>
-                <a:latin typeface="Courier New" pitchFamily="34" charset="0"/>
-                <a:ea typeface="Courier New" pitchFamily="34" charset="-122"/>
-                <a:cs typeface="Courier New" pitchFamily="34" charset="-120"/>
-              </a:rPr>
-              <a:t> </a:t>
-            </a:r>
-            <a:r>
-              <a:rPr lang="en-US" sz="1050" dirty="0">
-                <a:solidFill>
-                  <a:srgbClr val="569CD6"/>
-                </a:solidFill>
-                <a:latin typeface="Courier New" pitchFamily="34" charset="0"/>
-                <a:ea typeface="Courier New" pitchFamily="34" charset="-122"/>
-                <a:cs typeface="Courier New" pitchFamily="34" charset="-120"/>
-              </a:rPr>
-              <a:t>as</a:t>
-            </a:r>
-            <a:r>
-              <a:rPr lang="en-US" sz="1050" dirty="0">
-                <a:solidFill>
-                  <a:srgbClr val="CCCCCC"/>
-                </a:solidFill>
-                <a:latin typeface="Courier New" pitchFamily="34" charset="0"/>
-                <a:ea typeface="Courier New" pitchFamily="34" charset="-122"/>
-                <a:cs typeface="Courier New" pitchFamily="34" charset="-120"/>
-              </a:rPr>
-              <a:t> </a:t>
-            </a:r>
-            <a:r>
-              <a:rPr lang="en-US" sz="1050" dirty="0">
-                <a:solidFill>
-                  <a:srgbClr val="CCCCCC"/>
-                </a:solidFill>
-                <a:latin typeface="Courier New" pitchFamily="34" charset="0"/>
-                <a:ea typeface="Courier New" pitchFamily="34" charset="-122"/>
-                <a:cs typeface="Courier New" pitchFamily="34" charset="-120"/>
-              </a:rPr>
-              <a:t>abap</a:t>
-            </a:r>
-            <a:r>
-              <a:rPr lang="en-US" sz="1050" dirty="0">
-                <a:solidFill>
-                  <a:srgbClr val="CCCCCC"/>
-                </a:solidFill>
-                <a:latin typeface="Courier New" pitchFamily="34" charset="0"/>
-                <a:ea typeface="Courier New" pitchFamily="34" charset="-122"/>
-                <a:cs typeface="Courier New" pitchFamily="34" charset="-120"/>
-              </a:rPr>
-              <a:t>.</a:t>
-            </a:r>
-            <a:r>
-              <a:rPr lang="en-US" sz="1050" dirty="0">
-                <a:solidFill>
-                  <a:srgbClr val="DCDCAA"/>
-                </a:solidFill>
-                <a:latin typeface="Courier New" pitchFamily="34" charset="0"/>
-                <a:ea typeface="Courier New" pitchFamily="34" charset="-122"/>
-                <a:cs typeface="Courier New" pitchFamily="34" charset="-120"/>
-              </a:rPr>
-              <a:t>char</a:t>
-            </a:r>
-            <a:r>
-              <a:rPr lang="en-US" sz="1050" dirty="0">
-                <a:solidFill>
-                  <a:srgbClr val="CCCCCC"/>
-                </a:solidFill>
-                <a:latin typeface="Courier New" pitchFamily="34" charset="0"/>
-                <a:ea typeface="Courier New" pitchFamily="34" charset="-122"/>
-                <a:cs typeface="Courier New" pitchFamily="34" charset="-120"/>
-              </a:rPr>
-              <a:t>(</a:t>
-            </a:r>
-            <a:r>
-              <a:rPr lang="en-US" sz="1050" dirty="0">
-                <a:solidFill>
-                  <a:srgbClr val="B5CEA8"/>
-                </a:solidFill>
-                <a:latin typeface="Courier New" pitchFamily="34" charset="0"/>
-                <a:ea typeface="Courier New" pitchFamily="34" charset="-122"/>
-                <a:cs typeface="Courier New" pitchFamily="34" charset="-120"/>
-              </a:rPr>
-              <a:t>1</a:t>
-            </a:r>
-            <a:r>
-              <a:rPr lang="en-US" sz="1050" dirty="0">
-                <a:solidFill>
-                  <a:srgbClr val="CCCCCC"/>
-                </a:solidFill>
-                <a:latin typeface="Courier New" pitchFamily="34" charset="0"/>
-                <a:ea typeface="Courier New" pitchFamily="34" charset="-122"/>
-                <a:cs typeface="Courier New" pitchFamily="34" charset="-120"/>
-              </a:rPr>
-              <a:t>)</a:t>
-            </a:r>
-            <a:r>
-              <a:rPr lang="en-US" sz="1050" dirty="0">
-                <a:solidFill>
-                  <a:srgbClr val="CCCCCC"/>
-                </a:solidFill>
-                <a:latin typeface="Courier New" pitchFamily="34" charset="0"/>
-                <a:ea typeface="Courier New" pitchFamily="34" charset="-122"/>
-                <a:cs typeface="Courier New" pitchFamily="34" charset="-120"/>
-              </a:rPr>
-              <a:t> </a:t>
-            </a:r>
-            <a:r>
-              <a:rPr lang="en-US" sz="1050" dirty="0">
-                <a:solidFill>
-                  <a:srgbClr val="CCCCCC"/>
-                </a:solidFill>
-                <a:latin typeface="Courier New" pitchFamily="34" charset="0"/>
-                <a:ea typeface="Courier New" pitchFamily="34" charset="-122"/>
-                <a:cs typeface="Courier New" pitchFamily="34" charset="-120"/>
-              </a:rPr>
-              <a:t>)</a:t>
-            </a:r>
-            <a:r>
-              <a:rPr lang="en-US" sz="1050" dirty="0">
-                <a:solidFill>
-                  <a:srgbClr val="CCCCCC"/>
-                </a:solidFill>
-                <a:latin typeface="Courier New" pitchFamily="34" charset="0"/>
-                <a:ea typeface="Courier New" pitchFamily="34" charset="-122"/>
-                <a:cs typeface="Courier New" pitchFamily="34" charset="-120"/>
-              </a:rPr>
-              <a:t>  </a:t>
-            </a:r>
-            <a:r>
-              <a:rPr lang="en-US" sz="1050" dirty="0">
-                <a:solidFill>
-                  <a:srgbClr val="569CD6"/>
-                </a:solidFill>
-                <a:latin typeface="Courier New" pitchFamily="34" charset="0"/>
-                <a:ea typeface="Courier New" pitchFamily="34" charset="-122"/>
-                <a:cs typeface="Courier New" pitchFamily="34" charset="-120"/>
-              </a:rPr>
-              <a:t>as</a:t>
-            </a:r>
-            <a:r>
-              <a:rPr lang="en-US" sz="1050" dirty="0">
-                <a:solidFill>
-                  <a:srgbClr val="CCCCCC"/>
-                </a:solidFill>
-                <a:latin typeface="Courier New" pitchFamily="34" charset="0"/>
-                <a:ea typeface="Courier New" pitchFamily="34" charset="-122"/>
-                <a:cs typeface="Courier New" pitchFamily="34" charset="-120"/>
-              </a:rPr>
-              <a:t> </a:t>
-            </a:r>
-            <a:r>
-              <a:rPr lang="en-US" sz="1050" dirty="0">
-                <a:solidFill>
-                  <a:srgbClr val="CCCCCC"/>
-                </a:solidFill>
-                <a:latin typeface="Courier New" pitchFamily="34" charset="0"/>
-                <a:ea typeface="Courier New" pitchFamily="34" charset="-122"/>
-                <a:cs typeface="Courier New" pitchFamily="34" charset="-120"/>
-              </a:rPr>
-              <a:t>IsActive</a:t>
+                  <a:srgbClr val="CCCCCC"/>
+                </a:solidFill>
+                <a:latin typeface="Courier New" pitchFamily="34" charset="0"/>
+                <a:ea typeface="Courier New" pitchFamily="34" charset="-122"/>
+                <a:cs typeface="Courier New" pitchFamily="34" charset="-120"/>
+              </a:rPr>
+              <a:t>QtdeItens</a:t>
             </a:r>
             <a:endParaRPr lang="en-US" sz="1050" dirty="0"/>
           </a:p>
@@ -17660,7 +17667,26 @@
                   <a:srgbClr val="556B82"/>
                 </a:solidFill>
               </a:rPr>
-              <a:t>Operações sobre campos da fonte; o resultado vira um elemento da view.</a:t>
+              <a:t>Preço × quantidade vira o elemento </a:t>
+            </a:r>
+            <a:r>
+              <a:rPr lang="en-US" sz="1050" dirty="0">
+                <a:solidFill>
+                  <a:srgbClr val="0064D9"/>
+                </a:solidFill>
+                <a:latin typeface="Courier New" pitchFamily="34" charset="0"/>
+                <a:ea typeface="Courier New" pitchFamily="34" charset="-122"/>
+                <a:cs typeface="Courier New" pitchFamily="34" charset="-120"/>
+              </a:rPr>
+              <a:t>ValorEstoque</a:t>
+            </a:r>
+            <a:r>
+              <a:rPr lang="en-US" sz="1050" dirty="0">
+                <a:solidFill>
+                  <a:srgbClr val="556B82"/>
+                </a:solidFill>
+              </a:rPr>
+              <a:t>, calculado no banco.</a:t>
             </a:r>
             <a:endParaRPr lang="en-US" sz="1400" dirty="0"/>
           </a:p>
@@ -17772,7 +17798,7 @@
                   <a:srgbClr val="556B82"/>
                 </a:solidFill>
               </a:rPr>
-              <a:t>Forma simples (por valor) ou complexa (</a:t>
+              <a:t>Forma complexa (</a:t>
             </a:r>
             <a:r>
               <a:rPr lang="en-US" sz="1050" dirty="0">
@@ -17791,7 +17817,26 @@
                   <a:srgbClr val="556B82"/>
                 </a:solidFill>
               </a:rPr>
-              <a:t> com condições).</a:t>
+              <a:t> com condições): a mesma faixa de </a:t>
+            </a:r>
+            <a:r>
+              <a:rPr lang="en-US" sz="1050" dirty="0">
+                <a:solidFill>
+                  <a:srgbClr val="0064D9"/>
+                </a:solidFill>
+                <a:latin typeface="Courier New" pitchFamily="34" charset="0"/>
+                <a:ea typeface="Courier New" pitchFamily="34" charset="-122"/>
+                <a:cs typeface="Courier New" pitchFamily="34" charset="-120"/>
+              </a:rPr>
+              <a:t>calcular_status_estoque</a:t>
+            </a:r>
+            <a:r>
+              <a:rPr lang="en-US" sz="1050" dirty="0">
+                <a:solidFill>
+                  <a:srgbClr val="556B82"/>
+                </a:solidFill>
+              </a:rPr>
+              <a:t> no ABAP.</a:t>
             </a:r>
             <a:endParaRPr lang="en-US" sz="1400" dirty="0"/>
           </a:p>
@@ -17903,7 +17948,7 @@
                   <a:srgbClr val="556B82"/>
                 </a:solidFill>
               </a:rPr>
-              <a:t>Tipo de destino com o prefixo </a:t>
+              <a:t>O cast interno troca </a:t>
             </a:r>
             <a:r>
               <a:rPr lang="en-US" sz="1050" dirty="0">
@@ -17914,7 +17959,7 @@
                 <a:ea typeface="Courier New" pitchFamily="34" charset="-122"/>
                 <a:cs typeface="Courier New" pitchFamily="34" charset="-120"/>
               </a:rPr>
-              <a:t>abap.</a:t>
+              <a:t>CURR</a:t>
             </a:r>
             <a:r>
               <a:rPr lang="en-US" sz="1050" dirty="0">
@@ -17922,7 +17967,45 @@
                   <a:srgbClr val="556B82"/>
                 </a:solidFill>
               </a:rPr>
-              <a:t>; nem toda combinação é permitida.</a:t>
+              <a:t> por </a:t>
+            </a:r>
+            <a:r>
+              <a:rPr lang="en-US" sz="1050" dirty="0">
+                <a:solidFill>
+                  <a:srgbClr val="0064D9"/>
+                </a:solidFill>
+                <a:latin typeface="Courier New" pitchFamily="34" charset="0"/>
+                <a:ea typeface="Courier New" pitchFamily="34" charset="-122"/>
+                <a:cs typeface="Courier New" pitchFamily="34" charset="-120"/>
+              </a:rPr>
+              <a:t>DEC</a:t>
+            </a:r>
+            <a:r>
+              <a:rPr lang="en-US" sz="1050" dirty="0">
+                <a:solidFill>
+                  <a:srgbClr val="556B82"/>
+                </a:solidFill>
+              </a:rPr>
+              <a:t>; </a:t>
+            </a:r>
+            <a:r>
+              <a:rPr lang="en-US" sz="1050" dirty="0">
+                <a:solidFill>
+                  <a:srgbClr val="0064D9"/>
+                </a:solidFill>
+                <a:latin typeface="Courier New" pitchFamily="34" charset="0"/>
+                <a:ea typeface="Courier New" pitchFamily="34" charset="-122"/>
+                <a:cs typeface="Courier New" pitchFamily="34" charset="-120"/>
+              </a:rPr>
+              <a:t>cast( 1 … )</a:t>
+            </a:r>
+            <a:r>
+              <a:rPr lang="en-US" sz="1050" dirty="0">
+                <a:solidFill>
+                  <a:srgbClr val="556B82"/>
+                </a:solidFill>
+              </a:rPr>
+              <a:t> cria um contador que o app soma.</a:t>
             </a:r>
             <a:endParaRPr lang="en-US" sz="1400" dirty="0"/>
           </a:p>
@@ -18216,7 +18299,7 @@
                   <a:srgbClr val="89D1FF"/>
                 </a:solidFill>
               </a:rPr>
-              <a:t>AULA 02.06 · SEÇÃO 2</a:t>
+              <a:t>AULA 03.06 · SEÇÃO 2</a:t>
             </a:r>
             <a:endParaRPr lang="en-US" sz="1300" dirty="0"/>
           </a:p>
@@ -19924,7 +20007,7 @@
         <p:spPr>
           <a:xfrm>
             <a:off x="640080" y="1700784"/>
-            <a:ext cx="3086100" cy="292608"/>
+            <a:ext cx="2619756" cy="292608"/>
           </a:xfrm>
           <a:prstGeom prst="rect">
             <a:avLst/>
@@ -19944,7 +20027,7 @@
         <p:spPr>
           <a:xfrm>
             <a:off x="640080" y="1700784"/>
-            <a:ext cx="3086100" cy="27432"/>
+            <a:ext cx="2619756" cy="27432"/>
           </a:xfrm>
           <a:prstGeom prst="rect">
             <a:avLst/>
@@ -19964,7 +20047,7 @@
         <p:spPr>
           <a:xfrm>
             <a:off x="731520" y="1719072"/>
-            <a:ext cx="2903220" cy="274320"/>
+            <a:ext cx="2436876" cy="274320"/>
           </a:xfrm>
           <a:prstGeom prst="rect">
             <a:avLst/>
@@ -19985,7 +20068,7 @@
                   <a:srgbClr val="FFFFFF"/>
                 </a:solidFill>
               </a:rPr>
-              <a:t>zs4d430_c_employeequery.ddls.asddls</a:t>
+              <a:t>zi_pc_pedido_cube.ddls.asddls</a:t>
             </a:r>
             <a:endParaRPr lang="en-US" sz="950" dirty="0"/>
           </a:p>
@@ -20021,7 +20104,7 @@
                   <a:srgbClr val="9DA5B4"/>
                 </a:solidFill>
               </a:rPr>
-              <a:t>ZS4D430_## › Core Data Services (trecho)</a:t>
+              <a:t>Trechos sobre ZR_PC_CLIENTE e ZR_PC_PEDIDO (MesCriacao é real)</a:t>
             </a:r>
             <a:endParaRPr lang="en-US" sz="850" dirty="0"/>
           </a:p>
@@ -20287,6 +20370,26 @@
             </a:r>
             <a:endParaRPr lang="en-US" sz="950" dirty="0"/>
           </a:p>
+          <a:p>
+            <a:pPr algn="r" indent="0" marL="0">
+              <a:lnSpc>
+                <a:spcPct val="105000"/>
+              </a:lnSpc>
+              <a:buNone/>
+            </a:pPr>
+            <a:r>
+              <a:rPr lang="en-US" sz="950" dirty="0">
+                <a:solidFill>
+                  <a:srgbClr val="6E7681"/>
+                </a:solidFill>
+                <a:latin typeface="Courier New" pitchFamily="34" charset="0"/>
+                <a:ea typeface="Courier New" pitchFamily="34" charset="-122"/>
+                <a:cs typeface="Courier New" pitchFamily="34" charset="-120"/>
+              </a:rPr>
+              <a:t>13</a:t>
+            </a:r>
+            <a:endParaRPr lang="en-US" sz="950" dirty="0"/>
+          </a:p>
         </p:txBody>
       </p:sp>
       <p:sp>
@@ -20369,7 +20472,7 @@
                 <a:ea typeface="Courier New" pitchFamily="34" charset="-122"/>
                 <a:cs typeface="Courier New" pitchFamily="34" charset="-120"/>
               </a:rPr>
-              <a:t>FirstName</a:t>
+              <a:t>Nome</a:t>
             </a:r>
             <a:r>
               <a:rPr lang="en-US" sz="950" dirty="0">
@@ -20402,7 +20505,7 @@
                 <a:ea typeface="Courier New" pitchFamily="34" charset="-122"/>
                 <a:cs typeface="Courier New" pitchFamily="34" charset="-120"/>
               </a:rPr>
-              <a:t>LastName</a:t>
+              <a:t>Cpf</a:t>
             </a:r>
             <a:r>
               <a:rPr lang="en-US" sz="950" dirty="0">
@@ -20468,7 +20571,7 @@
                 <a:ea typeface="Courier New" pitchFamily="34" charset="-122"/>
                 <a:cs typeface="Courier New" pitchFamily="34" charset="-120"/>
               </a:rPr>
-              <a:t>   </a:t>
+              <a:t>             </a:t>
             </a:r>
             <a:r>
               <a:rPr lang="en-US" sz="950" dirty="0">
@@ -20501,7 +20604,7 @@
                 <a:ea typeface="Courier New" pitchFamily="34" charset="-122"/>
                 <a:cs typeface="Courier New" pitchFamily="34" charset="-120"/>
               </a:rPr>
-              <a:t>FullName</a:t>
+              <a:t>NomeCpf</a:t>
             </a:r>
             <a:r>
               <a:rPr lang="en-US" sz="950" dirty="0">
@@ -20557,13 +20660,79 @@
             <a:r>
               <a:rPr lang="en-US" sz="950" dirty="0">
                 <a:solidFill>
+                  <a:srgbClr val="569CD6"/>
+                </a:solidFill>
+                <a:latin typeface="Courier New" pitchFamily="34" charset="0"/>
+                <a:ea typeface="Courier New" pitchFamily="34" charset="-122"/>
+                <a:cs typeface="Courier New" pitchFamily="34" charset="-120"/>
+              </a:rPr>
+              <a:t>left</a:t>
+            </a:r>
+            <a:r>
+              <a:rPr lang="en-US" sz="950" dirty="0">
+                <a:solidFill>
+                  <a:srgbClr val="CCCCCC"/>
+                </a:solidFill>
+                <a:latin typeface="Courier New" pitchFamily="34" charset="0"/>
+                <a:ea typeface="Courier New" pitchFamily="34" charset="-122"/>
+                <a:cs typeface="Courier New" pitchFamily="34" charset="-120"/>
+              </a:rPr>
+              <a:t>(</a:t>
+            </a:r>
+            <a:r>
+              <a:rPr lang="en-US" sz="950" dirty="0">
+                <a:solidFill>
+                  <a:srgbClr val="CCCCCC"/>
+                </a:solidFill>
+                <a:latin typeface="Courier New" pitchFamily="34" charset="0"/>
+                <a:ea typeface="Courier New" pitchFamily="34" charset="-122"/>
+                <a:cs typeface="Courier New" pitchFamily="34" charset="-120"/>
+              </a:rPr>
+              <a:t> </a:t>
+            </a:r>
+            <a:r>
+              <a:rPr lang="en-US" sz="950" dirty="0">
+                <a:solidFill>
+                  <a:srgbClr val="569CD6"/>
+                </a:solidFill>
+                <a:latin typeface="Courier New" pitchFamily="34" charset="0"/>
+                <a:ea typeface="Courier New" pitchFamily="34" charset="-122"/>
+                <a:cs typeface="Courier New" pitchFamily="34" charset="-120"/>
+              </a:rPr>
+              <a:t>cast</a:t>
+            </a:r>
+            <a:r>
+              <a:rPr lang="en-US" sz="950" dirty="0">
+                <a:solidFill>
+                  <a:srgbClr val="CCCCCC"/>
+                </a:solidFill>
+                <a:latin typeface="Courier New" pitchFamily="34" charset="0"/>
+                <a:ea typeface="Courier New" pitchFamily="34" charset="-122"/>
+                <a:cs typeface="Courier New" pitchFamily="34" charset="-120"/>
+              </a:rPr>
+              <a:t>(</a:t>
+            </a:r>
+            <a:r>
+              <a:rPr lang="en-US" sz="950" dirty="0">
+                <a:solidFill>
+                  <a:srgbClr val="CCCCCC"/>
+                </a:solidFill>
+                <a:latin typeface="Courier New" pitchFamily="34" charset="0"/>
+                <a:ea typeface="Courier New" pitchFamily="34" charset="-122"/>
+                <a:cs typeface="Courier New" pitchFamily="34" charset="-120"/>
+              </a:rPr>
+              <a:t> </a:t>
+            </a:r>
+            <a:r>
+              <a:rPr lang="en-US" sz="950" dirty="0">
+                <a:solidFill>
                   <a:srgbClr val="DCDCAA"/>
                 </a:solidFill>
                 <a:latin typeface="Courier New" pitchFamily="34" charset="0"/>
                 <a:ea typeface="Courier New" pitchFamily="34" charset="-122"/>
                 <a:cs typeface="Courier New" pitchFamily="34" charset="-120"/>
               </a:rPr>
-              <a:t>dats_days_between</a:t>
+              <a:t>tstmp_to_dats</a:t>
             </a:r>
             <a:r>
               <a:rPr lang="en-US" sz="950" dirty="0">
@@ -20590,13 +20759,189 @@
             <a:r>
               <a:rPr lang="en-US" sz="950" dirty="0">
                 <a:solidFill>
-                  <a:srgbClr val="CCCCCC"/>
-                </a:solidFill>
-                <a:latin typeface="Courier New" pitchFamily="34" charset="0"/>
-                <a:ea typeface="Courier New" pitchFamily="34" charset="-122"/>
-                <a:cs typeface="Courier New" pitchFamily="34" charset="-120"/>
-              </a:rPr>
-              <a:t>EntryDate</a:t>
+                  <a:srgbClr val="569CD6"/>
+                </a:solidFill>
+                <a:latin typeface="Courier New" pitchFamily="34" charset="0"/>
+                <a:ea typeface="Courier New" pitchFamily="34" charset="-122"/>
+                <a:cs typeface="Courier New" pitchFamily="34" charset="-120"/>
+              </a:rPr>
+              <a:t>cast</a:t>
+            </a:r>
+            <a:r>
+              <a:rPr lang="en-US" sz="950" dirty="0">
+                <a:solidFill>
+                  <a:srgbClr val="CCCCCC"/>
+                </a:solidFill>
+                <a:latin typeface="Courier New" pitchFamily="34" charset="0"/>
+                <a:ea typeface="Courier New" pitchFamily="34" charset="-122"/>
+                <a:cs typeface="Courier New" pitchFamily="34" charset="-120"/>
+              </a:rPr>
+              <a:t>(</a:t>
+            </a:r>
+            <a:r>
+              <a:rPr lang="en-US" sz="950" dirty="0">
+                <a:solidFill>
+                  <a:srgbClr val="CCCCCC"/>
+                </a:solidFill>
+                <a:latin typeface="Courier New" pitchFamily="34" charset="0"/>
+                <a:ea typeface="Courier New" pitchFamily="34" charset="-122"/>
+                <a:cs typeface="Courier New" pitchFamily="34" charset="-120"/>
+              </a:rPr>
+              <a:t> </a:t>
+            </a:r>
+            <a:r>
+              <a:rPr lang="en-US" sz="950" dirty="0">
+                <a:solidFill>
+                  <a:srgbClr val="CCCCCC"/>
+                </a:solidFill>
+                <a:latin typeface="Courier New" pitchFamily="34" charset="0"/>
+                <a:ea typeface="Courier New" pitchFamily="34" charset="-122"/>
+                <a:cs typeface="Courier New" pitchFamily="34" charset="-120"/>
+              </a:rPr>
+              <a:t>CreatedAt</a:t>
+            </a:r>
+            <a:r>
+              <a:rPr lang="en-US" sz="950" dirty="0">
+                <a:solidFill>
+                  <a:srgbClr val="CCCCCC"/>
+                </a:solidFill>
+                <a:latin typeface="Courier New" pitchFamily="34" charset="0"/>
+                <a:ea typeface="Courier New" pitchFamily="34" charset="-122"/>
+                <a:cs typeface="Courier New" pitchFamily="34" charset="-120"/>
+              </a:rPr>
+              <a:t> </a:t>
+            </a:r>
+            <a:r>
+              <a:rPr lang="en-US" sz="950" dirty="0">
+                <a:solidFill>
+                  <a:srgbClr val="569CD6"/>
+                </a:solidFill>
+                <a:latin typeface="Courier New" pitchFamily="34" charset="0"/>
+                <a:ea typeface="Courier New" pitchFamily="34" charset="-122"/>
+                <a:cs typeface="Courier New" pitchFamily="34" charset="-120"/>
+              </a:rPr>
+              <a:t>as</a:t>
+            </a:r>
+            <a:r>
+              <a:rPr lang="en-US" sz="950" dirty="0">
+                <a:solidFill>
+                  <a:srgbClr val="CCCCCC"/>
+                </a:solidFill>
+                <a:latin typeface="Courier New" pitchFamily="34" charset="0"/>
+                <a:ea typeface="Courier New" pitchFamily="34" charset="-122"/>
+                <a:cs typeface="Courier New" pitchFamily="34" charset="-120"/>
+              </a:rPr>
+              <a:t> </a:t>
+            </a:r>
+            <a:r>
+              <a:rPr lang="en-US" sz="950" dirty="0">
+                <a:solidFill>
+                  <a:srgbClr val="CCCCCC"/>
+                </a:solidFill>
+                <a:latin typeface="Courier New" pitchFamily="34" charset="0"/>
+                <a:ea typeface="Courier New" pitchFamily="34" charset="-122"/>
+                <a:cs typeface="Courier New" pitchFamily="34" charset="-120"/>
+              </a:rPr>
+              <a:t>abap</a:t>
+            </a:r>
+            <a:r>
+              <a:rPr lang="en-US" sz="950" dirty="0">
+                <a:solidFill>
+                  <a:srgbClr val="CCCCCC"/>
+                </a:solidFill>
+                <a:latin typeface="Courier New" pitchFamily="34" charset="0"/>
+                <a:ea typeface="Courier New" pitchFamily="34" charset="-122"/>
+                <a:cs typeface="Courier New" pitchFamily="34" charset="-120"/>
+              </a:rPr>
+              <a:t>.</a:t>
+            </a:r>
+            <a:r>
+              <a:rPr lang="en-US" sz="950" dirty="0">
+                <a:solidFill>
+                  <a:srgbClr val="DCDCAA"/>
+                </a:solidFill>
+                <a:latin typeface="Courier New" pitchFamily="34" charset="0"/>
+                <a:ea typeface="Courier New" pitchFamily="34" charset="-122"/>
+                <a:cs typeface="Courier New" pitchFamily="34" charset="-120"/>
+              </a:rPr>
+              <a:t>dec</a:t>
+            </a:r>
+            <a:r>
+              <a:rPr lang="en-US" sz="950" dirty="0">
+                <a:solidFill>
+                  <a:srgbClr val="CCCCCC"/>
+                </a:solidFill>
+                <a:latin typeface="Courier New" pitchFamily="34" charset="0"/>
+                <a:ea typeface="Courier New" pitchFamily="34" charset="-122"/>
+                <a:cs typeface="Courier New" pitchFamily="34" charset="-120"/>
+              </a:rPr>
+              <a:t>(</a:t>
+            </a:r>
+            <a:r>
+              <a:rPr lang="en-US" sz="950" dirty="0">
+                <a:solidFill>
+                  <a:srgbClr val="B5CEA8"/>
+                </a:solidFill>
+                <a:latin typeface="Courier New" pitchFamily="34" charset="0"/>
+                <a:ea typeface="Courier New" pitchFamily="34" charset="-122"/>
+                <a:cs typeface="Courier New" pitchFamily="34" charset="-120"/>
+              </a:rPr>
+              <a:t>15</a:t>
+            </a:r>
+            <a:r>
+              <a:rPr lang="en-US" sz="950" dirty="0">
+                <a:solidFill>
+                  <a:srgbClr val="CCCCCC"/>
+                </a:solidFill>
+                <a:latin typeface="Courier New" pitchFamily="34" charset="0"/>
+                <a:ea typeface="Courier New" pitchFamily="34" charset="-122"/>
+                <a:cs typeface="Courier New" pitchFamily="34" charset="-120"/>
+              </a:rPr>
+              <a:t>,</a:t>
+            </a:r>
+            <a:r>
+              <a:rPr lang="en-US" sz="950" dirty="0">
+                <a:solidFill>
+                  <a:srgbClr val="B5CEA8"/>
+                </a:solidFill>
+                <a:latin typeface="Courier New" pitchFamily="34" charset="0"/>
+                <a:ea typeface="Courier New" pitchFamily="34" charset="-122"/>
+                <a:cs typeface="Courier New" pitchFamily="34" charset="-120"/>
+              </a:rPr>
+              <a:t>0</a:t>
+            </a:r>
+            <a:r>
+              <a:rPr lang="en-US" sz="950" dirty="0">
+                <a:solidFill>
+                  <a:srgbClr val="CCCCCC"/>
+                </a:solidFill>
+                <a:latin typeface="Courier New" pitchFamily="34" charset="0"/>
+                <a:ea typeface="Courier New" pitchFamily="34" charset="-122"/>
+                <a:cs typeface="Courier New" pitchFamily="34" charset="-120"/>
+              </a:rPr>
+              <a:t>)</a:t>
+            </a:r>
+            <a:r>
+              <a:rPr lang="en-US" sz="950" dirty="0">
+                <a:solidFill>
+                  <a:srgbClr val="CCCCCC"/>
+                </a:solidFill>
+                <a:latin typeface="Courier New" pitchFamily="34" charset="0"/>
+                <a:ea typeface="Courier New" pitchFamily="34" charset="-122"/>
+                <a:cs typeface="Courier New" pitchFamily="34" charset="-120"/>
+              </a:rPr>
+              <a:t> </a:t>
+            </a:r>
+            <a:r>
+              <a:rPr lang="en-US" sz="950" dirty="0">
+                <a:solidFill>
+                  <a:srgbClr val="CCCCCC"/>
+                </a:solidFill>
+                <a:latin typeface="Courier New" pitchFamily="34" charset="0"/>
+                <a:ea typeface="Courier New" pitchFamily="34" charset="-122"/>
+                <a:cs typeface="Courier New" pitchFamily="34" charset="-120"/>
+              </a:rPr>
+              <a:t>)</a:t>
             </a:r>
             <a:r>
               <a:rPr lang="en-US" sz="950" dirty="0">
@@ -20627,7 +20972,40 @@
                 <a:ea typeface="Courier New" pitchFamily="34" charset="-122"/>
                 <a:cs typeface="Courier New" pitchFamily="34" charset="-120"/>
               </a:rPr>
-              <a:t>                     </a:t>
+              <a:t>              </a:t>
+            </a:r>
+            <a:r>
+              <a:rPr lang="en-US" sz="950" dirty="0">
+                <a:solidFill>
+                  <a:srgbClr val="CE9178"/>
+                </a:solidFill>
+                <a:latin typeface="Courier New" pitchFamily="34" charset="0"/>
+                <a:ea typeface="Courier New" pitchFamily="34" charset="-122"/>
+                <a:cs typeface="Courier New" pitchFamily="34" charset="-120"/>
+              </a:rPr>
+              <a:t>'UTC'</a:t>
+            </a:r>
+            <a:r>
+              <a:rPr lang="en-US" sz="950" dirty="0">
+                <a:solidFill>
+                  <a:srgbClr val="CCCCCC"/>
+                </a:solidFill>
+                <a:latin typeface="Courier New" pitchFamily="34" charset="0"/>
+                <a:ea typeface="Courier New" pitchFamily="34" charset="-122"/>
+                <a:cs typeface="Courier New" pitchFamily="34" charset="-120"/>
+              </a:rPr>
+              <a:t>,</a:t>
+            </a:r>
+            <a:r>
+              <a:rPr lang="en-US" sz="950" dirty="0">
+                <a:solidFill>
+                  <a:srgbClr val="CCCCCC"/>
+                </a:solidFill>
+                <a:latin typeface="Courier New" pitchFamily="34" charset="0"/>
+                <a:ea typeface="Courier New" pitchFamily="34" charset="-122"/>
+                <a:cs typeface="Courier New" pitchFamily="34" charset="-120"/>
+              </a:rPr>
+              <a:t> </a:t>
             </a:r>
             <a:r>
               <a:rPr lang="en-US" sz="950" dirty="0">
@@ -20638,7 +21016,18 @@
                 <a:ea typeface="Courier New" pitchFamily="34" charset="-122"/>
                 <a:cs typeface="Courier New" pitchFamily="34" charset="-120"/>
               </a:rPr>
-              <a:t>$session.system_date</a:t>
+              <a:t>$session.client</a:t>
+            </a:r>
+            <a:r>
+              <a:rPr lang="en-US" sz="950" dirty="0">
+                <a:solidFill>
+                  <a:srgbClr val="CCCCCC"/>
+                </a:solidFill>
+                <a:latin typeface="Courier New" pitchFamily="34" charset="0"/>
+                <a:ea typeface="Courier New" pitchFamily="34" charset="-122"/>
+                <a:cs typeface="Courier New" pitchFamily="34" charset="-120"/>
+              </a:rPr>
+              <a:t>,</a:t>
             </a:r>
             <a:r>
               <a:rPr lang="en-US" sz="950" dirty="0">
@@ -20654,6 +21043,28 @@
             <a:r>
               <a:rPr lang="en-US" sz="950" dirty="0">
                 <a:solidFill>
+                  <a:srgbClr val="CE9178"/>
+                </a:solidFill>
+                <a:latin typeface="Courier New" pitchFamily="34" charset="0"/>
+                <a:ea typeface="Courier New" pitchFamily="34" charset="-122"/>
+                <a:cs typeface="Courier New" pitchFamily="34" charset="-120"/>
+              </a:rPr>
+              <a:t>'NULL'</a:t>
+            </a:r>
+            <a:r>
+              <a:rPr lang="en-US" sz="950" dirty="0">
+                <a:solidFill>
+                  <a:srgbClr val="CCCCCC"/>
+                </a:solidFill>
+                <a:latin typeface="Courier New" pitchFamily="34" charset="0"/>
+                <a:ea typeface="Courier New" pitchFamily="34" charset="-122"/>
+                <a:cs typeface="Courier New" pitchFamily="34" charset="-120"/>
+              </a:rPr>
+              <a:t> </a:t>
+            </a:r>
+            <a:r>
+              <a:rPr lang="en-US" sz="950" dirty="0">
+                <a:solidFill>
                   <a:srgbClr val="CCCCCC"/>
                 </a:solidFill>
                 <a:latin typeface="Courier New" pitchFamily="34" charset="0"/>
@@ -20671,7 +21082,7 @@
                 <a:ea typeface="Courier New" pitchFamily="34" charset="-122"/>
                 <a:cs typeface="Courier New" pitchFamily="34" charset="-120"/>
               </a:rPr>
-              <a:t>     </a:t>
+              <a:t> </a:t>
             </a:r>
             <a:r>
               <a:rPr lang="en-US" sz="950" dirty="0">
@@ -20704,7 +21115,84 @@
                 <a:ea typeface="Courier New" pitchFamily="34" charset="-122"/>
                 <a:cs typeface="Courier New" pitchFamily="34" charset="-120"/>
               </a:rPr>
-              <a:t>DaysInCompany</a:t>
+              <a:t>abap</a:t>
+            </a:r>
+            <a:r>
+              <a:rPr lang="en-US" sz="950" dirty="0">
+                <a:solidFill>
+                  <a:srgbClr val="CCCCCC"/>
+                </a:solidFill>
+                <a:latin typeface="Courier New" pitchFamily="34" charset="0"/>
+                <a:ea typeface="Courier New" pitchFamily="34" charset="-122"/>
+                <a:cs typeface="Courier New" pitchFamily="34" charset="-120"/>
+              </a:rPr>
+              <a:t>.</a:t>
+            </a:r>
+            <a:r>
+              <a:rPr lang="en-US" sz="950" dirty="0">
+                <a:solidFill>
+                  <a:srgbClr val="DCDCAA"/>
+                </a:solidFill>
+                <a:latin typeface="Courier New" pitchFamily="34" charset="0"/>
+                <a:ea typeface="Courier New" pitchFamily="34" charset="-122"/>
+                <a:cs typeface="Courier New" pitchFamily="34" charset="-120"/>
+              </a:rPr>
+              <a:t>char</a:t>
+            </a:r>
+            <a:r>
+              <a:rPr lang="en-US" sz="950" dirty="0">
+                <a:solidFill>
+                  <a:srgbClr val="CCCCCC"/>
+                </a:solidFill>
+                <a:latin typeface="Courier New" pitchFamily="34" charset="0"/>
+                <a:ea typeface="Courier New" pitchFamily="34" charset="-122"/>
+                <a:cs typeface="Courier New" pitchFamily="34" charset="-120"/>
+              </a:rPr>
+              <a:t>(</a:t>
+            </a:r>
+            <a:r>
+              <a:rPr lang="en-US" sz="950" dirty="0">
+                <a:solidFill>
+                  <a:srgbClr val="B5CEA8"/>
+                </a:solidFill>
+                <a:latin typeface="Courier New" pitchFamily="34" charset="0"/>
+                <a:ea typeface="Courier New" pitchFamily="34" charset="-122"/>
+                <a:cs typeface="Courier New" pitchFamily="34" charset="-120"/>
+              </a:rPr>
+              <a:t>8</a:t>
+            </a:r>
+            <a:r>
+              <a:rPr lang="en-US" sz="950" dirty="0">
+                <a:solidFill>
+                  <a:srgbClr val="CCCCCC"/>
+                </a:solidFill>
+                <a:latin typeface="Courier New" pitchFamily="34" charset="0"/>
+                <a:ea typeface="Courier New" pitchFamily="34" charset="-122"/>
+                <a:cs typeface="Courier New" pitchFamily="34" charset="-120"/>
+              </a:rPr>
+              <a:t>)</a:t>
+            </a:r>
+            <a:r>
+              <a:rPr lang="en-US" sz="950" dirty="0">
+                <a:solidFill>
+                  <a:srgbClr val="CCCCCC"/>
+                </a:solidFill>
+                <a:latin typeface="Courier New" pitchFamily="34" charset="0"/>
+                <a:ea typeface="Courier New" pitchFamily="34" charset="-122"/>
+                <a:cs typeface="Courier New" pitchFamily="34" charset="-120"/>
+              </a:rPr>
+              <a:t> </a:t>
+            </a:r>
+            <a:r>
+              <a:rPr lang="en-US" sz="950" dirty="0">
+                <a:solidFill>
+                  <a:srgbClr val="CCCCCC"/>
+                </a:solidFill>
+                <a:latin typeface="Courier New" pitchFamily="34" charset="0"/>
+                <a:ea typeface="Courier New" pitchFamily="34" charset="-122"/>
+                <a:cs typeface="Courier New" pitchFamily="34" charset="-120"/>
+              </a:rPr>
+              <a:t>)</a:t>
             </a:r>
             <a:r>
               <a:rPr lang="en-US" sz="950" dirty="0">
@@ -20716,6 +21204,50 @@
                 <a:cs typeface="Courier New" pitchFamily="34" charset="-120"/>
               </a:rPr>
               <a:t>,</a:t>
+            </a:r>
+            <a:r>
+              <a:rPr lang="en-US" sz="950" dirty="0">
+                <a:solidFill>
+                  <a:srgbClr val="CCCCCC"/>
+                </a:solidFill>
+                <a:latin typeface="Courier New" pitchFamily="34" charset="0"/>
+                <a:ea typeface="Courier New" pitchFamily="34" charset="-122"/>
+                <a:cs typeface="Courier New" pitchFamily="34" charset="-120"/>
+              </a:rPr>
+              <a:t> </a:t>
+            </a:r>
+            <a:r>
+              <a:rPr lang="en-US" sz="950" dirty="0">
+                <a:solidFill>
+                  <a:srgbClr val="B5CEA8"/>
+                </a:solidFill>
+                <a:latin typeface="Courier New" pitchFamily="34" charset="0"/>
+                <a:ea typeface="Courier New" pitchFamily="34" charset="-122"/>
+                <a:cs typeface="Courier New" pitchFamily="34" charset="-120"/>
+              </a:rPr>
+              <a:t>6</a:t>
+            </a:r>
+            <a:r>
+              <a:rPr lang="en-US" sz="950" dirty="0">
+                <a:solidFill>
+                  <a:srgbClr val="CCCCCC"/>
+                </a:solidFill>
+                <a:latin typeface="Courier New" pitchFamily="34" charset="0"/>
+                <a:ea typeface="Courier New" pitchFamily="34" charset="-122"/>
+                <a:cs typeface="Courier New" pitchFamily="34" charset="-120"/>
+              </a:rPr>
+              <a:t> </a:t>
+            </a:r>
+            <a:r>
+              <a:rPr lang="en-US" sz="950" dirty="0">
+                <a:solidFill>
+                  <a:srgbClr val="CCCCCC"/>
+                </a:solidFill>
+                <a:latin typeface="Courier New" pitchFamily="34" charset="0"/>
+                <a:ea typeface="Courier New" pitchFamily="34" charset="-122"/>
+                <a:cs typeface="Courier New" pitchFamily="34" charset="-120"/>
+              </a:rPr>
+              <a:t>)</a:t>
             </a:r>
             <a:endParaRPr lang="en-US" sz="950" dirty="0"/>
           </a:p>
@@ -20729,13 +21261,57 @@
             <a:r>
               <a:rPr lang="en-US" sz="950" dirty="0">
                 <a:solidFill>
-                  <a:srgbClr val="000000"/>
+                  <a:srgbClr val="CCCCCC"/>
+                </a:solidFill>
+                <a:latin typeface="Courier New" pitchFamily="34" charset="0"/>
+                <a:ea typeface="Courier New" pitchFamily="34" charset="-122"/>
+                <a:cs typeface="Courier New" pitchFamily="34" charset="-120"/>
+              </a:rPr>
+              <a:t>                                                </a:t>
+            </a:r>
+            <a:r>
+              <a:rPr lang="en-US" sz="950" dirty="0">
+                <a:solidFill>
+                  <a:srgbClr val="569CD6"/>
+                </a:solidFill>
+                <a:latin typeface="Courier New" pitchFamily="34" charset="0"/>
+                <a:ea typeface="Courier New" pitchFamily="34" charset="-122"/>
+                <a:cs typeface="Courier New" pitchFamily="34" charset="-120"/>
+              </a:rPr>
+              <a:t>as</a:t>
+            </a:r>
+            <a:r>
+              <a:rPr lang="en-US" sz="950" dirty="0">
+                <a:solidFill>
+                  <a:srgbClr val="CCCCCC"/>
                 </a:solidFill>
                 <a:latin typeface="Courier New" pitchFamily="34" charset="0"/>
                 <a:ea typeface="Courier New" pitchFamily="34" charset="-122"/>
                 <a:cs typeface="Courier New" pitchFamily="34" charset="-120"/>
               </a:rPr>
               <a:t> </a:t>
+            </a:r>
+            <a:r>
+              <a:rPr lang="en-US" sz="950" dirty="0">
+                <a:solidFill>
+                  <a:srgbClr val="CCCCCC"/>
+                </a:solidFill>
+                <a:latin typeface="Courier New" pitchFamily="34" charset="0"/>
+                <a:ea typeface="Courier New" pitchFamily="34" charset="-122"/>
+                <a:cs typeface="Courier New" pitchFamily="34" charset="-120"/>
+              </a:rPr>
+              <a:t>MesCriacao</a:t>
+            </a:r>
+            <a:r>
+              <a:rPr lang="en-US" sz="950" dirty="0">
+                <a:solidFill>
+                  <a:srgbClr val="CCCCCC"/>
+                </a:solidFill>
+                <a:latin typeface="Courier New" pitchFamily="34" charset="0"/>
+                <a:ea typeface="Courier New" pitchFamily="34" charset="-122"/>
+                <a:cs typeface="Courier New" pitchFamily="34" charset="-120"/>
+              </a:rPr>
+              <a:t>,</a:t>
             </a:r>
             <a:endParaRPr lang="en-US" sz="950" dirty="0"/>
           </a:p>
@@ -20749,57 +21325,13 @@
             <a:r>
               <a:rPr lang="en-US" sz="950" dirty="0">
                 <a:solidFill>
-                  <a:srgbClr val="CCCCCC"/>
-                </a:solidFill>
-                <a:latin typeface="Courier New" pitchFamily="34" charset="0"/>
-                <a:ea typeface="Courier New" pitchFamily="34" charset="-122"/>
-                <a:cs typeface="Courier New" pitchFamily="34" charset="-120"/>
-              </a:rPr>
-              <a:t>  </a:t>
-            </a:r>
-            <a:r>
-              <a:rPr lang="en-US" sz="950" dirty="0">
-                <a:solidFill>
-                  <a:srgbClr val="4EC9B0"/>
-                </a:solidFill>
-                <a:latin typeface="Courier New" pitchFamily="34" charset="0"/>
-                <a:ea typeface="Courier New" pitchFamily="34" charset="-122"/>
-                <a:cs typeface="Courier New" pitchFamily="34" charset="-120"/>
-              </a:rPr>
-              <a:t>@Semantics.amount.currencyCode</a:t>
-            </a:r>
-            <a:r>
-              <a:rPr lang="en-US" sz="950" dirty="0">
-                <a:solidFill>
-                  <a:srgbClr val="CCCCCC"/>
-                </a:solidFill>
-                <a:latin typeface="Courier New" pitchFamily="34" charset="0"/>
-                <a:ea typeface="Courier New" pitchFamily="34" charset="-122"/>
-                <a:cs typeface="Courier New" pitchFamily="34" charset="-120"/>
-              </a:rPr>
-              <a:t>:</a:t>
-            </a:r>
-            <a:r>
-              <a:rPr lang="en-US" sz="950" dirty="0">
-                <a:solidFill>
-                  <a:srgbClr val="CCCCCC"/>
+                  <a:srgbClr val="000000"/>
                 </a:solidFill>
                 <a:latin typeface="Courier New" pitchFamily="34" charset="0"/>
                 <a:ea typeface="Courier New" pitchFamily="34" charset="-122"/>
                 <a:cs typeface="Courier New" pitchFamily="34" charset="-120"/>
               </a:rPr>
               <a:t> </a:t>
-            </a:r>
-            <a:r>
-              <a:rPr lang="en-US" sz="950" dirty="0">
-                <a:solidFill>
-                  <a:srgbClr val="CE9178"/>
-                </a:solidFill>
-                <a:latin typeface="Courier New" pitchFamily="34" charset="0"/>
-                <a:ea typeface="Courier New" pitchFamily="34" charset="-122"/>
-                <a:cs typeface="Courier New" pitchFamily="34" charset="-120"/>
-              </a:rPr>
-              <a:t>'TargetCurrency'</a:t>
             </a:r>
             <a:endParaRPr lang="en-US" sz="950" dirty="0"/>
           </a:p>
@@ -20824,24 +21356,24 @@
             <a:r>
               <a:rPr lang="en-US" sz="950" dirty="0">
                 <a:solidFill>
-                  <a:srgbClr val="DCDCAA"/>
-                </a:solidFill>
-                <a:latin typeface="Courier New" pitchFamily="34" charset="0"/>
-                <a:ea typeface="Courier New" pitchFamily="34" charset="-122"/>
-                <a:cs typeface="Courier New" pitchFamily="34" charset="-120"/>
-              </a:rPr>
-              <a:t>currency_conversion</a:t>
-            </a:r>
-            <a:r>
-              <a:rPr lang="en-US" sz="950" dirty="0">
-                <a:solidFill>
-                  <a:srgbClr val="CCCCCC"/>
-                </a:solidFill>
-                <a:latin typeface="Courier New" pitchFamily="34" charset="0"/>
-                <a:ea typeface="Courier New" pitchFamily="34" charset="-122"/>
-                <a:cs typeface="Courier New" pitchFamily="34" charset="-120"/>
-              </a:rPr>
-              <a:t>(</a:t>
+                  <a:srgbClr val="4EC9B0"/>
+                </a:solidFill>
+                <a:latin typeface="Courier New" pitchFamily="34" charset="0"/>
+                <a:ea typeface="Courier New" pitchFamily="34" charset="-122"/>
+                <a:cs typeface="Courier New" pitchFamily="34" charset="-120"/>
+              </a:rPr>
+              <a:t>@Semantics.amount.currencyCode</a:t>
+            </a:r>
+            <a:r>
+              <a:rPr lang="en-US" sz="950" dirty="0">
+                <a:solidFill>
+                  <a:srgbClr val="CCCCCC"/>
+                </a:solidFill>
+                <a:latin typeface="Courier New" pitchFamily="34" charset="0"/>
+                <a:ea typeface="Courier New" pitchFamily="34" charset="-122"/>
+                <a:cs typeface="Courier New" pitchFamily="34" charset="-120"/>
+              </a:rPr>
+              <a:t>:</a:t>
             </a:r>
             <a:r>
               <a:rPr lang="en-US" sz="950" dirty="0">
@@ -20857,79 +21389,13 @@
             <a:r>
               <a:rPr lang="en-US" sz="950" dirty="0">
                 <a:solidFill>
-                  <a:srgbClr val="CCCCCC"/>
-                </a:solidFill>
-                <a:latin typeface="Courier New" pitchFamily="34" charset="0"/>
-                <a:ea typeface="Courier New" pitchFamily="34" charset="-122"/>
-                <a:cs typeface="Courier New" pitchFamily="34" charset="-120"/>
-              </a:rPr>
-              <a:t>amount</a:t>
-            </a:r>
-            <a:r>
-              <a:rPr lang="en-US" sz="950" dirty="0">
-                <a:solidFill>
-                  <a:srgbClr val="CCCCCC"/>
-                </a:solidFill>
-                <a:latin typeface="Courier New" pitchFamily="34" charset="0"/>
-                <a:ea typeface="Courier New" pitchFamily="34" charset="-122"/>
-                <a:cs typeface="Courier New" pitchFamily="34" charset="-120"/>
-              </a:rPr>
-              <a:t>             </a:t>
-            </a:r>
-            <a:r>
-              <a:rPr lang="en-US" sz="950" dirty="0">
-                <a:solidFill>
-                  <a:srgbClr val="CCCCCC"/>
-                </a:solidFill>
-                <a:latin typeface="Courier New" pitchFamily="34" charset="0"/>
-                <a:ea typeface="Courier New" pitchFamily="34" charset="-122"/>
-                <a:cs typeface="Courier New" pitchFamily="34" charset="-120"/>
-              </a:rPr>
-              <a:t>=</a:t>
-            </a:r>
-            <a:r>
-              <a:rPr lang="en-US" sz="950" dirty="0">
-                <a:solidFill>
-                  <a:srgbClr val="CCCCCC"/>
-                </a:solidFill>
-                <a:latin typeface="Courier New" pitchFamily="34" charset="0"/>
-                <a:ea typeface="Courier New" pitchFamily="34" charset="-122"/>
-                <a:cs typeface="Courier New" pitchFamily="34" charset="-120"/>
-              </a:rPr>
-              <a:t>&gt;</a:t>
-            </a:r>
-            <a:r>
-              <a:rPr lang="en-US" sz="950" dirty="0">
-                <a:solidFill>
-                  <a:srgbClr val="CCCCCC"/>
-                </a:solidFill>
-                <a:latin typeface="Courier New" pitchFamily="34" charset="0"/>
-                <a:ea typeface="Courier New" pitchFamily="34" charset="-122"/>
-                <a:cs typeface="Courier New" pitchFamily="34" charset="-120"/>
-              </a:rPr>
-              <a:t> </a:t>
-            </a:r>
-            <a:r>
-              <a:rPr lang="en-US" sz="950" dirty="0">
-                <a:solidFill>
-                  <a:srgbClr val="CCCCCC"/>
-                </a:solidFill>
-                <a:latin typeface="Courier New" pitchFamily="34" charset="0"/>
-                <a:ea typeface="Courier New" pitchFamily="34" charset="-122"/>
-                <a:cs typeface="Courier New" pitchFamily="34" charset="-120"/>
-              </a:rPr>
-              <a:t>AnnualSalary</a:t>
-            </a:r>
-            <a:r>
-              <a:rPr lang="en-US" sz="950" dirty="0">
-                <a:solidFill>
-                  <a:srgbClr val="CCCCCC"/>
-                </a:solidFill>
-                <a:latin typeface="Courier New" pitchFamily="34" charset="0"/>
-                <a:ea typeface="Courier New" pitchFamily="34" charset="-122"/>
-                <a:cs typeface="Courier New" pitchFamily="34" charset="-120"/>
-              </a:rPr>
-              <a:t>,</a:t>
+                  <a:srgbClr val="CE9178"/>
+                </a:solidFill>
+                <a:latin typeface="Courier New" pitchFamily="34" charset="0"/>
+                <a:ea typeface="Courier New" pitchFamily="34" charset="-122"/>
+                <a:cs typeface="Courier New" pitchFamily="34" charset="-120"/>
+              </a:rPr>
+              <a:t>'MoedaDestino'</a:t>
             </a:r>
             <a:endParaRPr lang="en-US" sz="950" dirty="0"/>
           </a:p>
@@ -20949,29 +21415,62 @@
                 <a:ea typeface="Courier New" pitchFamily="34" charset="-122"/>
                 <a:cs typeface="Courier New" pitchFamily="34" charset="-120"/>
               </a:rPr>
-              <a:t>                       </a:t>
-            </a:r>
-            <a:r>
-              <a:rPr lang="en-US" sz="950" dirty="0">
-                <a:solidFill>
-                  <a:srgbClr val="CCCCCC"/>
-                </a:solidFill>
-                <a:latin typeface="Courier New" pitchFamily="34" charset="0"/>
-                <a:ea typeface="Courier New" pitchFamily="34" charset="-122"/>
-                <a:cs typeface="Courier New" pitchFamily="34" charset="-120"/>
-              </a:rPr>
-              <a:t>source_currency</a:t>
-            </a:r>
-            <a:r>
-              <a:rPr lang="en-US" sz="950" dirty="0">
-                <a:solidFill>
-                  <a:srgbClr val="CCCCCC"/>
-                </a:solidFill>
-                <a:latin typeface="Courier New" pitchFamily="34" charset="0"/>
-                <a:ea typeface="Courier New" pitchFamily="34" charset="-122"/>
-                <a:cs typeface="Courier New" pitchFamily="34" charset="-120"/>
-              </a:rPr>
-              <a:t>    </a:t>
+              <a:t>  </a:t>
+            </a:r>
+            <a:r>
+              <a:rPr lang="en-US" sz="950" dirty="0">
+                <a:solidFill>
+                  <a:srgbClr val="DCDCAA"/>
+                </a:solidFill>
+                <a:latin typeface="Courier New" pitchFamily="34" charset="0"/>
+                <a:ea typeface="Courier New" pitchFamily="34" charset="-122"/>
+                <a:cs typeface="Courier New" pitchFamily="34" charset="-120"/>
+              </a:rPr>
+              <a:t>currency_conversion</a:t>
+            </a:r>
+            <a:r>
+              <a:rPr lang="en-US" sz="950" dirty="0">
+                <a:solidFill>
+                  <a:srgbClr val="CCCCCC"/>
+                </a:solidFill>
+                <a:latin typeface="Courier New" pitchFamily="34" charset="0"/>
+                <a:ea typeface="Courier New" pitchFamily="34" charset="-122"/>
+                <a:cs typeface="Courier New" pitchFamily="34" charset="-120"/>
+              </a:rPr>
+              <a:t>(</a:t>
+            </a:r>
+            <a:r>
+              <a:rPr lang="en-US" sz="950" dirty="0">
+                <a:solidFill>
+                  <a:srgbClr val="CCCCCC"/>
+                </a:solidFill>
+                <a:latin typeface="Courier New" pitchFamily="34" charset="0"/>
+                <a:ea typeface="Courier New" pitchFamily="34" charset="-122"/>
+                <a:cs typeface="Courier New" pitchFamily="34" charset="-120"/>
+              </a:rPr>
+              <a:t> </a:t>
+            </a:r>
+            <a:r>
+              <a:rPr lang="en-US" sz="950" dirty="0">
+                <a:solidFill>
+                  <a:srgbClr val="CCCCCC"/>
+                </a:solidFill>
+                <a:latin typeface="Courier New" pitchFamily="34" charset="0"/>
+                <a:ea typeface="Courier New" pitchFamily="34" charset="-122"/>
+                <a:cs typeface="Courier New" pitchFamily="34" charset="-120"/>
+              </a:rPr>
+              <a:t>amount</a:t>
+            </a:r>
+            <a:r>
+              <a:rPr lang="en-US" sz="950" dirty="0">
+                <a:solidFill>
+                  <a:srgbClr val="CCCCCC"/>
+                </a:solidFill>
+                <a:latin typeface="Courier New" pitchFamily="34" charset="0"/>
+                <a:ea typeface="Courier New" pitchFamily="34" charset="-122"/>
+                <a:cs typeface="Courier New" pitchFamily="34" charset="-120"/>
+              </a:rPr>
+              <a:t>             </a:t>
             </a:r>
             <a:r>
               <a:rPr lang="en-US" sz="950" dirty="0">
@@ -21015,7 +21514,7 @@
                 <a:ea typeface="Courier New" pitchFamily="34" charset="-122"/>
                 <a:cs typeface="Courier New" pitchFamily="34" charset="-120"/>
               </a:rPr>
-              <a:t>CurrencyCode</a:t>
+              <a:t>ValorTotal</a:t>
             </a:r>
             <a:r>
               <a:rPr lang="en-US" sz="950" dirty="0">
@@ -21057,7 +21556,7 @@
                 <a:ea typeface="Courier New" pitchFamily="34" charset="-122"/>
                 <a:cs typeface="Courier New" pitchFamily="34" charset="-120"/>
               </a:rPr>
-              <a:t>target_currency</a:t>
+              <a:t>source_currency</a:t>
             </a:r>
             <a:r>
               <a:rPr lang="en-US" sz="950" dirty="0">
@@ -21106,13 +21605,13 @@
             <a:r>
               <a:rPr lang="en-US" sz="950" dirty="0">
                 <a:solidFill>
-                  <a:srgbClr val="C586C0"/>
-                </a:solidFill>
-                <a:latin typeface="Courier New" pitchFamily="34" charset="0"/>
-                <a:ea typeface="Courier New" pitchFamily="34" charset="-122"/>
-                <a:cs typeface="Courier New" pitchFamily="34" charset="-120"/>
-              </a:rPr>
-              <a:t>$projection.TargetCurrency</a:t>
+                  <a:srgbClr val="CCCCCC"/>
+                </a:solidFill>
+                <a:latin typeface="Courier New" pitchFamily="34" charset="0"/>
+                <a:ea typeface="Courier New" pitchFamily="34" charset="-122"/>
+                <a:cs typeface="Courier New" pitchFamily="34" charset="-120"/>
+              </a:rPr>
+              <a:t>Currency</a:t>
             </a:r>
             <a:r>
               <a:rPr lang="en-US" sz="950" dirty="0">
@@ -21154,7 +21653,40 @@
                 <a:ea typeface="Courier New" pitchFamily="34" charset="-122"/>
                 <a:cs typeface="Courier New" pitchFamily="34" charset="-120"/>
               </a:rPr>
-              <a:t>exchange_rate_date</a:t>
+              <a:t>target_currency</a:t>
+            </a:r>
+            <a:r>
+              <a:rPr lang="en-US" sz="950" dirty="0">
+                <a:solidFill>
+                  <a:srgbClr val="CCCCCC"/>
+                </a:solidFill>
+                <a:latin typeface="Courier New" pitchFamily="34" charset="0"/>
+                <a:ea typeface="Courier New" pitchFamily="34" charset="-122"/>
+                <a:cs typeface="Courier New" pitchFamily="34" charset="-120"/>
+              </a:rPr>
+              <a:t>    </a:t>
+            </a:r>
+            <a:r>
+              <a:rPr lang="en-US" sz="950" dirty="0">
+                <a:solidFill>
+                  <a:srgbClr val="CCCCCC"/>
+                </a:solidFill>
+                <a:latin typeface="Courier New" pitchFamily="34" charset="0"/>
+                <a:ea typeface="Courier New" pitchFamily="34" charset="-122"/>
+                <a:cs typeface="Courier New" pitchFamily="34" charset="-120"/>
+              </a:rPr>
+              <a:t>=</a:t>
+            </a:r>
+            <a:r>
+              <a:rPr lang="en-US" sz="950" dirty="0">
+                <a:solidFill>
+                  <a:srgbClr val="CCCCCC"/>
+                </a:solidFill>
+                <a:latin typeface="Courier New" pitchFamily="34" charset="0"/>
+                <a:ea typeface="Courier New" pitchFamily="34" charset="-122"/>
+                <a:cs typeface="Courier New" pitchFamily="34" charset="-120"/>
+              </a:rPr>
+              <a:t>&gt;</a:t>
             </a:r>
             <a:r>
               <a:rPr lang="en-US" sz="950" dirty="0">
@@ -21170,68 +21702,24 @@
             <a:r>
               <a:rPr lang="en-US" sz="950" dirty="0">
                 <a:solidFill>
-                  <a:srgbClr val="CCCCCC"/>
-                </a:solidFill>
-                <a:latin typeface="Courier New" pitchFamily="34" charset="0"/>
-                <a:ea typeface="Courier New" pitchFamily="34" charset="-122"/>
-                <a:cs typeface="Courier New" pitchFamily="34" charset="-120"/>
-              </a:rPr>
-              <a:t>=</a:t>
-            </a:r>
-            <a:r>
-              <a:rPr lang="en-US" sz="950" dirty="0">
-                <a:solidFill>
-                  <a:srgbClr val="CCCCCC"/>
-                </a:solidFill>
-                <a:latin typeface="Courier New" pitchFamily="34" charset="0"/>
-                <a:ea typeface="Courier New" pitchFamily="34" charset="-122"/>
-                <a:cs typeface="Courier New" pitchFamily="34" charset="-120"/>
-              </a:rPr>
-              <a:t>&gt;</a:t>
-            </a:r>
-            <a:r>
-              <a:rPr lang="en-US" sz="950" dirty="0">
-                <a:solidFill>
-                  <a:srgbClr val="CCCCCC"/>
-                </a:solidFill>
-                <a:latin typeface="Courier New" pitchFamily="34" charset="0"/>
-                <a:ea typeface="Courier New" pitchFamily="34" charset="-122"/>
-                <a:cs typeface="Courier New" pitchFamily="34" charset="-120"/>
-              </a:rPr>
-              <a:t> </a:t>
-            </a:r>
-            <a:r>
-              <a:rPr lang="en-US" sz="950" dirty="0">
-                <a:solidFill>
                   <a:srgbClr val="C586C0"/>
                 </a:solidFill>
                 <a:latin typeface="Courier New" pitchFamily="34" charset="0"/>
                 <a:ea typeface="Courier New" pitchFamily="34" charset="-122"/>
                 <a:cs typeface="Courier New" pitchFamily="34" charset="-120"/>
               </a:rPr>
-              <a:t>$session.system_date</a:t>
-            </a:r>
-            <a:r>
-              <a:rPr lang="en-US" sz="950" dirty="0">
-                <a:solidFill>
-                  <a:srgbClr val="CCCCCC"/>
-                </a:solidFill>
-                <a:latin typeface="Courier New" pitchFamily="34" charset="0"/>
-                <a:ea typeface="Courier New" pitchFamily="34" charset="-122"/>
-                <a:cs typeface="Courier New" pitchFamily="34" charset="-120"/>
-              </a:rPr>
-              <a:t> </a:t>
-            </a:r>
-            <a:r>
-              <a:rPr lang="en-US" sz="950" dirty="0">
-                <a:solidFill>
-                  <a:srgbClr val="CCCCCC"/>
-                </a:solidFill>
-                <a:latin typeface="Courier New" pitchFamily="34" charset="0"/>
-                <a:ea typeface="Courier New" pitchFamily="34" charset="-122"/>
-                <a:cs typeface="Courier New" pitchFamily="34" charset="-120"/>
-              </a:rPr>
-              <a:t>)</a:t>
+              <a:t>$projection.MoedaDestino</a:t>
+            </a:r>
+            <a:r>
+              <a:rPr lang="en-US" sz="950" dirty="0">
+                <a:solidFill>
+                  <a:srgbClr val="CCCCCC"/>
+                </a:solidFill>
+                <a:latin typeface="Courier New" pitchFamily="34" charset="0"/>
+                <a:ea typeface="Courier New" pitchFamily="34" charset="-122"/>
+                <a:cs typeface="Courier New" pitchFamily="34" charset="-120"/>
+              </a:rPr>
+              <a:t>,</a:t>
             </a:r>
             <a:endParaRPr lang="en-US" sz="950" dirty="0"/>
           </a:p>
@@ -21251,18 +21739,18 @@
                 <a:ea typeface="Courier New" pitchFamily="34" charset="-122"/>
                 <a:cs typeface="Courier New" pitchFamily="34" charset="-120"/>
               </a:rPr>
-              <a:t>                                                  </a:t>
-            </a:r>
-            <a:r>
-              <a:rPr lang="en-US" sz="950" dirty="0">
-                <a:solidFill>
-                  <a:srgbClr val="569CD6"/>
-                </a:solidFill>
-                <a:latin typeface="Courier New" pitchFamily="34" charset="0"/>
-                <a:ea typeface="Courier New" pitchFamily="34" charset="-122"/>
-                <a:cs typeface="Courier New" pitchFamily="34" charset="-120"/>
-              </a:rPr>
-              <a:t>as</a:t>
+              <a:t>                       </a:t>
+            </a:r>
+            <a:r>
+              <a:rPr lang="en-US" sz="950" dirty="0">
+                <a:solidFill>
+                  <a:srgbClr val="CCCCCC"/>
+                </a:solidFill>
+                <a:latin typeface="Courier New" pitchFamily="34" charset="0"/>
+                <a:ea typeface="Courier New" pitchFamily="34" charset="-122"/>
+                <a:cs typeface="Courier New" pitchFamily="34" charset="-120"/>
+              </a:rPr>
+              <a:t>exchange_rate_date</a:t>
             </a:r>
             <a:r>
               <a:rPr lang="en-US" sz="950" dirty="0">
@@ -21284,18 +21772,62 @@
                 <a:ea typeface="Courier New" pitchFamily="34" charset="-122"/>
                 <a:cs typeface="Courier New" pitchFamily="34" charset="-120"/>
               </a:rPr>
-              <a:t>SalaryConverted</a:t>
-            </a:r>
-            <a:r>
-              <a:rPr lang="en-US" sz="950" dirty="0">
-                <a:solidFill>
-                  <a:srgbClr val="CCCCCC"/>
-                </a:solidFill>
-                <a:latin typeface="Courier New" pitchFamily="34" charset="0"/>
-                <a:ea typeface="Courier New" pitchFamily="34" charset="-122"/>
-                <a:cs typeface="Courier New" pitchFamily="34" charset="-120"/>
-              </a:rPr>
-              <a:t>,</a:t>
+              <a:t>=</a:t>
+            </a:r>
+            <a:r>
+              <a:rPr lang="en-US" sz="950" dirty="0">
+                <a:solidFill>
+                  <a:srgbClr val="CCCCCC"/>
+                </a:solidFill>
+                <a:latin typeface="Courier New" pitchFamily="34" charset="0"/>
+                <a:ea typeface="Courier New" pitchFamily="34" charset="-122"/>
+                <a:cs typeface="Courier New" pitchFamily="34" charset="-120"/>
+              </a:rPr>
+              <a:t>&gt;</a:t>
+            </a:r>
+            <a:r>
+              <a:rPr lang="en-US" sz="950" dirty="0">
+                <a:solidFill>
+                  <a:srgbClr val="CCCCCC"/>
+                </a:solidFill>
+                <a:latin typeface="Courier New" pitchFamily="34" charset="0"/>
+                <a:ea typeface="Courier New" pitchFamily="34" charset="-122"/>
+                <a:cs typeface="Courier New" pitchFamily="34" charset="-120"/>
+              </a:rPr>
+              <a:t> </a:t>
+            </a:r>
+            <a:r>
+              <a:rPr lang="en-US" sz="950" dirty="0">
+                <a:solidFill>
+                  <a:srgbClr val="C586C0"/>
+                </a:solidFill>
+                <a:latin typeface="Courier New" pitchFamily="34" charset="0"/>
+                <a:ea typeface="Courier New" pitchFamily="34" charset="-122"/>
+                <a:cs typeface="Courier New" pitchFamily="34" charset="-120"/>
+              </a:rPr>
+              <a:t>$session.system_date</a:t>
+            </a:r>
+            <a:r>
+              <a:rPr lang="en-US" sz="950" dirty="0">
+                <a:solidFill>
+                  <a:srgbClr val="CCCCCC"/>
+                </a:solidFill>
+                <a:latin typeface="Courier New" pitchFamily="34" charset="0"/>
+                <a:ea typeface="Courier New" pitchFamily="34" charset="-122"/>
+                <a:cs typeface="Courier New" pitchFamily="34" charset="-120"/>
+              </a:rPr>
+              <a:t> </a:t>
+            </a:r>
+            <a:r>
+              <a:rPr lang="en-US" sz="950" dirty="0">
+                <a:solidFill>
+                  <a:srgbClr val="CCCCCC"/>
+                </a:solidFill>
+                <a:latin typeface="Courier New" pitchFamily="34" charset="0"/>
+                <a:ea typeface="Courier New" pitchFamily="34" charset="-122"/>
+                <a:cs typeface="Courier New" pitchFamily="34" charset="-120"/>
+              </a:rPr>
+              <a:t>)</a:t>
             </a:r>
             <a:endParaRPr lang="en-US" sz="950" dirty="0"/>
           </a:p>
@@ -21315,6 +21847,70 @@
                 <a:ea typeface="Courier New" pitchFamily="34" charset="-122"/>
                 <a:cs typeface="Courier New" pitchFamily="34" charset="-120"/>
               </a:rPr>
+              <a:t>                                                </a:t>
+            </a:r>
+            <a:r>
+              <a:rPr lang="en-US" sz="950" dirty="0">
+                <a:solidFill>
+                  <a:srgbClr val="569CD6"/>
+                </a:solidFill>
+                <a:latin typeface="Courier New" pitchFamily="34" charset="0"/>
+                <a:ea typeface="Courier New" pitchFamily="34" charset="-122"/>
+                <a:cs typeface="Courier New" pitchFamily="34" charset="-120"/>
+              </a:rPr>
+              <a:t>as</a:t>
+            </a:r>
+            <a:r>
+              <a:rPr lang="en-US" sz="950" dirty="0">
+                <a:solidFill>
+                  <a:srgbClr val="CCCCCC"/>
+                </a:solidFill>
+                <a:latin typeface="Courier New" pitchFamily="34" charset="0"/>
+                <a:ea typeface="Courier New" pitchFamily="34" charset="-122"/>
+                <a:cs typeface="Courier New" pitchFamily="34" charset="-120"/>
+              </a:rPr>
+              <a:t> </a:t>
+            </a:r>
+            <a:r>
+              <a:rPr lang="en-US" sz="950" dirty="0">
+                <a:solidFill>
+                  <a:srgbClr val="CCCCCC"/>
+                </a:solidFill>
+                <a:latin typeface="Courier New" pitchFamily="34" charset="0"/>
+                <a:ea typeface="Courier New" pitchFamily="34" charset="-122"/>
+                <a:cs typeface="Courier New" pitchFamily="34" charset="-120"/>
+              </a:rPr>
+              <a:t>ValorConvertido</a:t>
+            </a:r>
+            <a:r>
+              <a:rPr lang="en-US" sz="950" dirty="0">
+                <a:solidFill>
+                  <a:srgbClr val="CCCCCC"/>
+                </a:solidFill>
+                <a:latin typeface="Courier New" pitchFamily="34" charset="0"/>
+                <a:ea typeface="Courier New" pitchFamily="34" charset="-122"/>
+                <a:cs typeface="Courier New" pitchFamily="34" charset="-120"/>
+              </a:rPr>
+              <a:t>,</a:t>
+            </a:r>
+            <a:endParaRPr lang="en-US" sz="950" dirty="0"/>
+          </a:p>
+          <a:p>
+            <a:pPr indent="0" marL="0">
+              <a:lnSpc>
+                <a:spcPct val="105000"/>
+              </a:lnSpc>
+              <a:buNone/>
+            </a:pPr>
+            <a:r>
+              <a:rPr lang="en-US" sz="950" dirty="0">
+                <a:solidFill>
+                  <a:srgbClr val="CCCCCC"/>
+                </a:solidFill>
+                <a:latin typeface="Courier New" pitchFamily="34" charset="0"/>
+                <a:ea typeface="Courier New" pitchFamily="34" charset="-122"/>
+                <a:cs typeface="Courier New" pitchFamily="34" charset="-120"/>
+              </a:rPr>
               <a:t>  </a:t>
             </a:r>
             <a:r>
@@ -21359,7 +21955,7 @@
                 <a:ea typeface="Courier New" pitchFamily="34" charset="-122"/>
                 <a:cs typeface="Courier New" pitchFamily="34" charset="-120"/>
               </a:rPr>
-              <a:t>'EUR'</a:t>
+              <a:t>'USD'</a:t>
             </a:r>
             <a:r>
               <a:rPr lang="en-US" sz="950" dirty="0">
@@ -21491,7 +22087,7 @@
                 <a:ea typeface="Courier New" pitchFamily="34" charset="-122"/>
                 <a:cs typeface="Courier New" pitchFamily="34" charset="-120"/>
               </a:rPr>
-              <a:t>TargetCurrency</a:t>
+              <a:t>MoedaDestino</a:t>
             </a:r>
             <a:endParaRPr lang="en-US" sz="950" dirty="0"/>
           </a:p>
@@ -21735,7 +22331,7 @@
                 <a:ea typeface="Courier New" pitchFamily="34" charset="-122"/>
                 <a:cs typeface="Courier New" pitchFamily="34" charset="-120"/>
               </a:rPr>
-              <a:t>dats_…</a:t>
+              <a:t>tstmp_to_dats</a:t>
             </a:r>
             <a:endParaRPr lang="en-US" sz="1400" dirty="0"/>
           </a:p>
@@ -21749,7 +22345,26 @@
                   <a:srgbClr val="556B82"/>
                 </a:solidFill>
               </a:rPr>
-              <a:t>Funções específicas do tipo de data, como diferença em dias.</a:t>
+              <a:t>No cubo de pedidos, o timestamp de criação vira o ano-mês </a:t>
+            </a:r>
+            <a:r>
+              <a:rPr lang="en-US" sz="1050" dirty="0">
+                <a:solidFill>
+                  <a:srgbClr val="0064D9"/>
+                </a:solidFill>
+                <a:latin typeface="Courier New" pitchFamily="34" charset="0"/>
+                <a:ea typeface="Courier New" pitchFamily="34" charset="-122"/>
+                <a:cs typeface="Courier New" pitchFamily="34" charset="-120"/>
+              </a:rPr>
+              <a:t>MesCriacao</a:t>
+            </a:r>
+            <a:r>
+              <a:rPr lang="en-US" sz="1050" dirty="0">
+                <a:solidFill>
+                  <a:srgbClr val="556B82"/>
+                </a:solidFill>
+              </a:rPr>
+              <a:t>.</a:t>
             </a:r>
             <a:endParaRPr lang="en-US" sz="1400" dirty="0"/>
           </a:p>
@@ -22240,7 +22855,7 @@
                   <a:srgbClr val="89D1FF"/>
                 </a:solidFill>
               </a:rPr>
-              <a:t>AULA 02.06 · SEÇÃO 3</a:t>
+              <a:t>AULA 03.06 · SEÇÃO 3</a:t>
             </a:r>
             <a:endParaRPr lang="en-US" sz="1300" dirty="0"/>
           </a:p>
